--- a/design/templates/papyrus-lapis/template.pptx
+++ b/design/templates/papyrus-lapis/template.pptx
@@ -126,7 +126,7 @@
           <p:cNvPr id="9" name="creative_background">
             <a:extLst>
               <a:ext uri="{FF2B5EF4-FFF2-40B4-BE49-F238E27FC236}">
-                <a16:creationId xmlns:a16="http://schemas.microsoft.com/office/drawing/2014/main" id="{D71D7399-C1DC-578E-0151-343059C180A1}"/>
+                <a16:creationId xmlns:a16="http://schemas.microsoft.com/office/drawing/2014/main" id="{0AC145A0-89A3-1382-2B40-BF931B24F935}"/>
               </a:ext>
             </a:extLst>
           </p:cNvPr>
@@ -290,7 +290,7 @@
             </a:lvl1pPr>
           </a:lstStyle>
           <a:p>
-            <a:fld id="{F02FB69E-0639-468D-B960-1C2B0522D692}" type="datetimeFigureOut">
+            <a:fld id="{402E347B-D365-49E2-9289-3F52BA4D6BD6}" type="datetimeFigureOut">
               <a:rPr lang="en-US" smtClean="0"/>
               <a:t>10/3/2026</a:t>
             </a:fld>
@@ -332,7 +332,7 @@
           <a:bodyPr/>
           <a:lstStyle/>
           <a:p>
-            <a:fld id="{CC0DCAE8-747D-49F7-80B2-98777DEBA5AD}" type="slidenum">
+            <a:fld id="{59E99942-F5A0-42B8-85FC-8F53E2428FF4}" type="slidenum">
               <a:rPr lang="en-US" smtClean="0"/>
               <a:t>‹#›</a:t>
             </a:fld>
@@ -343,7 +343,7 @@
     </p:spTree>
     <p:extLst>
       <p:ext uri="{BB962C8B-B14F-4D97-AF65-F5344CB8AC3E}">
-        <p14:creationId xmlns:p14="http://schemas.microsoft.com/office/powerpoint/2010/main" val="576696010"/>
+        <p14:creationId xmlns:p14="http://schemas.microsoft.com/office/powerpoint/2010/main" val="3037253553"/>
       </p:ext>
     </p:extLst>
   </p:cSld>
@@ -375,7 +375,7 @@
           <p:cNvPr id="7" name="creative_background">
             <a:extLst>
               <a:ext uri="{FF2B5EF4-FFF2-40B4-BE49-F238E27FC236}">
-                <a16:creationId xmlns:a16="http://schemas.microsoft.com/office/drawing/2014/main" id="{47123C94-BB63-F650-5E23-4E7EBA2BABA5}"/>
+                <a16:creationId xmlns:a16="http://schemas.microsoft.com/office/drawing/2014/main" id="{5A8DAFF3-D7C2-4B55-6978-437C95F0C2FD}"/>
               </a:ext>
             </a:extLst>
           </p:cNvPr>
@@ -448,7 +448,7 @@
           <a:bodyPr/>
           <a:lstStyle/>
           <a:p>
-            <a:fld id="{F02FB69E-0639-468D-B960-1C2B0522D692}" type="datetimeFigureOut">
+            <a:fld id="{402E347B-D365-49E2-9289-3F52BA4D6BD6}" type="datetimeFigureOut">
               <a:rPr lang="en-US" smtClean="0"/>
               <a:t>10/3/2026</a:t>
             </a:fld>
@@ -490,7 +490,7 @@
           <a:bodyPr/>
           <a:lstStyle/>
           <a:p>
-            <a:fld id="{CC0DCAE8-747D-49F7-80B2-98777DEBA5AD}" type="slidenum">
+            <a:fld id="{59E99942-F5A0-42B8-85FC-8F53E2428FF4}" type="slidenum">
               <a:rPr lang="en-US" smtClean="0"/>
               <a:t>‹#›</a:t>
             </a:fld>
@@ -503,7 +503,7 @@
           <p:cNvPr id="8" name="body">
             <a:extLst>
               <a:ext uri="{FF2B5EF4-FFF2-40B4-BE49-F238E27FC236}">
-                <a16:creationId xmlns:a16="http://schemas.microsoft.com/office/drawing/2014/main" id="{610F32CD-F48A-7FF0-36B4-13237C288329}"/>
+                <a16:creationId xmlns:a16="http://schemas.microsoft.com/office/drawing/2014/main" id="{373492A1-3A8F-723B-E3B2-6A64A3AF5F21}"/>
               </a:ext>
             </a:extLst>
           </p:cNvPr>
@@ -543,7 +543,7 @@
           <p:cNvPr id="9" name="source">
             <a:extLst>
               <a:ext uri="{FF2B5EF4-FFF2-40B4-BE49-F238E27FC236}">
-                <a16:creationId xmlns:a16="http://schemas.microsoft.com/office/drawing/2014/main" id="{F19F3CBF-1FC3-17E8-E6E2-21467ABDDEDC}"/>
+                <a16:creationId xmlns:a16="http://schemas.microsoft.com/office/drawing/2014/main" id="{5704C7FC-A367-0636-9D9A-7A71B3D5CC8C}"/>
               </a:ext>
             </a:extLst>
           </p:cNvPr>
@@ -598,7 +598,7 @@
     </p:spTree>
     <p:extLst>
       <p:ext uri="{BB962C8B-B14F-4D97-AF65-F5344CB8AC3E}">
-        <p14:creationId xmlns:p14="http://schemas.microsoft.com/office/powerpoint/2010/main" val="1180083457"/>
+        <p14:creationId xmlns:p14="http://schemas.microsoft.com/office/powerpoint/2010/main" val="1077363343"/>
       </p:ext>
     </p:extLst>
   </p:cSld>
@@ -630,7 +630,7 @@
           <p:cNvPr id="7" name="creative_background">
             <a:extLst>
               <a:ext uri="{FF2B5EF4-FFF2-40B4-BE49-F238E27FC236}">
-                <a16:creationId xmlns:a16="http://schemas.microsoft.com/office/drawing/2014/main" id="{43E50EA5-0D08-15AA-78C7-907EB24A902E}"/>
+                <a16:creationId xmlns:a16="http://schemas.microsoft.com/office/drawing/2014/main" id="{6D610A31-7936-47C2-6063-74A6F9EE36AF}"/>
               </a:ext>
             </a:extLst>
           </p:cNvPr>
@@ -703,7 +703,7 @@
           <a:bodyPr/>
           <a:lstStyle/>
           <a:p>
-            <a:fld id="{F02FB69E-0639-468D-B960-1C2B0522D692}" type="datetimeFigureOut">
+            <a:fld id="{402E347B-D365-49E2-9289-3F52BA4D6BD6}" type="datetimeFigureOut">
               <a:rPr lang="en-US" smtClean="0"/>
               <a:t>10/3/2026</a:t>
             </a:fld>
@@ -745,7 +745,7 @@
           <a:bodyPr/>
           <a:lstStyle/>
           <a:p>
-            <a:fld id="{CC0DCAE8-747D-49F7-80B2-98777DEBA5AD}" type="slidenum">
+            <a:fld id="{59E99942-F5A0-42B8-85FC-8F53E2428FF4}" type="slidenum">
               <a:rPr lang="en-US" smtClean="0"/>
               <a:t>‹#›</a:t>
             </a:fld>
@@ -758,7 +758,7 @@
           <p:cNvPr id="8" name="body">
             <a:extLst>
               <a:ext uri="{FF2B5EF4-FFF2-40B4-BE49-F238E27FC236}">
-                <a16:creationId xmlns:a16="http://schemas.microsoft.com/office/drawing/2014/main" id="{F294B330-7DAB-7CC4-7691-6DA58FD2D129}"/>
+                <a16:creationId xmlns:a16="http://schemas.microsoft.com/office/drawing/2014/main" id="{DE515DDB-D826-7F56-05D2-61471745A166}"/>
               </a:ext>
             </a:extLst>
           </p:cNvPr>
@@ -801,7 +801,7 @@
     </p:spTree>
     <p:extLst>
       <p:ext uri="{BB962C8B-B14F-4D97-AF65-F5344CB8AC3E}">
-        <p14:creationId xmlns:p14="http://schemas.microsoft.com/office/powerpoint/2010/main" val="4135785855"/>
+        <p14:creationId xmlns:p14="http://schemas.microsoft.com/office/powerpoint/2010/main" val="2500053371"/>
       </p:ext>
     </p:extLst>
   </p:cSld>
@@ -877,7 +877,7 @@
           <p:cNvPr id="6" name="section_number">
             <a:extLst>
               <a:ext uri="{FF2B5EF4-FFF2-40B4-BE49-F238E27FC236}">
-                <a16:creationId xmlns:a16="http://schemas.microsoft.com/office/drawing/2014/main" id="{2AB35D06-1D8E-2038-4729-9F97938B4805}"/>
+                <a16:creationId xmlns:a16="http://schemas.microsoft.com/office/drawing/2014/main" id="{3181A235-FA62-F8BC-DF5E-F3DEDBC8EAD7}"/>
               </a:ext>
             </a:extLst>
           </p:cNvPr>
@@ -909,7 +909,7 @@
               <a:buFontTx/>
               <a:buNone/>
               <a:defRPr sz="16000" b="1">
-                <a:ln w="19050">
+                <a:ln w="57150">
                   <a:solidFill>
                     <a:srgbClr val="6798E6"/>
                   </a:solidFill>
@@ -933,7 +933,7 @@
           <p:cNvPr id="7" name="subtitle">
             <a:extLst>
               <a:ext uri="{FF2B5EF4-FFF2-40B4-BE49-F238E27FC236}">
-                <a16:creationId xmlns:a16="http://schemas.microsoft.com/office/drawing/2014/main" id="{4A9FA543-FE10-82F7-E5EC-DF8E31CA404B}"/>
+                <a16:creationId xmlns:a16="http://schemas.microsoft.com/office/drawing/2014/main" id="{A12DB891-E9CA-0B51-A507-B326434D4F2C}"/>
               </a:ext>
             </a:extLst>
           </p:cNvPr>
@@ -985,7 +985,7 @@
           <p:cNvPr id="8" name="divider_rule">
             <a:extLst>
               <a:ext uri="{FF2B5EF4-FFF2-40B4-BE49-F238E27FC236}">
-                <a16:creationId xmlns:a16="http://schemas.microsoft.com/office/drawing/2014/main" id="{E93A24D0-E7AF-19C3-3E0A-3705EF53BE1A}"/>
+                <a16:creationId xmlns:a16="http://schemas.microsoft.com/office/drawing/2014/main" id="{016EF455-6601-9E78-B788-2C13567D0CC3}"/>
               </a:ext>
             </a:extLst>
           </p:cNvPr>
@@ -1032,7 +1032,7 @@
           <p:cNvPr id="9" name="divider_rule">
             <a:extLst>
               <a:ext uri="{FF2B5EF4-FFF2-40B4-BE49-F238E27FC236}">
-                <a16:creationId xmlns:a16="http://schemas.microsoft.com/office/drawing/2014/main" id="{E151036B-1508-C0F7-E03C-E95C269E0ACA}"/>
+                <a16:creationId xmlns:a16="http://schemas.microsoft.com/office/drawing/2014/main" id="{7469E063-7E4B-51B3-5C82-E62371A9BF34}"/>
               </a:ext>
             </a:extLst>
           </p:cNvPr>
@@ -1079,7 +1079,7 @@
           <p:cNvPr id="10" name="divider_rule">
             <a:extLst>
               <a:ext uri="{FF2B5EF4-FFF2-40B4-BE49-F238E27FC236}">
-                <a16:creationId xmlns:a16="http://schemas.microsoft.com/office/drawing/2014/main" id="{1E52DC82-0B0E-D943-6490-F9893455FEB0}"/>
+                <a16:creationId xmlns:a16="http://schemas.microsoft.com/office/drawing/2014/main" id="{9E028642-A43B-271E-7649-D6122AB840B7}"/>
               </a:ext>
             </a:extLst>
           </p:cNvPr>
@@ -1124,7 +1124,7 @@
     </p:spTree>
     <p:extLst>
       <p:ext uri="{BB962C8B-B14F-4D97-AF65-F5344CB8AC3E}">
-        <p14:creationId xmlns:p14="http://schemas.microsoft.com/office/powerpoint/2010/main" val="774403760"/>
+        <p14:creationId xmlns:p14="http://schemas.microsoft.com/office/powerpoint/2010/main" val="3486377069"/>
       </p:ext>
     </p:extLst>
   </p:cSld>
@@ -1156,7 +1156,7 @@
           <p:cNvPr id="7" name="creative_background">
             <a:extLst>
               <a:ext uri="{FF2B5EF4-FFF2-40B4-BE49-F238E27FC236}">
-                <a16:creationId xmlns:a16="http://schemas.microsoft.com/office/drawing/2014/main" id="{1584C0BE-68EF-4F42-4BCC-866D9410E146}"/>
+                <a16:creationId xmlns:a16="http://schemas.microsoft.com/office/drawing/2014/main" id="{B4A26FB8-07AB-9C98-ABBB-ECA360F04242}"/>
               </a:ext>
             </a:extLst>
           </p:cNvPr>
@@ -1229,7 +1229,7 @@
           <a:bodyPr/>
           <a:lstStyle/>
           <a:p>
-            <a:fld id="{F02FB69E-0639-468D-B960-1C2B0522D692}" type="datetimeFigureOut">
+            <a:fld id="{402E347B-D365-49E2-9289-3F52BA4D6BD6}" type="datetimeFigureOut">
               <a:rPr lang="en-US" smtClean="0"/>
               <a:t>10/3/2026</a:t>
             </a:fld>
@@ -1271,7 +1271,7 @@
           <a:bodyPr/>
           <a:lstStyle/>
           <a:p>
-            <a:fld id="{CC0DCAE8-747D-49F7-80B2-98777DEBA5AD}" type="slidenum">
+            <a:fld id="{59E99942-F5A0-42B8-85FC-8F53E2428FF4}" type="slidenum">
               <a:rPr lang="en-US" smtClean="0"/>
               <a:t>‹#›</a:t>
             </a:fld>
@@ -1284,7 +1284,7 @@
           <p:cNvPr id="8" name="item_1_title">
             <a:extLst>
               <a:ext uri="{FF2B5EF4-FFF2-40B4-BE49-F238E27FC236}">
-                <a16:creationId xmlns:a16="http://schemas.microsoft.com/office/drawing/2014/main" id="{262431DD-F2D1-7BD6-1E26-75915DF9009C}"/>
+                <a16:creationId xmlns:a16="http://schemas.microsoft.com/office/drawing/2014/main" id="{25DC806D-6839-C98E-FD1E-6E25C71F953B}"/>
               </a:ext>
             </a:extLst>
           </p:cNvPr>
@@ -1334,7 +1334,7 @@
           <p:cNvPr id="9" name="item_1">
             <a:extLst>
               <a:ext uri="{FF2B5EF4-FFF2-40B4-BE49-F238E27FC236}">
-                <a16:creationId xmlns:a16="http://schemas.microsoft.com/office/drawing/2014/main" id="{E85F5DC9-CF30-9A8C-9742-9B9ABD445A76}"/>
+                <a16:creationId xmlns:a16="http://schemas.microsoft.com/office/drawing/2014/main" id="{495FFC53-0A93-B3DB-2F88-770855E0FC50}"/>
               </a:ext>
             </a:extLst>
           </p:cNvPr>
@@ -1382,7 +1382,7 @@
           <p:cNvPr id="10" name="item_2_title">
             <a:extLst>
               <a:ext uri="{FF2B5EF4-FFF2-40B4-BE49-F238E27FC236}">
-                <a16:creationId xmlns:a16="http://schemas.microsoft.com/office/drawing/2014/main" id="{81F4ED67-F52C-1F70-AD0E-BDC79F630AA0}"/>
+                <a16:creationId xmlns:a16="http://schemas.microsoft.com/office/drawing/2014/main" id="{D6E9FCD9-4C66-FEB8-DC3C-40EDAFA7A067}"/>
               </a:ext>
             </a:extLst>
           </p:cNvPr>
@@ -1435,7 +1435,7 @@
           <p:cNvPr id="11" name="item_2">
             <a:extLst>
               <a:ext uri="{FF2B5EF4-FFF2-40B4-BE49-F238E27FC236}">
-                <a16:creationId xmlns:a16="http://schemas.microsoft.com/office/drawing/2014/main" id="{B9A5A6AF-26B4-AC56-2870-88C305419B65}"/>
+                <a16:creationId xmlns:a16="http://schemas.microsoft.com/office/drawing/2014/main" id="{C770AC0C-1C54-82A0-4B00-2C3329976829}"/>
               </a:ext>
             </a:extLst>
           </p:cNvPr>
@@ -1483,7 +1483,7 @@
           <p:cNvPr id="12" name="item_3_title">
             <a:extLst>
               <a:ext uri="{FF2B5EF4-FFF2-40B4-BE49-F238E27FC236}">
-                <a16:creationId xmlns:a16="http://schemas.microsoft.com/office/drawing/2014/main" id="{3D35D583-241A-05A2-2C7B-4412AF4A4563}"/>
+                <a16:creationId xmlns:a16="http://schemas.microsoft.com/office/drawing/2014/main" id="{11ABE897-AC88-2AF6-92A6-9F15D3552032}"/>
               </a:ext>
             </a:extLst>
           </p:cNvPr>
@@ -1536,7 +1536,7 @@
           <p:cNvPr id="13" name="item_3">
             <a:extLst>
               <a:ext uri="{FF2B5EF4-FFF2-40B4-BE49-F238E27FC236}">
-                <a16:creationId xmlns:a16="http://schemas.microsoft.com/office/drawing/2014/main" id="{9C568838-1759-3F53-DEB3-08B2C8011152}"/>
+                <a16:creationId xmlns:a16="http://schemas.microsoft.com/office/drawing/2014/main" id="{88CC387F-D9B5-A218-EF9C-C3C8A0AC8CC4}"/>
               </a:ext>
             </a:extLst>
           </p:cNvPr>
@@ -1584,7 +1584,7 @@
           <p:cNvPr id="14" name="item_4_title">
             <a:extLst>
               <a:ext uri="{FF2B5EF4-FFF2-40B4-BE49-F238E27FC236}">
-                <a16:creationId xmlns:a16="http://schemas.microsoft.com/office/drawing/2014/main" id="{997A3810-9665-FF64-D55D-61ABB88F58E0}"/>
+                <a16:creationId xmlns:a16="http://schemas.microsoft.com/office/drawing/2014/main" id="{59185CB6-EC66-A9DC-54F5-17DCAB0D228E}"/>
               </a:ext>
             </a:extLst>
           </p:cNvPr>
@@ -1637,7 +1637,7 @@
           <p:cNvPr id="15" name="item_4">
             <a:extLst>
               <a:ext uri="{FF2B5EF4-FFF2-40B4-BE49-F238E27FC236}">
-                <a16:creationId xmlns:a16="http://schemas.microsoft.com/office/drawing/2014/main" id="{3FE7638B-882D-E1B6-52E0-9FDDECEDE096}"/>
+                <a16:creationId xmlns:a16="http://schemas.microsoft.com/office/drawing/2014/main" id="{73979204-2F19-9ADE-9AA8-FBD51329707C}"/>
               </a:ext>
             </a:extLst>
           </p:cNvPr>
@@ -1685,7 +1685,7 @@
           <p:cNvPr id="16" name="source">
             <a:extLst>
               <a:ext uri="{FF2B5EF4-FFF2-40B4-BE49-F238E27FC236}">
-                <a16:creationId xmlns:a16="http://schemas.microsoft.com/office/drawing/2014/main" id="{D9E95C1A-75C5-7977-F6CE-C81215BD1B77}"/>
+                <a16:creationId xmlns:a16="http://schemas.microsoft.com/office/drawing/2014/main" id="{2F48E33B-2BE6-3ADC-DC7A-7B43C01E3F06}"/>
               </a:ext>
             </a:extLst>
           </p:cNvPr>
@@ -1740,7 +1740,7 @@
     </p:spTree>
     <p:extLst>
       <p:ext uri="{BB962C8B-B14F-4D97-AF65-F5344CB8AC3E}">
-        <p14:creationId xmlns:p14="http://schemas.microsoft.com/office/powerpoint/2010/main" val="566870389"/>
+        <p14:creationId xmlns:p14="http://schemas.microsoft.com/office/powerpoint/2010/main" val="1549964459"/>
       </p:ext>
     </p:extLst>
   </p:cSld>
@@ -1772,7 +1772,7 @@
           <p:cNvPr id="7" name="creative_background">
             <a:extLst>
               <a:ext uri="{FF2B5EF4-FFF2-40B4-BE49-F238E27FC236}">
-                <a16:creationId xmlns:a16="http://schemas.microsoft.com/office/drawing/2014/main" id="{2B80713C-76DD-D7C3-10F2-4C7270A7638F}"/>
+                <a16:creationId xmlns:a16="http://schemas.microsoft.com/office/drawing/2014/main" id="{66475E60-49B5-0729-3FE2-25486D345E3F}"/>
               </a:ext>
             </a:extLst>
           </p:cNvPr>
@@ -1845,7 +1845,7 @@
           <a:bodyPr/>
           <a:lstStyle/>
           <a:p>
-            <a:fld id="{F02FB69E-0639-468D-B960-1C2B0522D692}" type="datetimeFigureOut">
+            <a:fld id="{402E347B-D365-49E2-9289-3F52BA4D6BD6}" type="datetimeFigureOut">
               <a:rPr lang="en-US" smtClean="0"/>
               <a:t>10/3/2026</a:t>
             </a:fld>
@@ -1887,7 +1887,7 @@
           <a:bodyPr/>
           <a:lstStyle/>
           <a:p>
-            <a:fld id="{CC0DCAE8-747D-49F7-80B2-98777DEBA5AD}" type="slidenum">
+            <a:fld id="{59E99942-F5A0-42B8-85FC-8F53E2428FF4}" type="slidenum">
               <a:rPr lang="en-US" smtClean="0"/>
               <a:t>‹#›</a:t>
             </a:fld>
@@ -1900,7 +1900,7 @@
           <p:cNvPr id="8" name="body">
             <a:extLst>
               <a:ext uri="{FF2B5EF4-FFF2-40B4-BE49-F238E27FC236}">
-                <a16:creationId xmlns:a16="http://schemas.microsoft.com/office/drawing/2014/main" id="{71D683B9-09D1-BAB3-CA55-FC90764143E0}"/>
+                <a16:creationId xmlns:a16="http://schemas.microsoft.com/office/drawing/2014/main" id="{022D6230-8F18-6B61-ED18-19EA6E4C3650}"/>
               </a:ext>
             </a:extLst>
           </p:cNvPr>
@@ -1945,7 +1945,7 @@
           <p:cNvPr id="9" name="source">
             <a:extLst>
               <a:ext uri="{FF2B5EF4-FFF2-40B4-BE49-F238E27FC236}">
-                <a16:creationId xmlns:a16="http://schemas.microsoft.com/office/drawing/2014/main" id="{E57B49D8-4E94-AC5E-96C3-724E90836D4D}"/>
+                <a16:creationId xmlns:a16="http://schemas.microsoft.com/office/drawing/2014/main" id="{383134E2-23D9-5F20-16BD-8998F1038395}"/>
               </a:ext>
             </a:extLst>
           </p:cNvPr>
@@ -2000,7 +2000,7 @@
     </p:spTree>
     <p:extLst>
       <p:ext uri="{BB962C8B-B14F-4D97-AF65-F5344CB8AC3E}">
-        <p14:creationId xmlns:p14="http://schemas.microsoft.com/office/powerpoint/2010/main" val="3449769164"/>
+        <p14:creationId xmlns:p14="http://schemas.microsoft.com/office/powerpoint/2010/main" val="2361635168"/>
       </p:ext>
     </p:extLst>
   </p:cSld>
@@ -2032,7 +2032,7 @@
           <p:cNvPr id="7" name="creative_background">
             <a:extLst>
               <a:ext uri="{FF2B5EF4-FFF2-40B4-BE49-F238E27FC236}">
-                <a16:creationId xmlns:a16="http://schemas.microsoft.com/office/drawing/2014/main" id="{529762F6-1F2E-D9A3-D905-2551372EC33B}"/>
+                <a16:creationId xmlns:a16="http://schemas.microsoft.com/office/drawing/2014/main" id="{78D3EFB1-BD15-9021-353A-BCB70D000669}"/>
               </a:ext>
             </a:extLst>
           </p:cNvPr>
@@ -2105,7 +2105,7 @@
           <a:bodyPr/>
           <a:lstStyle/>
           <a:p>
-            <a:fld id="{F02FB69E-0639-468D-B960-1C2B0522D692}" type="datetimeFigureOut">
+            <a:fld id="{402E347B-D365-49E2-9289-3F52BA4D6BD6}" type="datetimeFigureOut">
               <a:rPr lang="en-US" smtClean="0"/>
               <a:t>10/3/2026</a:t>
             </a:fld>
@@ -2147,7 +2147,7 @@
           <a:bodyPr/>
           <a:lstStyle/>
           <a:p>
-            <a:fld id="{CC0DCAE8-747D-49F7-80B2-98777DEBA5AD}" type="slidenum">
+            <a:fld id="{59E99942-F5A0-42B8-85FC-8F53E2428FF4}" type="slidenum">
               <a:rPr lang="en-US" smtClean="0"/>
               <a:t>‹#›</a:t>
             </a:fld>
@@ -2160,7 +2160,7 @@
           <p:cNvPr id="8" name="item_1_title">
             <a:extLst>
               <a:ext uri="{FF2B5EF4-FFF2-40B4-BE49-F238E27FC236}">
-                <a16:creationId xmlns:a16="http://schemas.microsoft.com/office/drawing/2014/main" id="{EB5258A1-185C-7C1A-FC43-6908218E1A09}"/>
+                <a16:creationId xmlns:a16="http://schemas.microsoft.com/office/drawing/2014/main" id="{108FBCE1-0DEB-7E8C-1C74-44D0ABE7B398}"/>
               </a:ext>
             </a:extLst>
           </p:cNvPr>
@@ -2210,7 +2210,7 @@
           <p:cNvPr id="9" name="item_1">
             <a:extLst>
               <a:ext uri="{FF2B5EF4-FFF2-40B4-BE49-F238E27FC236}">
-                <a16:creationId xmlns:a16="http://schemas.microsoft.com/office/drawing/2014/main" id="{A193D1BE-4E65-0C62-4577-B7BE779828E7}"/>
+                <a16:creationId xmlns:a16="http://schemas.microsoft.com/office/drawing/2014/main" id="{C7C9A96D-2540-0592-0948-C1BA3757C77F}"/>
               </a:ext>
             </a:extLst>
           </p:cNvPr>
@@ -2258,7 +2258,7 @@
           <p:cNvPr id="10" name="item_2_title">
             <a:extLst>
               <a:ext uri="{FF2B5EF4-FFF2-40B4-BE49-F238E27FC236}">
-                <a16:creationId xmlns:a16="http://schemas.microsoft.com/office/drawing/2014/main" id="{6A8B6A3D-9C88-7D47-0BCA-59D43872B007}"/>
+                <a16:creationId xmlns:a16="http://schemas.microsoft.com/office/drawing/2014/main" id="{14431B98-FE9B-30A5-AE3F-62D5099A9858}"/>
               </a:ext>
             </a:extLst>
           </p:cNvPr>
@@ -2311,7 +2311,7 @@
           <p:cNvPr id="11" name="item_2">
             <a:extLst>
               <a:ext uri="{FF2B5EF4-FFF2-40B4-BE49-F238E27FC236}">
-                <a16:creationId xmlns:a16="http://schemas.microsoft.com/office/drawing/2014/main" id="{2329EC89-CA2E-84B3-8110-ACFE35C3D859}"/>
+                <a16:creationId xmlns:a16="http://schemas.microsoft.com/office/drawing/2014/main" id="{3DFB2056-CEBF-C857-6FCD-80739323E687}"/>
               </a:ext>
             </a:extLst>
           </p:cNvPr>
@@ -2359,7 +2359,7 @@
           <p:cNvPr id="12" name="item_3_title">
             <a:extLst>
               <a:ext uri="{FF2B5EF4-FFF2-40B4-BE49-F238E27FC236}">
-                <a16:creationId xmlns:a16="http://schemas.microsoft.com/office/drawing/2014/main" id="{C44320E7-460C-E2FC-DDD5-B20BF0D67815}"/>
+                <a16:creationId xmlns:a16="http://schemas.microsoft.com/office/drawing/2014/main" id="{4B04EC4E-1965-A213-4543-5D5BFB8FFA65}"/>
               </a:ext>
             </a:extLst>
           </p:cNvPr>
@@ -2412,7 +2412,7 @@
           <p:cNvPr id="13" name="item_3">
             <a:extLst>
               <a:ext uri="{FF2B5EF4-FFF2-40B4-BE49-F238E27FC236}">
-                <a16:creationId xmlns:a16="http://schemas.microsoft.com/office/drawing/2014/main" id="{A5564D62-BC04-AD5E-3883-2070CA654EAF}"/>
+                <a16:creationId xmlns:a16="http://schemas.microsoft.com/office/drawing/2014/main" id="{EBCA6A33-0CA4-38BE-9F75-490C32752D24}"/>
               </a:ext>
             </a:extLst>
           </p:cNvPr>
@@ -2460,7 +2460,7 @@
           <p:cNvPr id="14" name="item_4_title">
             <a:extLst>
               <a:ext uri="{FF2B5EF4-FFF2-40B4-BE49-F238E27FC236}">
-                <a16:creationId xmlns:a16="http://schemas.microsoft.com/office/drawing/2014/main" id="{5ECE2D74-9B01-487D-0A60-6525B762B542}"/>
+                <a16:creationId xmlns:a16="http://schemas.microsoft.com/office/drawing/2014/main" id="{C5161877-42A1-4C5F-2CB5-D26FCB7E35A5}"/>
               </a:ext>
             </a:extLst>
           </p:cNvPr>
@@ -2513,7 +2513,7 @@
           <p:cNvPr id="15" name="item_4">
             <a:extLst>
               <a:ext uri="{FF2B5EF4-FFF2-40B4-BE49-F238E27FC236}">
-                <a16:creationId xmlns:a16="http://schemas.microsoft.com/office/drawing/2014/main" id="{C7DE35C2-F2A6-FE19-938F-9CEE23EC1451}"/>
+                <a16:creationId xmlns:a16="http://schemas.microsoft.com/office/drawing/2014/main" id="{E48FCECA-3171-B231-A211-F96FCB2DF0B3}"/>
               </a:ext>
             </a:extLst>
           </p:cNvPr>
@@ -2561,7 +2561,7 @@
           <p:cNvPr id="16" name="source">
             <a:extLst>
               <a:ext uri="{FF2B5EF4-FFF2-40B4-BE49-F238E27FC236}">
-                <a16:creationId xmlns:a16="http://schemas.microsoft.com/office/drawing/2014/main" id="{377B37DB-B9A6-F39D-1C70-B947DC38D825}"/>
+                <a16:creationId xmlns:a16="http://schemas.microsoft.com/office/drawing/2014/main" id="{39E7AAC3-61B9-E1AC-197D-FFCF2FBB92A1}"/>
               </a:ext>
             </a:extLst>
           </p:cNvPr>
@@ -2616,7 +2616,7 @@
     </p:spTree>
     <p:extLst>
       <p:ext uri="{BB962C8B-B14F-4D97-AF65-F5344CB8AC3E}">
-        <p14:creationId xmlns:p14="http://schemas.microsoft.com/office/powerpoint/2010/main" val="159242889"/>
+        <p14:creationId xmlns:p14="http://schemas.microsoft.com/office/powerpoint/2010/main" val="1844372598"/>
       </p:ext>
     </p:extLst>
   </p:cSld>
@@ -2648,7 +2648,7 @@
           <p:cNvPr id="7" name="creative_background">
             <a:extLst>
               <a:ext uri="{FF2B5EF4-FFF2-40B4-BE49-F238E27FC236}">
-                <a16:creationId xmlns:a16="http://schemas.microsoft.com/office/drawing/2014/main" id="{61EB8B0A-8DB5-046D-43A2-6ECF9FB235A2}"/>
+                <a16:creationId xmlns:a16="http://schemas.microsoft.com/office/drawing/2014/main" id="{8C89B593-2442-2645-27E6-68C461B5ABE6}"/>
               </a:ext>
             </a:extLst>
           </p:cNvPr>
@@ -2721,7 +2721,7 @@
           <a:bodyPr/>
           <a:lstStyle/>
           <a:p>
-            <a:fld id="{F02FB69E-0639-468D-B960-1C2B0522D692}" type="datetimeFigureOut">
+            <a:fld id="{402E347B-D365-49E2-9289-3F52BA4D6BD6}" type="datetimeFigureOut">
               <a:rPr lang="en-US" smtClean="0"/>
               <a:t>10/3/2026</a:t>
             </a:fld>
@@ -2763,7 +2763,7 @@
           <a:bodyPr/>
           <a:lstStyle/>
           <a:p>
-            <a:fld id="{CC0DCAE8-747D-49F7-80B2-98777DEBA5AD}" type="slidenum">
+            <a:fld id="{59E99942-F5A0-42B8-85FC-8F53E2428FF4}" type="slidenum">
               <a:rPr lang="en-US" smtClean="0"/>
               <a:t>‹#›</a:t>
             </a:fld>
@@ -2776,7 +2776,7 @@
           <p:cNvPr id="8" name="body">
             <a:extLst>
               <a:ext uri="{FF2B5EF4-FFF2-40B4-BE49-F238E27FC236}">
-                <a16:creationId xmlns:a16="http://schemas.microsoft.com/office/drawing/2014/main" id="{FC7053F8-87BF-09A7-EF6E-87AA266BDEF2}"/>
+                <a16:creationId xmlns:a16="http://schemas.microsoft.com/office/drawing/2014/main" id="{7BCBD5A9-E38A-472F-3A2F-C1800838EDE9}"/>
               </a:ext>
             </a:extLst>
           </p:cNvPr>
@@ -2816,7 +2816,7 @@
           <p:cNvPr id="9" name="kpi_value_1">
             <a:extLst>
               <a:ext uri="{FF2B5EF4-FFF2-40B4-BE49-F238E27FC236}">
-                <a16:creationId xmlns:a16="http://schemas.microsoft.com/office/drawing/2014/main" id="{B0351E8B-F4BA-C048-8BD6-D4A2F7E9A632}"/>
+                <a16:creationId xmlns:a16="http://schemas.microsoft.com/office/drawing/2014/main" id="{24ECF94E-0A30-D4EB-8688-6326E8153F7F}"/>
               </a:ext>
             </a:extLst>
           </p:cNvPr>
@@ -2869,7 +2869,7 @@
           <p:cNvPr id="10" name="kpi_label_1">
             <a:extLst>
               <a:ext uri="{FF2B5EF4-FFF2-40B4-BE49-F238E27FC236}">
-                <a16:creationId xmlns:a16="http://schemas.microsoft.com/office/drawing/2014/main" id="{54D6B3F7-FBA0-AA56-A230-EF7A6CB13018}"/>
+                <a16:creationId xmlns:a16="http://schemas.microsoft.com/office/drawing/2014/main" id="{CF49E05B-4B1D-1D58-6D6F-2F7D1C572719}"/>
               </a:ext>
             </a:extLst>
           </p:cNvPr>
@@ -2917,7 +2917,7 @@
           <p:cNvPr id="11" name="source">
             <a:extLst>
               <a:ext uri="{FF2B5EF4-FFF2-40B4-BE49-F238E27FC236}">
-                <a16:creationId xmlns:a16="http://schemas.microsoft.com/office/drawing/2014/main" id="{087FDCA4-5ABB-DDE4-173A-EC779DE6681A}"/>
+                <a16:creationId xmlns:a16="http://schemas.microsoft.com/office/drawing/2014/main" id="{B88C7629-A009-30A1-E791-6B24B74941F1}"/>
               </a:ext>
             </a:extLst>
           </p:cNvPr>
@@ -2972,7 +2972,7 @@
     </p:spTree>
     <p:extLst>
       <p:ext uri="{BB962C8B-B14F-4D97-AF65-F5344CB8AC3E}">
-        <p14:creationId xmlns:p14="http://schemas.microsoft.com/office/powerpoint/2010/main" val="311513155"/>
+        <p14:creationId xmlns:p14="http://schemas.microsoft.com/office/powerpoint/2010/main" val="1045261881"/>
       </p:ext>
     </p:extLst>
   </p:cSld>
@@ -3004,7 +3004,7 @@
           <p:cNvPr id="7" name="creative_background">
             <a:extLst>
               <a:ext uri="{FF2B5EF4-FFF2-40B4-BE49-F238E27FC236}">
-                <a16:creationId xmlns:a16="http://schemas.microsoft.com/office/drawing/2014/main" id="{D8F2DA99-16FE-39AA-3A22-E3BB92B9EB5B}"/>
+                <a16:creationId xmlns:a16="http://schemas.microsoft.com/office/drawing/2014/main" id="{BD3F2F84-1EC1-E1BF-9460-7734CC756F90}"/>
               </a:ext>
             </a:extLst>
           </p:cNvPr>
@@ -3077,7 +3077,7 @@
           <a:bodyPr/>
           <a:lstStyle/>
           <a:p>
-            <a:fld id="{F02FB69E-0639-468D-B960-1C2B0522D692}" type="datetimeFigureOut">
+            <a:fld id="{402E347B-D365-49E2-9289-3F52BA4D6BD6}" type="datetimeFigureOut">
               <a:rPr lang="en-US" smtClean="0"/>
               <a:t>10/3/2026</a:t>
             </a:fld>
@@ -3119,7 +3119,7 @@
           <a:bodyPr/>
           <a:lstStyle/>
           <a:p>
-            <a:fld id="{CC0DCAE8-747D-49F7-80B2-98777DEBA5AD}" type="slidenum">
+            <a:fld id="{59E99942-F5A0-42B8-85FC-8F53E2428FF4}" type="slidenum">
               <a:rPr lang="en-US" smtClean="0"/>
               <a:t>‹#›</a:t>
             </a:fld>
@@ -3132,7 +3132,7 @@
           <p:cNvPr id="8" name="body">
             <a:extLst>
               <a:ext uri="{FF2B5EF4-FFF2-40B4-BE49-F238E27FC236}">
-                <a16:creationId xmlns:a16="http://schemas.microsoft.com/office/drawing/2014/main" id="{BAE4B893-ECE4-838A-FF70-D75224D620CB}"/>
+                <a16:creationId xmlns:a16="http://schemas.microsoft.com/office/drawing/2014/main" id="{9FAE3219-A9FD-25A1-E802-94EF39379144}"/>
               </a:ext>
             </a:extLst>
           </p:cNvPr>
@@ -3172,7 +3172,7 @@
           <p:cNvPr id="9" name="kpi_value_1">
             <a:extLst>
               <a:ext uri="{FF2B5EF4-FFF2-40B4-BE49-F238E27FC236}">
-                <a16:creationId xmlns:a16="http://schemas.microsoft.com/office/drawing/2014/main" id="{F68A8647-8E0D-1CFE-A00F-D2D63D53763D}"/>
+                <a16:creationId xmlns:a16="http://schemas.microsoft.com/office/drawing/2014/main" id="{122B4C0A-8E5E-BC12-EB70-8C61630E9A3B}"/>
               </a:ext>
             </a:extLst>
           </p:cNvPr>
@@ -3225,7 +3225,7 @@
           <p:cNvPr id="10" name="kpi_label_1">
             <a:extLst>
               <a:ext uri="{FF2B5EF4-FFF2-40B4-BE49-F238E27FC236}">
-                <a16:creationId xmlns:a16="http://schemas.microsoft.com/office/drawing/2014/main" id="{B4F180F6-1F8A-8874-85E4-3EBEBF6C1F73}"/>
+                <a16:creationId xmlns:a16="http://schemas.microsoft.com/office/drawing/2014/main" id="{0F4747C9-2847-57B7-348E-C55CE47ED477}"/>
               </a:ext>
             </a:extLst>
           </p:cNvPr>
@@ -3273,7 +3273,7 @@
           <p:cNvPr id="11" name="kpi_value_2">
             <a:extLst>
               <a:ext uri="{FF2B5EF4-FFF2-40B4-BE49-F238E27FC236}">
-                <a16:creationId xmlns:a16="http://schemas.microsoft.com/office/drawing/2014/main" id="{FB405B7D-C104-A856-0D8B-16F97FA2F202}"/>
+                <a16:creationId xmlns:a16="http://schemas.microsoft.com/office/drawing/2014/main" id="{130B48A5-2772-7128-5D0C-198B49977A1E}"/>
               </a:ext>
             </a:extLst>
           </p:cNvPr>
@@ -3326,7 +3326,7 @@
           <p:cNvPr id="12" name="kpi_label_2">
             <a:extLst>
               <a:ext uri="{FF2B5EF4-FFF2-40B4-BE49-F238E27FC236}">
-                <a16:creationId xmlns:a16="http://schemas.microsoft.com/office/drawing/2014/main" id="{96C7B542-89CE-4DCE-D218-708E1A9CCB42}"/>
+                <a16:creationId xmlns:a16="http://schemas.microsoft.com/office/drawing/2014/main" id="{12FB42FE-DACC-24C2-6A02-D47F83BFBE11}"/>
               </a:ext>
             </a:extLst>
           </p:cNvPr>
@@ -3374,7 +3374,7 @@
           <p:cNvPr id="13" name="kpi_value_3">
             <a:extLst>
               <a:ext uri="{FF2B5EF4-FFF2-40B4-BE49-F238E27FC236}">
-                <a16:creationId xmlns:a16="http://schemas.microsoft.com/office/drawing/2014/main" id="{00E4BFFD-019E-549B-28C3-A692A06B42D4}"/>
+                <a16:creationId xmlns:a16="http://schemas.microsoft.com/office/drawing/2014/main" id="{A6016D59-A79B-D72B-EAC9-D7F09383D633}"/>
               </a:ext>
             </a:extLst>
           </p:cNvPr>
@@ -3427,7 +3427,7 @@
           <p:cNvPr id="14" name="kpi_label_3">
             <a:extLst>
               <a:ext uri="{FF2B5EF4-FFF2-40B4-BE49-F238E27FC236}">
-                <a16:creationId xmlns:a16="http://schemas.microsoft.com/office/drawing/2014/main" id="{B2462AB1-33E2-A1A1-052F-140DF2BCB192}"/>
+                <a16:creationId xmlns:a16="http://schemas.microsoft.com/office/drawing/2014/main" id="{DBDC55FE-3972-C39A-0383-D37AEE058B2D}"/>
               </a:ext>
             </a:extLst>
           </p:cNvPr>
@@ -3475,7 +3475,7 @@
           <p:cNvPr id="15" name="kpi_value_4">
             <a:extLst>
               <a:ext uri="{FF2B5EF4-FFF2-40B4-BE49-F238E27FC236}">
-                <a16:creationId xmlns:a16="http://schemas.microsoft.com/office/drawing/2014/main" id="{5159B521-A38E-BE49-8554-45C4B3436C61}"/>
+                <a16:creationId xmlns:a16="http://schemas.microsoft.com/office/drawing/2014/main" id="{D9D0CB08-4E00-FE5B-D1D0-9E6452E88559}"/>
               </a:ext>
             </a:extLst>
           </p:cNvPr>
@@ -3528,7 +3528,7 @@
           <p:cNvPr id="16" name="kpi_label_4">
             <a:extLst>
               <a:ext uri="{FF2B5EF4-FFF2-40B4-BE49-F238E27FC236}">
-                <a16:creationId xmlns:a16="http://schemas.microsoft.com/office/drawing/2014/main" id="{E99AF3E6-8494-9CA5-7314-71000D7D9109}"/>
+                <a16:creationId xmlns:a16="http://schemas.microsoft.com/office/drawing/2014/main" id="{DF04D71F-C293-3E3A-49ED-CAB004C45EBD}"/>
               </a:ext>
             </a:extLst>
           </p:cNvPr>
@@ -3576,7 +3576,7 @@
           <p:cNvPr id="17" name="source">
             <a:extLst>
               <a:ext uri="{FF2B5EF4-FFF2-40B4-BE49-F238E27FC236}">
-                <a16:creationId xmlns:a16="http://schemas.microsoft.com/office/drawing/2014/main" id="{554DAB1B-FF45-F96A-57ED-2A299193220E}"/>
+                <a16:creationId xmlns:a16="http://schemas.microsoft.com/office/drawing/2014/main" id="{B0B96A84-0BC5-5D03-160C-D479D564D1C2}"/>
               </a:ext>
             </a:extLst>
           </p:cNvPr>
@@ -3631,7 +3631,7 @@
     </p:spTree>
     <p:extLst>
       <p:ext uri="{BB962C8B-B14F-4D97-AF65-F5344CB8AC3E}">
-        <p14:creationId xmlns:p14="http://schemas.microsoft.com/office/powerpoint/2010/main" val="686069962"/>
+        <p14:creationId xmlns:p14="http://schemas.microsoft.com/office/powerpoint/2010/main" val="2723907728"/>
       </p:ext>
     </p:extLst>
   </p:cSld>
@@ -3663,7 +3663,7 @@
           <p:cNvPr id="7" name="creative_background">
             <a:extLst>
               <a:ext uri="{FF2B5EF4-FFF2-40B4-BE49-F238E27FC236}">
-                <a16:creationId xmlns:a16="http://schemas.microsoft.com/office/drawing/2014/main" id="{2B3607A4-4FA1-A7C8-BCBE-5A18FFC04F64}"/>
+                <a16:creationId xmlns:a16="http://schemas.microsoft.com/office/drawing/2014/main" id="{67AAF1C7-2280-5B72-CDB2-0EB5C6828A33}"/>
               </a:ext>
             </a:extLst>
           </p:cNvPr>
@@ -3736,7 +3736,7 @@
           <a:bodyPr/>
           <a:lstStyle/>
           <a:p>
-            <a:fld id="{F02FB69E-0639-468D-B960-1C2B0522D692}" type="datetimeFigureOut">
+            <a:fld id="{402E347B-D365-49E2-9289-3F52BA4D6BD6}" type="datetimeFigureOut">
               <a:rPr lang="en-US" smtClean="0"/>
               <a:t>10/3/2026</a:t>
             </a:fld>
@@ -3778,7 +3778,7 @@
           <a:bodyPr/>
           <a:lstStyle/>
           <a:p>
-            <a:fld id="{CC0DCAE8-747D-49F7-80B2-98777DEBA5AD}" type="slidenum">
+            <a:fld id="{59E99942-F5A0-42B8-85FC-8F53E2428FF4}" type="slidenum">
               <a:rPr lang="en-US" smtClean="0"/>
               <a:t>‹#›</a:t>
             </a:fld>
@@ -3791,7 +3791,7 @@
           <p:cNvPr id="8" name="body">
             <a:extLst>
               <a:ext uri="{FF2B5EF4-FFF2-40B4-BE49-F238E27FC236}">
-                <a16:creationId xmlns:a16="http://schemas.microsoft.com/office/drawing/2014/main" id="{311FF2CE-2A6C-7810-1C93-8CF4D06A358E}"/>
+                <a16:creationId xmlns:a16="http://schemas.microsoft.com/office/drawing/2014/main" id="{2BAB5C9D-2845-641F-9F6F-B7B3EBD92E58}"/>
               </a:ext>
             </a:extLst>
           </p:cNvPr>
@@ -3831,7 +3831,7 @@
           <p:cNvPr id="9" name="kpi_value_1">
             <a:extLst>
               <a:ext uri="{FF2B5EF4-FFF2-40B4-BE49-F238E27FC236}">
-                <a16:creationId xmlns:a16="http://schemas.microsoft.com/office/drawing/2014/main" id="{DE4EB87A-7A61-3B8E-6347-3C9427AFFCF5}"/>
+                <a16:creationId xmlns:a16="http://schemas.microsoft.com/office/drawing/2014/main" id="{FA94E300-98EF-EE42-D646-8233632F9310}"/>
               </a:ext>
             </a:extLst>
           </p:cNvPr>
@@ -3884,7 +3884,7 @@
           <p:cNvPr id="10" name="kpi_label_1">
             <a:extLst>
               <a:ext uri="{FF2B5EF4-FFF2-40B4-BE49-F238E27FC236}">
-                <a16:creationId xmlns:a16="http://schemas.microsoft.com/office/drawing/2014/main" id="{0BFD2111-AC00-BA5F-2F11-ED6DB9AC0CDF}"/>
+                <a16:creationId xmlns:a16="http://schemas.microsoft.com/office/drawing/2014/main" id="{AD522387-F4B5-6F99-D468-660D4EC926D9}"/>
               </a:ext>
             </a:extLst>
           </p:cNvPr>
@@ -3932,7 +3932,7 @@
           <p:cNvPr id="11" name="kpi_value_2">
             <a:extLst>
               <a:ext uri="{FF2B5EF4-FFF2-40B4-BE49-F238E27FC236}">
-                <a16:creationId xmlns:a16="http://schemas.microsoft.com/office/drawing/2014/main" id="{C7EF21A3-3F0F-C302-F1E6-3B753BF3DF7E}"/>
+                <a16:creationId xmlns:a16="http://schemas.microsoft.com/office/drawing/2014/main" id="{F4870908-9081-719C-91C4-C96A15B36C63}"/>
               </a:ext>
             </a:extLst>
           </p:cNvPr>
@@ -3985,7 +3985,7 @@
           <p:cNvPr id="12" name="kpi_label_2">
             <a:extLst>
               <a:ext uri="{FF2B5EF4-FFF2-40B4-BE49-F238E27FC236}">
-                <a16:creationId xmlns:a16="http://schemas.microsoft.com/office/drawing/2014/main" id="{25BD4C3C-A0F2-1166-8AE2-F114FF3EF482}"/>
+                <a16:creationId xmlns:a16="http://schemas.microsoft.com/office/drawing/2014/main" id="{AE6D9203-5D20-B950-0924-71BD640B0726}"/>
               </a:ext>
             </a:extLst>
           </p:cNvPr>
@@ -4033,7 +4033,7 @@
           <p:cNvPr id="13" name="source">
             <a:extLst>
               <a:ext uri="{FF2B5EF4-FFF2-40B4-BE49-F238E27FC236}">
-                <a16:creationId xmlns:a16="http://schemas.microsoft.com/office/drawing/2014/main" id="{CA96B785-C52C-0BBB-1E2F-CE6F1320FDD9}"/>
+                <a16:creationId xmlns:a16="http://schemas.microsoft.com/office/drawing/2014/main" id="{155D4AFD-063B-765B-A359-D32A08F12D29}"/>
               </a:ext>
             </a:extLst>
           </p:cNvPr>
@@ -4088,7 +4088,7 @@
     </p:spTree>
     <p:extLst>
       <p:ext uri="{BB962C8B-B14F-4D97-AF65-F5344CB8AC3E}">
-        <p14:creationId xmlns:p14="http://schemas.microsoft.com/office/powerpoint/2010/main" val="3512236476"/>
+        <p14:creationId xmlns:p14="http://schemas.microsoft.com/office/powerpoint/2010/main" val="1380130374"/>
       </p:ext>
     </p:extLst>
   </p:cSld>
@@ -4120,7 +4120,7 @@
           <p:cNvPr id="7" name="creative_background">
             <a:extLst>
               <a:ext uri="{FF2B5EF4-FFF2-40B4-BE49-F238E27FC236}">
-                <a16:creationId xmlns:a16="http://schemas.microsoft.com/office/drawing/2014/main" id="{2234A826-421F-271D-D956-E39342D27083}"/>
+                <a16:creationId xmlns:a16="http://schemas.microsoft.com/office/drawing/2014/main" id="{FCC5AF07-7458-5F1A-D4B4-E2AE7B69B806}"/>
               </a:ext>
             </a:extLst>
           </p:cNvPr>
@@ -4193,7 +4193,7 @@
           <a:bodyPr/>
           <a:lstStyle/>
           <a:p>
-            <a:fld id="{F02FB69E-0639-468D-B960-1C2B0522D692}" type="datetimeFigureOut">
+            <a:fld id="{402E347B-D365-49E2-9289-3F52BA4D6BD6}" type="datetimeFigureOut">
               <a:rPr lang="en-US" smtClean="0"/>
               <a:t>10/3/2026</a:t>
             </a:fld>
@@ -4235,7 +4235,7 @@
           <a:bodyPr/>
           <a:lstStyle/>
           <a:p>
-            <a:fld id="{CC0DCAE8-747D-49F7-80B2-98777DEBA5AD}" type="slidenum">
+            <a:fld id="{59E99942-F5A0-42B8-85FC-8F53E2428FF4}" type="slidenum">
               <a:rPr lang="en-US" smtClean="0"/>
               <a:t>‹#›</a:t>
             </a:fld>
@@ -4248,7 +4248,7 @@
           <p:cNvPr id="8" name="body">
             <a:extLst>
               <a:ext uri="{FF2B5EF4-FFF2-40B4-BE49-F238E27FC236}">
-                <a16:creationId xmlns:a16="http://schemas.microsoft.com/office/drawing/2014/main" id="{6ED8987C-0E11-A159-74A2-35F381963B91}"/>
+                <a16:creationId xmlns:a16="http://schemas.microsoft.com/office/drawing/2014/main" id="{D2EEB325-4371-D844-F756-B09DB907D09A}"/>
               </a:ext>
             </a:extLst>
           </p:cNvPr>
@@ -4288,7 +4288,7 @@
           <p:cNvPr id="9" name="kpi_value_1">
             <a:extLst>
               <a:ext uri="{FF2B5EF4-FFF2-40B4-BE49-F238E27FC236}">
-                <a16:creationId xmlns:a16="http://schemas.microsoft.com/office/drawing/2014/main" id="{F99713E8-E98E-E6BC-15E4-2BCBDD539D62}"/>
+                <a16:creationId xmlns:a16="http://schemas.microsoft.com/office/drawing/2014/main" id="{A42A14CC-E5CB-1114-1819-F46312ADCC87}"/>
               </a:ext>
             </a:extLst>
           </p:cNvPr>
@@ -4341,7 +4341,7 @@
           <p:cNvPr id="10" name="kpi_label_1">
             <a:extLst>
               <a:ext uri="{FF2B5EF4-FFF2-40B4-BE49-F238E27FC236}">
-                <a16:creationId xmlns:a16="http://schemas.microsoft.com/office/drawing/2014/main" id="{839823FE-D629-3360-6F0F-23DF1EE9E725}"/>
+                <a16:creationId xmlns:a16="http://schemas.microsoft.com/office/drawing/2014/main" id="{E92D9E80-7EB0-815A-6D81-4C8A6B09F273}"/>
               </a:ext>
             </a:extLst>
           </p:cNvPr>
@@ -4389,7 +4389,7 @@
           <p:cNvPr id="11" name="kpi_value_2">
             <a:extLst>
               <a:ext uri="{FF2B5EF4-FFF2-40B4-BE49-F238E27FC236}">
-                <a16:creationId xmlns:a16="http://schemas.microsoft.com/office/drawing/2014/main" id="{83805988-13B5-F93B-AF9B-3509B97E3196}"/>
+                <a16:creationId xmlns:a16="http://schemas.microsoft.com/office/drawing/2014/main" id="{10A3CB27-0A55-1418-C05B-752915CF8812}"/>
               </a:ext>
             </a:extLst>
           </p:cNvPr>
@@ -4442,7 +4442,7 @@
           <p:cNvPr id="12" name="kpi_label_2">
             <a:extLst>
               <a:ext uri="{FF2B5EF4-FFF2-40B4-BE49-F238E27FC236}">
-                <a16:creationId xmlns:a16="http://schemas.microsoft.com/office/drawing/2014/main" id="{DFDE3465-8FB8-FCAE-65C5-686DF2603208}"/>
+                <a16:creationId xmlns:a16="http://schemas.microsoft.com/office/drawing/2014/main" id="{F9317F1F-E6EA-71A0-B427-0545F046DE95}"/>
               </a:ext>
             </a:extLst>
           </p:cNvPr>
@@ -4490,7 +4490,7 @@
           <p:cNvPr id="13" name="kpi_value_3">
             <a:extLst>
               <a:ext uri="{FF2B5EF4-FFF2-40B4-BE49-F238E27FC236}">
-                <a16:creationId xmlns:a16="http://schemas.microsoft.com/office/drawing/2014/main" id="{EA92BCA8-2A1B-5E8E-5995-1E4F313EB474}"/>
+                <a16:creationId xmlns:a16="http://schemas.microsoft.com/office/drawing/2014/main" id="{85BED66C-45FD-3430-522E-8DA9827F248C}"/>
               </a:ext>
             </a:extLst>
           </p:cNvPr>
@@ -4543,7 +4543,7 @@
           <p:cNvPr id="14" name="kpi_label_3">
             <a:extLst>
               <a:ext uri="{FF2B5EF4-FFF2-40B4-BE49-F238E27FC236}">
-                <a16:creationId xmlns:a16="http://schemas.microsoft.com/office/drawing/2014/main" id="{3C3C90ED-5880-39A1-7FC2-705AEDEA12F2}"/>
+                <a16:creationId xmlns:a16="http://schemas.microsoft.com/office/drawing/2014/main" id="{3E13F5AE-445A-6944-A71D-65B29DA1883F}"/>
               </a:ext>
             </a:extLst>
           </p:cNvPr>
@@ -4591,7 +4591,7 @@
           <p:cNvPr id="15" name="kpi_value_4">
             <a:extLst>
               <a:ext uri="{FF2B5EF4-FFF2-40B4-BE49-F238E27FC236}">
-                <a16:creationId xmlns:a16="http://schemas.microsoft.com/office/drawing/2014/main" id="{62A719DB-E7C7-11B8-53BB-C1A0DE4727AE}"/>
+                <a16:creationId xmlns:a16="http://schemas.microsoft.com/office/drawing/2014/main" id="{F9C0E969-5D17-0681-4FF2-6BDAA9509092}"/>
               </a:ext>
             </a:extLst>
           </p:cNvPr>
@@ -4644,7 +4644,7 @@
           <p:cNvPr id="16" name="kpi_label_4">
             <a:extLst>
               <a:ext uri="{FF2B5EF4-FFF2-40B4-BE49-F238E27FC236}">
-                <a16:creationId xmlns:a16="http://schemas.microsoft.com/office/drawing/2014/main" id="{839AF5F4-2F92-5085-AE45-0D71F875D397}"/>
+                <a16:creationId xmlns:a16="http://schemas.microsoft.com/office/drawing/2014/main" id="{21A25B8B-D9B2-4C9E-BBB1-E044066DB41C}"/>
               </a:ext>
             </a:extLst>
           </p:cNvPr>
@@ -4692,7 +4692,7 @@
           <p:cNvPr id="17" name="source">
             <a:extLst>
               <a:ext uri="{FF2B5EF4-FFF2-40B4-BE49-F238E27FC236}">
-                <a16:creationId xmlns:a16="http://schemas.microsoft.com/office/drawing/2014/main" id="{EB34FEF4-27D1-4616-BE31-B42C41397362}"/>
+                <a16:creationId xmlns:a16="http://schemas.microsoft.com/office/drawing/2014/main" id="{0E3A1B8B-A0AD-962D-E03B-BB23B701E567}"/>
               </a:ext>
             </a:extLst>
           </p:cNvPr>
@@ -4747,7 +4747,7 @@
     </p:spTree>
     <p:extLst>
       <p:ext uri="{BB962C8B-B14F-4D97-AF65-F5344CB8AC3E}">
-        <p14:creationId xmlns:p14="http://schemas.microsoft.com/office/powerpoint/2010/main" val="731848435"/>
+        <p14:creationId xmlns:p14="http://schemas.microsoft.com/office/powerpoint/2010/main" val="4209280943"/>
       </p:ext>
     </p:extLst>
   </p:cSld>
@@ -4779,7 +4779,7 @@
           <p:cNvPr id="7" name="creative_background">
             <a:extLst>
               <a:ext uri="{FF2B5EF4-FFF2-40B4-BE49-F238E27FC236}">
-                <a16:creationId xmlns:a16="http://schemas.microsoft.com/office/drawing/2014/main" id="{B0D669B1-C3A3-55B7-C5F6-15EF62DD26E5}"/>
+                <a16:creationId xmlns:a16="http://schemas.microsoft.com/office/drawing/2014/main" id="{1768DEB0-641A-A15E-2DDF-791B73CA9C77}"/>
               </a:ext>
             </a:extLst>
           </p:cNvPr>
@@ -4852,7 +4852,7 @@
           <a:bodyPr/>
           <a:lstStyle/>
           <a:p>
-            <a:fld id="{F02FB69E-0639-468D-B960-1C2B0522D692}" type="datetimeFigureOut">
+            <a:fld id="{402E347B-D365-49E2-9289-3F52BA4D6BD6}" type="datetimeFigureOut">
               <a:rPr lang="en-US" smtClean="0"/>
               <a:t>10/3/2026</a:t>
             </a:fld>
@@ -4894,7 +4894,7 @@
           <a:bodyPr/>
           <a:lstStyle/>
           <a:p>
-            <a:fld id="{CC0DCAE8-747D-49F7-80B2-98777DEBA5AD}" type="slidenum">
+            <a:fld id="{59E99942-F5A0-42B8-85FC-8F53E2428FF4}" type="slidenum">
               <a:rPr lang="en-US" smtClean="0"/>
               <a:t>‹#›</a:t>
             </a:fld>
@@ -4907,7 +4907,7 @@
           <p:cNvPr id="8" name="item_1_title">
             <a:extLst>
               <a:ext uri="{FF2B5EF4-FFF2-40B4-BE49-F238E27FC236}">
-                <a16:creationId xmlns:a16="http://schemas.microsoft.com/office/drawing/2014/main" id="{ACA655B9-BCC2-F538-18AA-A05D88E2F82A}"/>
+                <a16:creationId xmlns:a16="http://schemas.microsoft.com/office/drawing/2014/main" id="{2374A7D7-20F5-470C-F64B-06C6C9EEE139}"/>
               </a:ext>
             </a:extLst>
           </p:cNvPr>
@@ -4957,7 +4957,7 @@
           <p:cNvPr id="9" name="item_1">
             <a:extLst>
               <a:ext uri="{FF2B5EF4-FFF2-40B4-BE49-F238E27FC236}">
-                <a16:creationId xmlns:a16="http://schemas.microsoft.com/office/drawing/2014/main" id="{71E80976-AF67-A85A-D05D-F2FF913D949F}"/>
+                <a16:creationId xmlns:a16="http://schemas.microsoft.com/office/drawing/2014/main" id="{A48A4BEA-9607-95CC-ADA2-FC3D2745BD23}"/>
               </a:ext>
             </a:extLst>
           </p:cNvPr>
@@ -5005,7 +5005,7 @@
           <p:cNvPr id="10" name="item_2_title">
             <a:extLst>
               <a:ext uri="{FF2B5EF4-FFF2-40B4-BE49-F238E27FC236}">
-                <a16:creationId xmlns:a16="http://schemas.microsoft.com/office/drawing/2014/main" id="{9E782BDF-C617-3DC9-1064-9D2020334D3D}"/>
+                <a16:creationId xmlns:a16="http://schemas.microsoft.com/office/drawing/2014/main" id="{7DAE965C-BF31-30C7-E499-8A5E779625C4}"/>
               </a:ext>
             </a:extLst>
           </p:cNvPr>
@@ -5058,7 +5058,7 @@
           <p:cNvPr id="11" name="item_2">
             <a:extLst>
               <a:ext uri="{FF2B5EF4-FFF2-40B4-BE49-F238E27FC236}">
-                <a16:creationId xmlns:a16="http://schemas.microsoft.com/office/drawing/2014/main" id="{B5FB68E5-8727-FBB7-9A3F-F37E867215CB}"/>
+                <a16:creationId xmlns:a16="http://schemas.microsoft.com/office/drawing/2014/main" id="{040B5FE1-0DF9-A31D-B179-B8FC52CFD799}"/>
               </a:ext>
             </a:extLst>
           </p:cNvPr>
@@ -5106,7 +5106,7 @@
           <p:cNvPr id="12" name="item_3_title">
             <a:extLst>
               <a:ext uri="{FF2B5EF4-FFF2-40B4-BE49-F238E27FC236}">
-                <a16:creationId xmlns:a16="http://schemas.microsoft.com/office/drawing/2014/main" id="{68DBB899-55A5-157C-3653-F7C4269AC0F6}"/>
+                <a16:creationId xmlns:a16="http://schemas.microsoft.com/office/drawing/2014/main" id="{911AA02F-D6AA-4FEC-F916-670E0C3D655B}"/>
               </a:ext>
             </a:extLst>
           </p:cNvPr>
@@ -5159,7 +5159,7 @@
           <p:cNvPr id="13" name="item_3">
             <a:extLst>
               <a:ext uri="{FF2B5EF4-FFF2-40B4-BE49-F238E27FC236}">
-                <a16:creationId xmlns:a16="http://schemas.microsoft.com/office/drawing/2014/main" id="{E63FC03B-DF86-7A2C-B543-1DAA21C86EBB}"/>
+                <a16:creationId xmlns:a16="http://schemas.microsoft.com/office/drawing/2014/main" id="{E707BDD6-9C9F-4527-BA21-FEF81D7F3FAC}"/>
               </a:ext>
             </a:extLst>
           </p:cNvPr>
@@ -5207,7 +5207,7 @@
           <p:cNvPr id="14" name="item_4_title">
             <a:extLst>
               <a:ext uri="{FF2B5EF4-FFF2-40B4-BE49-F238E27FC236}">
-                <a16:creationId xmlns:a16="http://schemas.microsoft.com/office/drawing/2014/main" id="{D290314C-16AB-D9CC-6C28-25E4A0A2B996}"/>
+                <a16:creationId xmlns:a16="http://schemas.microsoft.com/office/drawing/2014/main" id="{2ACB30CA-C055-222C-0530-49C7DC2C6527}"/>
               </a:ext>
             </a:extLst>
           </p:cNvPr>
@@ -5260,7 +5260,7 @@
           <p:cNvPr id="15" name="item_4">
             <a:extLst>
               <a:ext uri="{FF2B5EF4-FFF2-40B4-BE49-F238E27FC236}">
-                <a16:creationId xmlns:a16="http://schemas.microsoft.com/office/drawing/2014/main" id="{32F509C0-C44C-D79B-1567-BC4F413F0775}"/>
+                <a16:creationId xmlns:a16="http://schemas.microsoft.com/office/drawing/2014/main" id="{38ED8FB7-D356-79E4-38AC-543D03D8AB48}"/>
               </a:ext>
             </a:extLst>
           </p:cNvPr>
@@ -5308,7 +5308,7 @@
           <p:cNvPr id="16" name="source">
             <a:extLst>
               <a:ext uri="{FF2B5EF4-FFF2-40B4-BE49-F238E27FC236}">
-                <a16:creationId xmlns:a16="http://schemas.microsoft.com/office/drawing/2014/main" id="{731FEA6D-2A24-3809-D211-8FAFFA823464}"/>
+                <a16:creationId xmlns:a16="http://schemas.microsoft.com/office/drawing/2014/main" id="{57DCF87D-E4DE-D722-A52F-E41DE87C2F1F}"/>
               </a:ext>
             </a:extLst>
           </p:cNvPr>
@@ -5363,7 +5363,7 @@
     </p:spTree>
     <p:extLst>
       <p:ext uri="{BB962C8B-B14F-4D97-AF65-F5344CB8AC3E}">
-        <p14:creationId xmlns:p14="http://schemas.microsoft.com/office/powerpoint/2010/main" val="302065174"/>
+        <p14:creationId xmlns:p14="http://schemas.microsoft.com/office/powerpoint/2010/main" val="116115756"/>
       </p:ext>
     </p:extLst>
   </p:cSld>
@@ -5395,7 +5395,7 @@
           <p:cNvPr id="7" name="creative_background">
             <a:extLst>
               <a:ext uri="{FF2B5EF4-FFF2-40B4-BE49-F238E27FC236}">
-                <a16:creationId xmlns:a16="http://schemas.microsoft.com/office/drawing/2014/main" id="{CB9CD2DE-BF8C-D56F-B06A-09B92F0BC4CA}"/>
+                <a16:creationId xmlns:a16="http://schemas.microsoft.com/office/drawing/2014/main" id="{CA1B1C87-4D20-095B-5142-7F841BDB0B48}"/>
               </a:ext>
             </a:extLst>
           </p:cNvPr>
@@ -5468,7 +5468,7 @@
           <a:bodyPr/>
           <a:lstStyle/>
           <a:p>
-            <a:fld id="{F02FB69E-0639-468D-B960-1C2B0522D692}" type="datetimeFigureOut">
+            <a:fld id="{402E347B-D365-49E2-9289-3F52BA4D6BD6}" type="datetimeFigureOut">
               <a:rPr lang="en-US" smtClean="0"/>
               <a:t>10/3/2026</a:t>
             </a:fld>
@@ -5510,7 +5510,7 @@
           <a:bodyPr/>
           <a:lstStyle/>
           <a:p>
-            <a:fld id="{CC0DCAE8-747D-49F7-80B2-98777DEBA5AD}" type="slidenum">
+            <a:fld id="{59E99942-F5A0-42B8-85FC-8F53E2428FF4}" type="slidenum">
               <a:rPr lang="en-US" smtClean="0"/>
               <a:t>‹#›</a:t>
             </a:fld>
@@ -5523,7 +5523,7 @@
           <p:cNvPr id="8" name="marker_1">
             <a:extLst>
               <a:ext uri="{FF2B5EF4-FFF2-40B4-BE49-F238E27FC236}">
-                <a16:creationId xmlns:a16="http://schemas.microsoft.com/office/drawing/2014/main" id="{6EAF6F57-33E7-4146-42D4-084F891DB831}"/>
+                <a16:creationId xmlns:a16="http://schemas.microsoft.com/office/drawing/2014/main" id="{C3682A0F-02F4-BE42-679F-B0F38C9F2517}"/>
               </a:ext>
             </a:extLst>
           </p:cNvPr>
@@ -5579,7 +5579,7 @@
           <p:cNvPr id="9" name="item_1_title">
             <a:extLst>
               <a:ext uri="{FF2B5EF4-FFF2-40B4-BE49-F238E27FC236}">
-                <a16:creationId xmlns:a16="http://schemas.microsoft.com/office/drawing/2014/main" id="{3D582FF6-EF09-2617-12C6-89CE1A0A53BE}"/>
+                <a16:creationId xmlns:a16="http://schemas.microsoft.com/office/drawing/2014/main" id="{43348FC1-3294-3977-21F1-E9171A2493D9}"/>
               </a:ext>
             </a:extLst>
           </p:cNvPr>
@@ -5632,7 +5632,7 @@
           <p:cNvPr id="10" name="item_1">
             <a:extLst>
               <a:ext uri="{FF2B5EF4-FFF2-40B4-BE49-F238E27FC236}">
-                <a16:creationId xmlns:a16="http://schemas.microsoft.com/office/drawing/2014/main" id="{4EF40FFF-AD4D-E21B-E215-FFF61A5F5996}"/>
+                <a16:creationId xmlns:a16="http://schemas.microsoft.com/office/drawing/2014/main" id="{691F345F-C601-E604-D1F9-E801E596A22D}"/>
               </a:ext>
             </a:extLst>
           </p:cNvPr>
@@ -5680,7 +5680,7 @@
           <p:cNvPr id="11" name="marker_2">
             <a:extLst>
               <a:ext uri="{FF2B5EF4-FFF2-40B4-BE49-F238E27FC236}">
-                <a16:creationId xmlns:a16="http://schemas.microsoft.com/office/drawing/2014/main" id="{B400E4AA-814C-22C1-A095-7DB29279FF22}"/>
+                <a16:creationId xmlns:a16="http://schemas.microsoft.com/office/drawing/2014/main" id="{994BD9D2-F5BC-8E6C-00D5-C64820755670}"/>
               </a:ext>
             </a:extLst>
           </p:cNvPr>
@@ -5736,7 +5736,7 @@
           <p:cNvPr id="12" name="item_2_title">
             <a:extLst>
               <a:ext uri="{FF2B5EF4-FFF2-40B4-BE49-F238E27FC236}">
-                <a16:creationId xmlns:a16="http://schemas.microsoft.com/office/drawing/2014/main" id="{6DB99C7E-0987-9868-D5ED-3B6A2BB22165}"/>
+                <a16:creationId xmlns:a16="http://schemas.microsoft.com/office/drawing/2014/main" id="{ADA2EE93-E37E-F7C7-4253-2F48AE31AB19}"/>
               </a:ext>
             </a:extLst>
           </p:cNvPr>
@@ -5789,7 +5789,7 @@
           <p:cNvPr id="13" name="item_2">
             <a:extLst>
               <a:ext uri="{FF2B5EF4-FFF2-40B4-BE49-F238E27FC236}">
-                <a16:creationId xmlns:a16="http://schemas.microsoft.com/office/drawing/2014/main" id="{FC048595-C528-2D73-D136-DF017D41436F}"/>
+                <a16:creationId xmlns:a16="http://schemas.microsoft.com/office/drawing/2014/main" id="{1C69E6B2-9791-9B22-CC53-BA729CB2841F}"/>
               </a:ext>
             </a:extLst>
           </p:cNvPr>
@@ -5837,7 +5837,7 @@
           <p:cNvPr id="14" name="source">
             <a:extLst>
               <a:ext uri="{FF2B5EF4-FFF2-40B4-BE49-F238E27FC236}">
-                <a16:creationId xmlns:a16="http://schemas.microsoft.com/office/drawing/2014/main" id="{4960D06A-E46B-368A-3B6C-790667A5D56A}"/>
+                <a16:creationId xmlns:a16="http://schemas.microsoft.com/office/drawing/2014/main" id="{062C735C-F3A4-1ACF-BC2F-C8DBD58EA0D7}"/>
               </a:ext>
             </a:extLst>
           </p:cNvPr>
@@ -5892,7 +5892,7 @@
     </p:spTree>
     <p:extLst>
       <p:ext uri="{BB962C8B-B14F-4D97-AF65-F5344CB8AC3E}">
-        <p14:creationId xmlns:p14="http://schemas.microsoft.com/office/powerpoint/2010/main" val="2755964342"/>
+        <p14:creationId xmlns:p14="http://schemas.microsoft.com/office/powerpoint/2010/main" val="1759842810"/>
       </p:ext>
     </p:extLst>
   </p:cSld>
@@ -5924,7 +5924,7 @@
           <p:cNvPr id="7" name="creative_background">
             <a:extLst>
               <a:ext uri="{FF2B5EF4-FFF2-40B4-BE49-F238E27FC236}">
-                <a16:creationId xmlns:a16="http://schemas.microsoft.com/office/drawing/2014/main" id="{262D1D25-CC6B-926E-D18B-D511167286A6}"/>
+                <a16:creationId xmlns:a16="http://schemas.microsoft.com/office/drawing/2014/main" id="{9E5D051A-9CEA-5981-4DD7-81EC9C68829E}"/>
               </a:ext>
             </a:extLst>
           </p:cNvPr>
@@ -5997,7 +5997,7 @@
           <a:bodyPr/>
           <a:lstStyle/>
           <a:p>
-            <a:fld id="{F02FB69E-0639-468D-B960-1C2B0522D692}" type="datetimeFigureOut">
+            <a:fld id="{402E347B-D365-49E2-9289-3F52BA4D6BD6}" type="datetimeFigureOut">
               <a:rPr lang="en-US" smtClean="0"/>
               <a:t>10/3/2026</a:t>
             </a:fld>
@@ -6039,7 +6039,7 @@
           <a:bodyPr/>
           <a:lstStyle/>
           <a:p>
-            <a:fld id="{CC0DCAE8-747D-49F7-80B2-98777DEBA5AD}" type="slidenum">
+            <a:fld id="{59E99942-F5A0-42B8-85FC-8F53E2428FF4}" type="slidenum">
               <a:rPr lang="en-US" smtClean="0"/>
               <a:t>‹#›</a:t>
             </a:fld>
@@ -6052,7 +6052,7 @@
           <p:cNvPr id="8" name="item_1_title">
             <a:extLst>
               <a:ext uri="{FF2B5EF4-FFF2-40B4-BE49-F238E27FC236}">
-                <a16:creationId xmlns:a16="http://schemas.microsoft.com/office/drawing/2014/main" id="{02059792-AC2C-AF63-E758-2694A9BEBC9A}"/>
+                <a16:creationId xmlns:a16="http://schemas.microsoft.com/office/drawing/2014/main" id="{1FC4E9C2-3AC7-3826-CBFC-4633C9A16CF7}"/>
               </a:ext>
             </a:extLst>
           </p:cNvPr>
@@ -6102,7 +6102,7 @@
           <p:cNvPr id="9" name="item_1">
             <a:extLst>
               <a:ext uri="{FF2B5EF4-FFF2-40B4-BE49-F238E27FC236}">
-                <a16:creationId xmlns:a16="http://schemas.microsoft.com/office/drawing/2014/main" id="{D9EE7E59-23F9-A970-11BE-A482F6523B49}"/>
+                <a16:creationId xmlns:a16="http://schemas.microsoft.com/office/drawing/2014/main" id="{4A994B9A-DEED-4378-7006-C170221590EB}"/>
               </a:ext>
             </a:extLst>
           </p:cNvPr>
@@ -6150,7 +6150,7 @@
           <p:cNvPr id="10" name="item_2_title">
             <a:extLst>
               <a:ext uri="{FF2B5EF4-FFF2-40B4-BE49-F238E27FC236}">
-                <a16:creationId xmlns:a16="http://schemas.microsoft.com/office/drawing/2014/main" id="{530899D2-B5F2-16CF-30B2-D76E62626942}"/>
+                <a16:creationId xmlns:a16="http://schemas.microsoft.com/office/drawing/2014/main" id="{4B0B782E-4FC4-BFC2-F708-199F2B635ADB}"/>
               </a:ext>
             </a:extLst>
           </p:cNvPr>
@@ -6203,7 +6203,7 @@
           <p:cNvPr id="11" name="item_2">
             <a:extLst>
               <a:ext uri="{FF2B5EF4-FFF2-40B4-BE49-F238E27FC236}">
-                <a16:creationId xmlns:a16="http://schemas.microsoft.com/office/drawing/2014/main" id="{A2680791-82CF-B4F2-BDF3-958455F7DA79}"/>
+                <a16:creationId xmlns:a16="http://schemas.microsoft.com/office/drawing/2014/main" id="{669D82AE-CE91-C12C-C759-F65CB2D2323B}"/>
               </a:ext>
             </a:extLst>
           </p:cNvPr>
@@ -6251,7 +6251,7 @@
           <p:cNvPr id="12" name="item_3_title">
             <a:extLst>
               <a:ext uri="{FF2B5EF4-FFF2-40B4-BE49-F238E27FC236}">
-                <a16:creationId xmlns:a16="http://schemas.microsoft.com/office/drawing/2014/main" id="{A14611DC-5937-FCA4-C41F-2CF8716FCFB7}"/>
+                <a16:creationId xmlns:a16="http://schemas.microsoft.com/office/drawing/2014/main" id="{192EFA42-DFDE-6F22-F553-9F85AF70DC87}"/>
               </a:ext>
             </a:extLst>
           </p:cNvPr>
@@ -6304,7 +6304,7 @@
           <p:cNvPr id="13" name="item_3">
             <a:extLst>
               <a:ext uri="{FF2B5EF4-FFF2-40B4-BE49-F238E27FC236}">
-                <a16:creationId xmlns:a16="http://schemas.microsoft.com/office/drawing/2014/main" id="{BB221075-552D-2429-5197-AF0AAD8B23FC}"/>
+                <a16:creationId xmlns:a16="http://schemas.microsoft.com/office/drawing/2014/main" id="{18667022-FED8-9622-6D9D-9F146E2D2185}"/>
               </a:ext>
             </a:extLst>
           </p:cNvPr>
@@ -6352,7 +6352,7 @@
           <p:cNvPr id="14" name="item_4_title">
             <a:extLst>
               <a:ext uri="{FF2B5EF4-FFF2-40B4-BE49-F238E27FC236}">
-                <a16:creationId xmlns:a16="http://schemas.microsoft.com/office/drawing/2014/main" id="{9AB17480-5A44-1DF7-9FCF-DF257A0AB08F}"/>
+                <a16:creationId xmlns:a16="http://schemas.microsoft.com/office/drawing/2014/main" id="{33B5BF41-8A87-AD93-CDCB-C8AA079EEFE8}"/>
               </a:ext>
             </a:extLst>
           </p:cNvPr>
@@ -6405,7 +6405,7 @@
           <p:cNvPr id="15" name="item_4">
             <a:extLst>
               <a:ext uri="{FF2B5EF4-FFF2-40B4-BE49-F238E27FC236}">
-                <a16:creationId xmlns:a16="http://schemas.microsoft.com/office/drawing/2014/main" id="{8410A968-7019-8425-808C-990E8E426EA3}"/>
+                <a16:creationId xmlns:a16="http://schemas.microsoft.com/office/drawing/2014/main" id="{5E7072F0-874E-81E1-56D4-C6DCCE6A887C}"/>
               </a:ext>
             </a:extLst>
           </p:cNvPr>
@@ -6453,7 +6453,7 @@
           <p:cNvPr id="16" name="source">
             <a:extLst>
               <a:ext uri="{FF2B5EF4-FFF2-40B4-BE49-F238E27FC236}">
-                <a16:creationId xmlns:a16="http://schemas.microsoft.com/office/drawing/2014/main" id="{84A1DC4A-1629-2119-B628-64E8A6E3E1B4}"/>
+                <a16:creationId xmlns:a16="http://schemas.microsoft.com/office/drawing/2014/main" id="{77D573D9-4231-211D-939F-6850F9F30EF9}"/>
               </a:ext>
             </a:extLst>
           </p:cNvPr>
@@ -6508,7 +6508,7 @@
     </p:spTree>
     <p:extLst>
       <p:ext uri="{BB962C8B-B14F-4D97-AF65-F5344CB8AC3E}">
-        <p14:creationId xmlns:p14="http://schemas.microsoft.com/office/powerpoint/2010/main" val="95850381"/>
+        <p14:creationId xmlns:p14="http://schemas.microsoft.com/office/powerpoint/2010/main" val="278531137"/>
       </p:ext>
     </p:extLst>
   </p:cSld>
@@ -6540,7 +6540,7 @@
           <p:cNvPr id="7" name="creative_background">
             <a:extLst>
               <a:ext uri="{FF2B5EF4-FFF2-40B4-BE49-F238E27FC236}">
-                <a16:creationId xmlns:a16="http://schemas.microsoft.com/office/drawing/2014/main" id="{D3D88389-FE95-CDF3-8B52-573F13082734}"/>
+                <a16:creationId xmlns:a16="http://schemas.microsoft.com/office/drawing/2014/main" id="{23D0C48E-4901-4EC9-891A-02084E28A2A8}"/>
               </a:ext>
             </a:extLst>
           </p:cNvPr>
@@ -6613,7 +6613,7 @@
           <a:bodyPr/>
           <a:lstStyle/>
           <a:p>
-            <a:fld id="{F02FB69E-0639-468D-B960-1C2B0522D692}" type="datetimeFigureOut">
+            <a:fld id="{402E347B-D365-49E2-9289-3F52BA4D6BD6}" type="datetimeFigureOut">
               <a:rPr lang="en-US" smtClean="0"/>
               <a:t>10/3/2026</a:t>
             </a:fld>
@@ -6655,7 +6655,7 @@
           <a:bodyPr/>
           <a:lstStyle/>
           <a:p>
-            <a:fld id="{CC0DCAE8-747D-49F7-80B2-98777DEBA5AD}" type="slidenum">
+            <a:fld id="{59E99942-F5A0-42B8-85FC-8F53E2428FF4}" type="slidenum">
               <a:rPr lang="en-US" smtClean="0"/>
               <a:t>‹#›</a:t>
             </a:fld>
@@ -6668,7 +6668,7 @@
           <p:cNvPr id="8" name="item_1_title">
             <a:extLst>
               <a:ext uri="{FF2B5EF4-FFF2-40B4-BE49-F238E27FC236}">
-                <a16:creationId xmlns:a16="http://schemas.microsoft.com/office/drawing/2014/main" id="{50510CEC-15DB-4DC7-6FE6-307919340E61}"/>
+                <a16:creationId xmlns:a16="http://schemas.microsoft.com/office/drawing/2014/main" id="{D662841D-E9D8-BFE9-0358-DEED585CD547}"/>
               </a:ext>
             </a:extLst>
           </p:cNvPr>
@@ -6718,7 +6718,7 @@
           <p:cNvPr id="9" name="item_1">
             <a:extLst>
               <a:ext uri="{FF2B5EF4-FFF2-40B4-BE49-F238E27FC236}">
-                <a16:creationId xmlns:a16="http://schemas.microsoft.com/office/drawing/2014/main" id="{D96FEC17-3180-148B-CDB2-F915706CCFF6}"/>
+                <a16:creationId xmlns:a16="http://schemas.microsoft.com/office/drawing/2014/main" id="{6C9047F6-AC4D-AC96-0500-C071B018912B}"/>
               </a:ext>
             </a:extLst>
           </p:cNvPr>
@@ -6766,7 +6766,7 @@
           <p:cNvPr id="10" name="item_2_title">
             <a:extLst>
               <a:ext uri="{FF2B5EF4-FFF2-40B4-BE49-F238E27FC236}">
-                <a16:creationId xmlns:a16="http://schemas.microsoft.com/office/drawing/2014/main" id="{AEA58480-F3BB-E688-B0E8-DFD3FCA21F93}"/>
+                <a16:creationId xmlns:a16="http://schemas.microsoft.com/office/drawing/2014/main" id="{D522F42E-BB3F-01E8-F089-1144642D76A4}"/>
               </a:ext>
             </a:extLst>
           </p:cNvPr>
@@ -6819,7 +6819,7 @@
           <p:cNvPr id="11" name="item_2">
             <a:extLst>
               <a:ext uri="{FF2B5EF4-FFF2-40B4-BE49-F238E27FC236}">
-                <a16:creationId xmlns:a16="http://schemas.microsoft.com/office/drawing/2014/main" id="{2A9343EC-12A4-8547-8F1A-5E91761938D1}"/>
+                <a16:creationId xmlns:a16="http://schemas.microsoft.com/office/drawing/2014/main" id="{539BC020-3C4A-52EB-C373-EBA490C64533}"/>
               </a:ext>
             </a:extLst>
           </p:cNvPr>
@@ -6867,7 +6867,7 @@
           <p:cNvPr id="12" name="item_3_title">
             <a:extLst>
               <a:ext uri="{FF2B5EF4-FFF2-40B4-BE49-F238E27FC236}">
-                <a16:creationId xmlns:a16="http://schemas.microsoft.com/office/drawing/2014/main" id="{D521059C-0E2C-8978-B295-067E255B4FD9}"/>
+                <a16:creationId xmlns:a16="http://schemas.microsoft.com/office/drawing/2014/main" id="{4CBE13E6-0830-5EED-8987-AC0CEC861E40}"/>
               </a:ext>
             </a:extLst>
           </p:cNvPr>
@@ -6920,7 +6920,7 @@
           <p:cNvPr id="13" name="item_3">
             <a:extLst>
               <a:ext uri="{FF2B5EF4-FFF2-40B4-BE49-F238E27FC236}">
-                <a16:creationId xmlns:a16="http://schemas.microsoft.com/office/drawing/2014/main" id="{CB9C31C5-B4DB-5948-E6C4-E4DC4F508429}"/>
+                <a16:creationId xmlns:a16="http://schemas.microsoft.com/office/drawing/2014/main" id="{DC945406-2629-AF6D-937F-8254C544D6F9}"/>
               </a:ext>
             </a:extLst>
           </p:cNvPr>
@@ -6968,7 +6968,7 @@
           <p:cNvPr id="14" name="item_4_title">
             <a:extLst>
               <a:ext uri="{FF2B5EF4-FFF2-40B4-BE49-F238E27FC236}">
-                <a16:creationId xmlns:a16="http://schemas.microsoft.com/office/drawing/2014/main" id="{5AA02200-DD6C-70B3-2E72-5EABEDF6A804}"/>
+                <a16:creationId xmlns:a16="http://schemas.microsoft.com/office/drawing/2014/main" id="{68831182-8AF4-DB39-CBFD-4C8B13A62424}"/>
               </a:ext>
             </a:extLst>
           </p:cNvPr>
@@ -7021,7 +7021,7 @@
           <p:cNvPr id="15" name="item_4">
             <a:extLst>
               <a:ext uri="{FF2B5EF4-FFF2-40B4-BE49-F238E27FC236}">
-                <a16:creationId xmlns:a16="http://schemas.microsoft.com/office/drawing/2014/main" id="{584697AA-FB30-B7A6-0FE8-AA193BF5FFA8}"/>
+                <a16:creationId xmlns:a16="http://schemas.microsoft.com/office/drawing/2014/main" id="{4723CE1C-D0DC-9406-D691-BD071262D4F2}"/>
               </a:ext>
             </a:extLst>
           </p:cNvPr>
@@ -7069,7 +7069,7 @@
           <p:cNvPr id="16" name="source">
             <a:extLst>
               <a:ext uri="{FF2B5EF4-FFF2-40B4-BE49-F238E27FC236}">
-                <a16:creationId xmlns:a16="http://schemas.microsoft.com/office/drawing/2014/main" id="{CE80452B-3BEA-8EE4-DFF4-71EC59F376FF}"/>
+                <a16:creationId xmlns:a16="http://schemas.microsoft.com/office/drawing/2014/main" id="{800CE1C9-164C-2F4C-DF9E-744D55B34E80}"/>
               </a:ext>
             </a:extLst>
           </p:cNvPr>
@@ -7124,7 +7124,7 @@
     </p:spTree>
     <p:extLst>
       <p:ext uri="{BB962C8B-B14F-4D97-AF65-F5344CB8AC3E}">
-        <p14:creationId xmlns:p14="http://schemas.microsoft.com/office/powerpoint/2010/main" val="2668613064"/>
+        <p14:creationId xmlns:p14="http://schemas.microsoft.com/office/powerpoint/2010/main" val="4255720813"/>
       </p:ext>
     </p:extLst>
   </p:cSld>
@@ -7156,7 +7156,7 @@
           <p:cNvPr id="7" name="creative_background">
             <a:extLst>
               <a:ext uri="{FF2B5EF4-FFF2-40B4-BE49-F238E27FC236}">
-                <a16:creationId xmlns:a16="http://schemas.microsoft.com/office/drawing/2014/main" id="{00AC4584-E798-3E91-6DCA-5B588BEE4725}"/>
+                <a16:creationId xmlns:a16="http://schemas.microsoft.com/office/drawing/2014/main" id="{4429DB96-7659-D7DE-2439-7042788637B5}"/>
               </a:ext>
             </a:extLst>
           </p:cNvPr>
@@ -7229,7 +7229,7 @@
           <a:bodyPr/>
           <a:lstStyle/>
           <a:p>
-            <a:fld id="{F02FB69E-0639-468D-B960-1C2B0522D692}" type="datetimeFigureOut">
+            <a:fld id="{402E347B-D365-49E2-9289-3F52BA4D6BD6}" type="datetimeFigureOut">
               <a:rPr lang="en-US" smtClean="0"/>
               <a:t>10/3/2026</a:t>
             </a:fld>
@@ -7271,7 +7271,7 @@
           <a:bodyPr/>
           <a:lstStyle/>
           <a:p>
-            <a:fld id="{CC0DCAE8-747D-49F7-80B2-98777DEBA5AD}" type="slidenum">
+            <a:fld id="{59E99942-F5A0-42B8-85FC-8F53E2428FF4}" type="slidenum">
               <a:rPr lang="en-US" smtClean="0"/>
               <a:t>‹#›</a:t>
             </a:fld>
@@ -7284,7 +7284,7 @@
           <p:cNvPr id="8" name="kpi_value_1">
             <a:extLst>
               <a:ext uri="{FF2B5EF4-FFF2-40B4-BE49-F238E27FC236}">
-                <a16:creationId xmlns:a16="http://schemas.microsoft.com/office/drawing/2014/main" id="{68D1FE50-ACFE-D0A4-FF87-BC07373B8633}"/>
+                <a16:creationId xmlns:a16="http://schemas.microsoft.com/office/drawing/2014/main" id="{B018921E-CD12-FE96-0992-69BB04542892}"/>
               </a:ext>
             </a:extLst>
           </p:cNvPr>
@@ -7334,7 +7334,7 @@
           <p:cNvPr id="9" name="kpi_label_1">
             <a:extLst>
               <a:ext uri="{FF2B5EF4-FFF2-40B4-BE49-F238E27FC236}">
-                <a16:creationId xmlns:a16="http://schemas.microsoft.com/office/drawing/2014/main" id="{8F50F6B9-3B68-2897-6720-C4DDD33579EA}"/>
+                <a16:creationId xmlns:a16="http://schemas.microsoft.com/office/drawing/2014/main" id="{B7A0BE41-E200-4BA2-86CB-D71440C18102}"/>
               </a:ext>
             </a:extLst>
           </p:cNvPr>
@@ -7382,7 +7382,7 @@
           <p:cNvPr id="10" name="quote">
             <a:extLst>
               <a:ext uri="{FF2B5EF4-FFF2-40B4-BE49-F238E27FC236}">
-                <a16:creationId xmlns:a16="http://schemas.microsoft.com/office/drawing/2014/main" id="{5A41CEA7-94C9-B2F2-FDD3-62F977B17C57}"/>
+                <a16:creationId xmlns:a16="http://schemas.microsoft.com/office/drawing/2014/main" id="{B472E3C2-E655-26DD-E92D-D81FF8E8ED34}"/>
               </a:ext>
             </a:extLst>
           </p:cNvPr>
@@ -7432,7 +7432,7 @@
           <p:cNvPr id="11" name="attribution">
             <a:extLst>
               <a:ext uri="{FF2B5EF4-FFF2-40B4-BE49-F238E27FC236}">
-                <a16:creationId xmlns:a16="http://schemas.microsoft.com/office/drawing/2014/main" id="{F808BF57-22E3-6E53-4B43-40A0AD0B9B19}"/>
+                <a16:creationId xmlns:a16="http://schemas.microsoft.com/office/drawing/2014/main" id="{3044613B-F22E-72FB-46AF-A774C8DBC18C}"/>
               </a:ext>
             </a:extLst>
           </p:cNvPr>
@@ -7480,7 +7480,7 @@
           <p:cNvPr id="12" name="item_1_title">
             <a:extLst>
               <a:ext uri="{FF2B5EF4-FFF2-40B4-BE49-F238E27FC236}">
-                <a16:creationId xmlns:a16="http://schemas.microsoft.com/office/drawing/2014/main" id="{C998CECE-47E4-361A-EC3F-C87B2AE964BC}"/>
+                <a16:creationId xmlns:a16="http://schemas.microsoft.com/office/drawing/2014/main" id="{0D646FCE-6BA3-8F07-5910-DEE11B3BDF4F}"/>
               </a:ext>
             </a:extLst>
           </p:cNvPr>
@@ -7533,7 +7533,7 @@
           <p:cNvPr id="13" name="item_1">
             <a:extLst>
               <a:ext uri="{FF2B5EF4-FFF2-40B4-BE49-F238E27FC236}">
-                <a16:creationId xmlns:a16="http://schemas.microsoft.com/office/drawing/2014/main" id="{4C4E6708-66F8-62D4-5434-71BD08BBFBEA}"/>
+                <a16:creationId xmlns:a16="http://schemas.microsoft.com/office/drawing/2014/main" id="{263750AE-914E-1D6F-F9C0-91648D4EC1F0}"/>
               </a:ext>
             </a:extLst>
           </p:cNvPr>
@@ -7581,7 +7581,7 @@
           <p:cNvPr id="14" name="source">
             <a:extLst>
               <a:ext uri="{FF2B5EF4-FFF2-40B4-BE49-F238E27FC236}">
-                <a16:creationId xmlns:a16="http://schemas.microsoft.com/office/drawing/2014/main" id="{C1210DFB-DDF4-8CCF-747E-29786A89BF85}"/>
+                <a16:creationId xmlns:a16="http://schemas.microsoft.com/office/drawing/2014/main" id="{C951320E-4102-D834-52EE-CF292F48A4A1}"/>
               </a:ext>
             </a:extLst>
           </p:cNvPr>
@@ -7636,7 +7636,7 @@
     </p:spTree>
     <p:extLst>
       <p:ext uri="{BB962C8B-B14F-4D97-AF65-F5344CB8AC3E}">
-        <p14:creationId xmlns:p14="http://schemas.microsoft.com/office/powerpoint/2010/main" val="4043729302"/>
+        <p14:creationId xmlns:p14="http://schemas.microsoft.com/office/powerpoint/2010/main" val="1767209152"/>
       </p:ext>
     </p:extLst>
   </p:cSld>
@@ -7668,7 +7668,7 @@
           <p:cNvPr id="7" name="creative_background">
             <a:extLst>
               <a:ext uri="{FF2B5EF4-FFF2-40B4-BE49-F238E27FC236}">
-                <a16:creationId xmlns:a16="http://schemas.microsoft.com/office/drawing/2014/main" id="{AC318A05-CD18-EC29-9970-A5B42223BA72}"/>
+                <a16:creationId xmlns:a16="http://schemas.microsoft.com/office/drawing/2014/main" id="{A0D4382F-E087-6CCC-2EED-5F741A639BDD}"/>
               </a:ext>
             </a:extLst>
           </p:cNvPr>
@@ -7741,7 +7741,7 @@
           <a:bodyPr/>
           <a:lstStyle/>
           <a:p>
-            <a:fld id="{F02FB69E-0639-468D-B960-1C2B0522D692}" type="datetimeFigureOut">
+            <a:fld id="{402E347B-D365-49E2-9289-3F52BA4D6BD6}" type="datetimeFigureOut">
               <a:rPr lang="en-US" smtClean="0"/>
               <a:t>10/3/2026</a:t>
             </a:fld>
@@ -7783,7 +7783,7 @@
           <a:bodyPr/>
           <a:lstStyle/>
           <a:p>
-            <a:fld id="{CC0DCAE8-747D-49F7-80B2-98777DEBA5AD}" type="slidenum">
+            <a:fld id="{59E99942-F5A0-42B8-85FC-8F53E2428FF4}" type="slidenum">
               <a:rPr lang="en-US" smtClean="0"/>
               <a:t>‹#›</a:t>
             </a:fld>
@@ -7796,7 +7796,7 @@
           <p:cNvPr id="8" name="item_1_title">
             <a:extLst>
               <a:ext uri="{FF2B5EF4-FFF2-40B4-BE49-F238E27FC236}">
-                <a16:creationId xmlns:a16="http://schemas.microsoft.com/office/drawing/2014/main" id="{74C0927B-634C-2B55-1D8A-98EE2CF99660}"/>
+                <a16:creationId xmlns:a16="http://schemas.microsoft.com/office/drawing/2014/main" id="{EC1DE402-3E84-58D6-BFEF-A5C097A2DFC8}"/>
               </a:ext>
             </a:extLst>
           </p:cNvPr>
@@ -7846,7 +7846,7 @@
           <p:cNvPr id="9" name="item_1">
             <a:extLst>
               <a:ext uri="{FF2B5EF4-FFF2-40B4-BE49-F238E27FC236}">
-                <a16:creationId xmlns:a16="http://schemas.microsoft.com/office/drawing/2014/main" id="{51B67741-4C89-3224-31F3-0A0618762A82}"/>
+                <a16:creationId xmlns:a16="http://schemas.microsoft.com/office/drawing/2014/main" id="{23755139-8217-E965-267F-1CFCC17BA489}"/>
               </a:ext>
             </a:extLst>
           </p:cNvPr>
@@ -7894,7 +7894,7 @@
           <p:cNvPr id="10" name="item_2_title">
             <a:extLst>
               <a:ext uri="{FF2B5EF4-FFF2-40B4-BE49-F238E27FC236}">
-                <a16:creationId xmlns:a16="http://schemas.microsoft.com/office/drawing/2014/main" id="{4DFB0F53-F3C6-8702-B66C-E9A78F824228}"/>
+                <a16:creationId xmlns:a16="http://schemas.microsoft.com/office/drawing/2014/main" id="{BC1B043A-9689-0C1D-6E7B-8DB33462DC9F}"/>
               </a:ext>
             </a:extLst>
           </p:cNvPr>
@@ -7947,7 +7947,7 @@
           <p:cNvPr id="11" name="item_2">
             <a:extLst>
               <a:ext uri="{FF2B5EF4-FFF2-40B4-BE49-F238E27FC236}">
-                <a16:creationId xmlns:a16="http://schemas.microsoft.com/office/drawing/2014/main" id="{0D7E04A9-357C-16C0-5B5E-F44F063D053D}"/>
+                <a16:creationId xmlns:a16="http://schemas.microsoft.com/office/drawing/2014/main" id="{8B11088B-AD11-6793-6FAC-DEEDB475FFD1}"/>
               </a:ext>
             </a:extLst>
           </p:cNvPr>
@@ -7995,7 +7995,7 @@
           <p:cNvPr id="12" name="item_3_title">
             <a:extLst>
               <a:ext uri="{FF2B5EF4-FFF2-40B4-BE49-F238E27FC236}">
-                <a16:creationId xmlns:a16="http://schemas.microsoft.com/office/drawing/2014/main" id="{0509B62F-30DA-C8BD-1A66-E3614C89CDBE}"/>
+                <a16:creationId xmlns:a16="http://schemas.microsoft.com/office/drawing/2014/main" id="{683611D4-6573-8806-7F43-439E23593168}"/>
               </a:ext>
             </a:extLst>
           </p:cNvPr>
@@ -8048,7 +8048,7 @@
           <p:cNvPr id="13" name="item_3">
             <a:extLst>
               <a:ext uri="{FF2B5EF4-FFF2-40B4-BE49-F238E27FC236}">
-                <a16:creationId xmlns:a16="http://schemas.microsoft.com/office/drawing/2014/main" id="{1241BB8C-BFEA-A810-852E-F483CDA6678E}"/>
+                <a16:creationId xmlns:a16="http://schemas.microsoft.com/office/drawing/2014/main" id="{B199A3F1-C2B3-0F42-D27F-171AC9BFB307}"/>
               </a:ext>
             </a:extLst>
           </p:cNvPr>
@@ -8096,7 +8096,7 @@
           <p:cNvPr id="14" name="source">
             <a:extLst>
               <a:ext uri="{FF2B5EF4-FFF2-40B4-BE49-F238E27FC236}">
-                <a16:creationId xmlns:a16="http://schemas.microsoft.com/office/drawing/2014/main" id="{FB530AEB-A315-D7B4-EEFD-3F37EE3CF8E1}"/>
+                <a16:creationId xmlns:a16="http://schemas.microsoft.com/office/drawing/2014/main" id="{BB95DD7D-2F73-D318-A93E-17D933630795}"/>
               </a:ext>
             </a:extLst>
           </p:cNvPr>
@@ -8151,7 +8151,7 @@
     </p:spTree>
     <p:extLst>
       <p:ext uri="{BB962C8B-B14F-4D97-AF65-F5344CB8AC3E}">
-        <p14:creationId xmlns:p14="http://schemas.microsoft.com/office/powerpoint/2010/main" val="2141356827"/>
+        <p14:creationId xmlns:p14="http://schemas.microsoft.com/office/powerpoint/2010/main" val="1648082350"/>
       </p:ext>
     </p:extLst>
   </p:cSld>
@@ -8183,7 +8183,7 @@
           <p:cNvPr id="7" name="creative_background">
             <a:extLst>
               <a:ext uri="{FF2B5EF4-FFF2-40B4-BE49-F238E27FC236}">
-                <a16:creationId xmlns:a16="http://schemas.microsoft.com/office/drawing/2014/main" id="{2EBFC20A-B133-08DE-0CA5-C0A95E80FDCC}"/>
+                <a16:creationId xmlns:a16="http://schemas.microsoft.com/office/drawing/2014/main" id="{2C6DC366-840D-0C1D-AF9C-FED9203FD014}"/>
               </a:ext>
             </a:extLst>
           </p:cNvPr>
@@ -8256,7 +8256,7 @@
           <a:bodyPr/>
           <a:lstStyle/>
           <a:p>
-            <a:fld id="{F02FB69E-0639-468D-B960-1C2B0522D692}" type="datetimeFigureOut">
+            <a:fld id="{402E347B-D365-49E2-9289-3F52BA4D6BD6}" type="datetimeFigureOut">
               <a:rPr lang="en-US" smtClean="0"/>
               <a:t>10/3/2026</a:t>
             </a:fld>
@@ -8298,7 +8298,7 @@
           <a:bodyPr/>
           <a:lstStyle/>
           <a:p>
-            <a:fld id="{CC0DCAE8-747D-49F7-80B2-98777DEBA5AD}" type="slidenum">
+            <a:fld id="{59E99942-F5A0-42B8-85FC-8F53E2428FF4}" type="slidenum">
               <a:rPr lang="en-US" smtClean="0"/>
               <a:t>‹#›</a:t>
             </a:fld>
@@ -8311,7 +8311,7 @@
           <p:cNvPr id="8" name="marker_1">
             <a:extLst>
               <a:ext uri="{FF2B5EF4-FFF2-40B4-BE49-F238E27FC236}">
-                <a16:creationId xmlns:a16="http://schemas.microsoft.com/office/drawing/2014/main" id="{BA43A490-E2C7-A8CC-3A84-7650C899C86B}"/>
+                <a16:creationId xmlns:a16="http://schemas.microsoft.com/office/drawing/2014/main" id="{28083B0E-D8E3-92AA-266E-1AF6C72AC6B3}"/>
               </a:ext>
             </a:extLst>
           </p:cNvPr>
@@ -8367,7 +8367,7 @@
           <p:cNvPr id="9" name="item_1_title">
             <a:extLst>
               <a:ext uri="{FF2B5EF4-FFF2-40B4-BE49-F238E27FC236}">
-                <a16:creationId xmlns:a16="http://schemas.microsoft.com/office/drawing/2014/main" id="{65F04DF5-080A-1CBD-E9D7-CE56746F5CFB}"/>
+                <a16:creationId xmlns:a16="http://schemas.microsoft.com/office/drawing/2014/main" id="{C2B60993-7354-21EF-8F8A-290A8BEB72AC}"/>
               </a:ext>
             </a:extLst>
           </p:cNvPr>
@@ -8420,7 +8420,7 @@
           <p:cNvPr id="10" name="item_1">
             <a:extLst>
               <a:ext uri="{FF2B5EF4-FFF2-40B4-BE49-F238E27FC236}">
-                <a16:creationId xmlns:a16="http://schemas.microsoft.com/office/drawing/2014/main" id="{989A0E4C-4E69-1657-2A8B-C34CD5F44E36}"/>
+                <a16:creationId xmlns:a16="http://schemas.microsoft.com/office/drawing/2014/main" id="{2B04D01D-95CE-16DB-4695-226477151DA3}"/>
               </a:ext>
             </a:extLst>
           </p:cNvPr>
@@ -8468,7 +8468,7 @@
           <p:cNvPr id="11" name="marker_2">
             <a:extLst>
               <a:ext uri="{FF2B5EF4-FFF2-40B4-BE49-F238E27FC236}">
-                <a16:creationId xmlns:a16="http://schemas.microsoft.com/office/drawing/2014/main" id="{AC47536D-0E6D-4FF4-034B-C2FC40EF00C0}"/>
+                <a16:creationId xmlns:a16="http://schemas.microsoft.com/office/drawing/2014/main" id="{F8543F8D-A28A-8718-6192-7BEFC34BF62A}"/>
               </a:ext>
             </a:extLst>
           </p:cNvPr>
@@ -8524,7 +8524,7 @@
           <p:cNvPr id="12" name="item_2_title">
             <a:extLst>
               <a:ext uri="{FF2B5EF4-FFF2-40B4-BE49-F238E27FC236}">
-                <a16:creationId xmlns:a16="http://schemas.microsoft.com/office/drawing/2014/main" id="{568C497F-B2CE-366F-DA9F-C12965935B15}"/>
+                <a16:creationId xmlns:a16="http://schemas.microsoft.com/office/drawing/2014/main" id="{260A2F70-9465-320F-80AE-AB71C25886CA}"/>
               </a:ext>
             </a:extLst>
           </p:cNvPr>
@@ -8577,7 +8577,7 @@
           <p:cNvPr id="13" name="item_2">
             <a:extLst>
               <a:ext uri="{FF2B5EF4-FFF2-40B4-BE49-F238E27FC236}">
-                <a16:creationId xmlns:a16="http://schemas.microsoft.com/office/drawing/2014/main" id="{0718376D-33B6-24D6-81DA-239D8FAE09BA}"/>
+                <a16:creationId xmlns:a16="http://schemas.microsoft.com/office/drawing/2014/main" id="{ECC55D42-09D4-5E7F-41ED-07A86F44713F}"/>
               </a:ext>
             </a:extLst>
           </p:cNvPr>
@@ -8625,7 +8625,7 @@
           <p:cNvPr id="14" name="source">
             <a:extLst>
               <a:ext uri="{FF2B5EF4-FFF2-40B4-BE49-F238E27FC236}">
-                <a16:creationId xmlns:a16="http://schemas.microsoft.com/office/drawing/2014/main" id="{A0A4BBBC-2EB2-116D-1BC8-FAC5CB627EA9}"/>
+                <a16:creationId xmlns:a16="http://schemas.microsoft.com/office/drawing/2014/main" id="{271948A3-3312-A119-DD58-D375A02BB108}"/>
               </a:ext>
             </a:extLst>
           </p:cNvPr>
@@ -8680,7 +8680,7 @@
     </p:spTree>
     <p:extLst>
       <p:ext uri="{BB962C8B-B14F-4D97-AF65-F5344CB8AC3E}">
-        <p14:creationId xmlns:p14="http://schemas.microsoft.com/office/powerpoint/2010/main" val="2753006856"/>
+        <p14:creationId xmlns:p14="http://schemas.microsoft.com/office/powerpoint/2010/main" val="1620971767"/>
       </p:ext>
     </p:extLst>
   </p:cSld>
@@ -8712,7 +8712,7 @@
           <p:cNvPr id="7" name="creative_background">
             <a:extLst>
               <a:ext uri="{FF2B5EF4-FFF2-40B4-BE49-F238E27FC236}">
-                <a16:creationId xmlns:a16="http://schemas.microsoft.com/office/drawing/2014/main" id="{4DE47B54-CBEB-39ED-A230-FBD31E66D856}"/>
+                <a16:creationId xmlns:a16="http://schemas.microsoft.com/office/drawing/2014/main" id="{531E9E69-C501-C0BD-DE71-5D60413298CC}"/>
               </a:ext>
             </a:extLst>
           </p:cNvPr>
@@ -8785,7 +8785,7 @@
           <a:bodyPr/>
           <a:lstStyle/>
           <a:p>
-            <a:fld id="{F02FB69E-0639-468D-B960-1C2B0522D692}" type="datetimeFigureOut">
+            <a:fld id="{402E347B-D365-49E2-9289-3F52BA4D6BD6}" type="datetimeFigureOut">
               <a:rPr lang="en-US" smtClean="0"/>
               <a:t>10/3/2026</a:t>
             </a:fld>
@@ -8827,7 +8827,7 @@
           <a:bodyPr/>
           <a:lstStyle/>
           <a:p>
-            <a:fld id="{CC0DCAE8-747D-49F7-80B2-98777DEBA5AD}" type="slidenum">
+            <a:fld id="{59E99942-F5A0-42B8-85FC-8F53E2428FF4}" type="slidenum">
               <a:rPr lang="en-US" smtClean="0"/>
               <a:t>‹#›</a:t>
             </a:fld>
@@ -8840,7 +8840,7 @@
           <p:cNvPr id="8" name="kpi_value_1">
             <a:extLst>
               <a:ext uri="{FF2B5EF4-FFF2-40B4-BE49-F238E27FC236}">
-                <a16:creationId xmlns:a16="http://schemas.microsoft.com/office/drawing/2014/main" id="{99FC8FE9-4FEC-8490-2559-2983628A166F}"/>
+                <a16:creationId xmlns:a16="http://schemas.microsoft.com/office/drawing/2014/main" id="{49C8B1EA-8D97-F13A-2EAF-330E3683B859}"/>
               </a:ext>
             </a:extLst>
           </p:cNvPr>
@@ -8890,7 +8890,7 @@
           <p:cNvPr id="9" name="kpi_label_1">
             <a:extLst>
               <a:ext uri="{FF2B5EF4-FFF2-40B4-BE49-F238E27FC236}">
-                <a16:creationId xmlns:a16="http://schemas.microsoft.com/office/drawing/2014/main" id="{69C80445-8D77-A8E2-A4A6-29F443972AFF}"/>
+                <a16:creationId xmlns:a16="http://schemas.microsoft.com/office/drawing/2014/main" id="{E569279E-246E-443D-B8B1-1B58BBE0A115}"/>
               </a:ext>
             </a:extLst>
           </p:cNvPr>
@@ -8938,7 +8938,7 @@
           <p:cNvPr id="10" name="quote">
             <a:extLst>
               <a:ext uri="{FF2B5EF4-FFF2-40B4-BE49-F238E27FC236}">
-                <a16:creationId xmlns:a16="http://schemas.microsoft.com/office/drawing/2014/main" id="{3DF0CE98-1382-1B3E-B8B8-71B702263E1C}"/>
+                <a16:creationId xmlns:a16="http://schemas.microsoft.com/office/drawing/2014/main" id="{94CA081B-007D-1D80-7ED6-4EB3B84F706C}"/>
               </a:ext>
             </a:extLst>
           </p:cNvPr>
@@ -8988,7 +8988,7 @@
           <p:cNvPr id="11" name="attribution">
             <a:extLst>
               <a:ext uri="{FF2B5EF4-FFF2-40B4-BE49-F238E27FC236}">
-                <a16:creationId xmlns:a16="http://schemas.microsoft.com/office/drawing/2014/main" id="{F1C005A0-A002-2DA1-BC9B-E33368F649FF}"/>
+                <a16:creationId xmlns:a16="http://schemas.microsoft.com/office/drawing/2014/main" id="{79E66203-6BC9-AE97-9A8F-B89444B90181}"/>
               </a:ext>
             </a:extLst>
           </p:cNvPr>
@@ -9036,7 +9036,7 @@
           <p:cNvPr id="12" name="item_1_title">
             <a:extLst>
               <a:ext uri="{FF2B5EF4-FFF2-40B4-BE49-F238E27FC236}">
-                <a16:creationId xmlns:a16="http://schemas.microsoft.com/office/drawing/2014/main" id="{10EF5B51-D6F6-83DE-479B-74C92AACE773}"/>
+                <a16:creationId xmlns:a16="http://schemas.microsoft.com/office/drawing/2014/main" id="{E056F42B-0344-43EA-6705-B655A55EB1D8}"/>
               </a:ext>
             </a:extLst>
           </p:cNvPr>
@@ -9089,7 +9089,7 @@
           <p:cNvPr id="13" name="item_1">
             <a:extLst>
               <a:ext uri="{FF2B5EF4-FFF2-40B4-BE49-F238E27FC236}">
-                <a16:creationId xmlns:a16="http://schemas.microsoft.com/office/drawing/2014/main" id="{D02BFFCB-05B8-0B90-5DE9-C9198762605F}"/>
+                <a16:creationId xmlns:a16="http://schemas.microsoft.com/office/drawing/2014/main" id="{57248D2D-0075-71B2-0721-F2623BC789B4}"/>
               </a:ext>
             </a:extLst>
           </p:cNvPr>
@@ -9137,7 +9137,7 @@
           <p:cNvPr id="14" name="source">
             <a:extLst>
               <a:ext uri="{FF2B5EF4-FFF2-40B4-BE49-F238E27FC236}">
-                <a16:creationId xmlns:a16="http://schemas.microsoft.com/office/drawing/2014/main" id="{FA12253A-E294-14C4-205D-B4FC8157E261}"/>
+                <a16:creationId xmlns:a16="http://schemas.microsoft.com/office/drawing/2014/main" id="{056BD69A-4CD8-085A-70E1-82BB45360302}"/>
               </a:ext>
             </a:extLst>
           </p:cNvPr>
@@ -9192,7 +9192,7 @@
     </p:spTree>
     <p:extLst>
       <p:ext uri="{BB962C8B-B14F-4D97-AF65-F5344CB8AC3E}">
-        <p14:creationId xmlns:p14="http://schemas.microsoft.com/office/powerpoint/2010/main" val="2601537069"/>
+        <p14:creationId xmlns:p14="http://schemas.microsoft.com/office/powerpoint/2010/main" val="1367014621"/>
       </p:ext>
     </p:extLst>
   </p:cSld>
@@ -9224,7 +9224,7 @@
           <p:cNvPr id="7" name="creative_background">
             <a:extLst>
               <a:ext uri="{FF2B5EF4-FFF2-40B4-BE49-F238E27FC236}">
-                <a16:creationId xmlns:a16="http://schemas.microsoft.com/office/drawing/2014/main" id="{7AA8CC12-3C27-0219-1CFB-E9694C4387BF}"/>
+                <a16:creationId xmlns:a16="http://schemas.microsoft.com/office/drawing/2014/main" id="{E24FC8FC-E76E-14E0-8ECF-01B7E97158F2}"/>
               </a:ext>
             </a:extLst>
           </p:cNvPr>
@@ -9297,7 +9297,7 @@
           <a:bodyPr/>
           <a:lstStyle/>
           <a:p>
-            <a:fld id="{F02FB69E-0639-468D-B960-1C2B0522D692}" type="datetimeFigureOut">
+            <a:fld id="{402E347B-D365-49E2-9289-3F52BA4D6BD6}" type="datetimeFigureOut">
               <a:rPr lang="en-US" smtClean="0"/>
               <a:t>10/3/2026</a:t>
             </a:fld>
@@ -9339,7 +9339,7 @@
           <a:bodyPr/>
           <a:lstStyle/>
           <a:p>
-            <a:fld id="{CC0DCAE8-747D-49F7-80B2-98777DEBA5AD}" type="slidenum">
+            <a:fld id="{59E99942-F5A0-42B8-85FC-8F53E2428FF4}" type="slidenum">
               <a:rPr lang="en-US" smtClean="0"/>
               <a:t>‹#›</a:t>
             </a:fld>
@@ -9352,7 +9352,7 @@
           <p:cNvPr id="8" name="marker_1">
             <a:extLst>
               <a:ext uri="{FF2B5EF4-FFF2-40B4-BE49-F238E27FC236}">
-                <a16:creationId xmlns:a16="http://schemas.microsoft.com/office/drawing/2014/main" id="{5953CB3E-4AFD-8F94-C7FF-3DEEBA11DFFB}"/>
+                <a16:creationId xmlns:a16="http://schemas.microsoft.com/office/drawing/2014/main" id="{D547A39E-9DAE-3AAC-23B7-5E0F79B985D9}"/>
               </a:ext>
             </a:extLst>
           </p:cNvPr>
@@ -9408,7 +9408,7 @@
           <p:cNvPr id="9" name="item_1">
             <a:extLst>
               <a:ext uri="{FF2B5EF4-FFF2-40B4-BE49-F238E27FC236}">
-                <a16:creationId xmlns:a16="http://schemas.microsoft.com/office/drawing/2014/main" id="{8EE49E0B-1960-0D85-076E-D327577DF74B}"/>
+                <a16:creationId xmlns:a16="http://schemas.microsoft.com/office/drawing/2014/main" id="{BFD7EFC3-4EE5-CE05-B21F-61A30671B7A8}"/>
               </a:ext>
             </a:extLst>
           </p:cNvPr>
@@ -9456,7 +9456,7 @@
           <p:cNvPr id="10" name="marker_2">
             <a:extLst>
               <a:ext uri="{FF2B5EF4-FFF2-40B4-BE49-F238E27FC236}">
-                <a16:creationId xmlns:a16="http://schemas.microsoft.com/office/drawing/2014/main" id="{5EF73456-2F7B-A6CC-5A27-82C9D6E32501}"/>
+                <a16:creationId xmlns:a16="http://schemas.microsoft.com/office/drawing/2014/main" id="{438FF659-090B-F4C2-9BAA-E3030FCF9C9D}"/>
               </a:ext>
             </a:extLst>
           </p:cNvPr>
@@ -9512,7 +9512,7 @@
           <p:cNvPr id="11" name="item_2">
             <a:extLst>
               <a:ext uri="{FF2B5EF4-FFF2-40B4-BE49-F238E27FC236}">
-                <a16:creationId xmlns:a16="http://schemas.microsoft.com/office/drawing/2014/main" id="{7AB96A14-D595-29B3-54E0-5659914CFAA4}"/>
+                <a16:creationId xmlns:a16="http://schemas.microsoft.com/office/drawing/2014/main" id="{91C36124-0094-B4C7-7A42-64D6B5B12789}"/>
               </a:ext>
             </a:extLst>
           </p:cNvPr>
@@ -9560,7 +9560,7 @@
           <p:cNvPr id="12" name="marker_3">
             <a:extLst>
               <a:ext uri="{FF2B5EF4-FFF2-40B4-BE49-F238E27FC236}">
-                <a16:creationId xmlns:a16="http://schemas.microsoft.com/office/drawing/2014/main" id="{FE9A2D19-C2BB-D95E-A7D7-8BBE5A22A344}"/>
+                <a16:creationId xmlns:a16="http://schemas.microsoft.com/office/drawing/2014/main" id="{6CA619B8-8AF6-4BD3-258F-503B1C0780B1}"/>
               </a:ext>
             </a:extLst>
           </p:cNvPr>
@@ -9616,7 +9616,7 @@
           <p:cNvPr id="13" name="item_3">
             <a:extLst>
               <a:ext uri="{FF2B5EF4-FFF2-40B4-BE49-F238E27FC236}">
-                <a16:creationId xmlns:a16="http://schemas.microsoft.com/office/drawing/2014/main" id="{69886727-84AC-162F-5A6E-52F3E223845E}"/>
+                <a16:creationId xmlns:a16="http://schemas.microsoft.com/office/drawing/2014/main" id="{31D704B3-FC36-0314-F773-7201276BEA6B}"/>
               </a:ext>
             </a:extLst>
           </p:cNvPr>
@@ -9664,7 +9664,7 @@
           <p:cNvPr id="14" name="marker_4">
             <a:extLst>
               <a:ext uri="{FF2B5EF4-FFF2-40B4-BE49-F238E27FC236}">
-                <a16:creationId xmlns:a16="http://schemas.microsoft.com/office/drawing/2014/main" id="{AD548F39-0BE5-A6C9-2DFD-9A46B028074B}"/>
+                <a16:creationId xmlns:a16="http://schemas.microsoft.com/office/drawing/2014/main" id="{12CBD3E5-27BD-F73C-7248-0D2F149B486F}"/>
               </a:ext>
             </a:extLst>
           </p:cNvPr>
@@ -9720,7 +9720,7 @@
           <p:cNvPr id="15" name="item_4">
             <a:extLst>
               <a:ext uri="{FF2B5EF4-FFF2-40B4-BE49-F238E27FC236}">
-                <a16:creationId xmlns:a16="http://schemas.microsoft.com/office/drawing/2014/main" id="{D75E7D2A-6838-3BD0-E3DA-04CFE9A94DFC}"/>
+                <a16:creationId xmlns:a16="http://schemas.microsoft.com/office/drawing/2014/main" id="{2203E6B8-BB7A-7585-9347-DF0738DA7E74}"/>
               </a:ext>
             </a:extLst>
           </p:cNvPr>
@@ -9768,7 +9768,7 @@
           <p:cNvPr id="16" name="source">
             <a:extLst>
               <a:ext uri="{FF2B5EF4-FFF2-40B4-BE49-F238E27FC236}">
-                <a16:creationId xmlns:a16="http://schemas.microsoft.com/office/drawing/2014/main" id="{C0BD1ECA-A4D2-425F-3772-7E1B0B376BAC}"/>
+                <a16:creationId xmlns:a16="http://schemas.microsoft.com/office/drawing/2014/main" id="{70ED0625-BFC8-8BFA-731B-4E171748867F}"/>
               </a:ext>
             </a:extLst>
           </p:cNvPr>
@@ -9823,7 +9823,7 @@
     </p:spTree>
     <p:extLst>
       <p:ext uri="{BB962C8B-B14F-4D97-AF65-F5344CB8AC3E}">
-        <p14:creationId xmlns:p14="http://schemas.microsoft.com/office/powerpoint/2010/main" val="1714160634"/>
+        <p14:creationId xmlns:p14="http://schemas.microsoft.com/office/powerpoint/2010/main" val="4029897623"/>
       </p:ext>
     </p:extLst>
   </p:cSld>
@@ -9855,7 +9855,7 @@
           <p:cNvPr id="7" name="creative_background">
             <a:extLst>
               <a:ext uri="{FF2B5EF4-FFF2-40B4-BE49-F238E27FC236}">
-                <a16:creationId xmlns:a16="http://schemas.microsoft.com/office/drawing/2014/main" id="{69B75478-723C-D5D4-804B-C90811ED6EE4}"/>
+                <a16:creationId xmlns:a16="http://schemas.microsoft.com/office/drawing/2014/main" id="{9B13EFE9-AB46-F7EC-EA63-4A837B2103CB}"/>
               </a:ext>
             </a:extLst>
           </p:cNvPr>
@@ -9928,7 +9928,7 @@
           <a:bodyPr/>
           <a:lstStyle/>
           <a:p>
-            <a:fld id="{F02FB69E-0639-468D-B960-1C2B0522D692}" type="datetimeFigureOut">
+            <a:fld id="{402E347B-D365-49E2-9289-3F52BA4D6BD6}" type="datetimeFigureOut">
               <a:rPr lang="en-US" smtClean="0"/>
               <a:t>10/3/2026</a:t>
             </a:fld>
@@ -9970,7 +9970,7 @@
           <a:bodyPr/>
           <a:lstStyle/>
           <a:p>
-            <a:fld id="{CC0DCAE8-747D-49F7-80B2-98777DEBA5AD}" type="slidenum">
+            <a:fld id="{59E99942-F5A0-42B8-85FC-8F53E2428FF4}" type="slidenum">
               <a:rPr lang="en-US" smtClean="0"/>
               <a:t>‹#›</a:t>
             </a:fld>
@@ -9983,7 +9983,7 @@
           <p:cNvPr id="8" name="decisions_title">
             <a:extLst>
               <a:ext uri="{FF2B5EF4-FFF2-40B4-BE49-F238E27FC236}">
-                <a16:creationId xmlns:a16="http://schemas.microsoft.com/office/drawing/2014/main" id="{4AD2330E-AE48-12ED-4958-1A519649C67E}"/>
+                <a16:creationId xmlns:a16="http://schemas.microsoft.com/office/drawing/2014/main" id="{E3AB3D67-B6D7-15B3-DD8A-AE10DAED14F9}"/>
               </a:ext>
             </a:extLst>
           </p:cNvPr>
@@ -10033,7 +10033,7 @@
           <p:cNvPr id="9" name="decisions">
             <a:extLst>
               <a:ext uri="{FF2B5EF4-FFF2-40B4-BE49-F238E27FC236}">
-                <a16:creationId xmlns:a16="http://schemas.microsoft.com/office/drawing/2014/main" id="{8E3915D5-48B1-8EE9-F1A7-B9D214E40806}"/>
+                <a16:creationId xmlns:a16="http://schemas.microsoft.com/office/drawing/2014/main" id="{9E901251-A3C0-90B9-943A-6440E809B171}"/>
               </a:ext>
             </a:extLst>
           </p:cNvPr>
@@ -10076,7 +10076,7 @@
           <p:cNvPr id="10" name="item_1_title">
             <a:extLst>
               <a:ext uri="{FF2B5EF4-FFF2-40B4-BE49-F238E27FC236}">
-                <a16:creationId xmlns:a16="http://schemas.microsoft.com/office/drawing/2014/main" id="{46425F45-44AE-09F7-B24A-B1C17B04A34A}"/>
+                <a16:creationId xmlns:a16="http://schemas.microsoft.com/office/drawing/2014/main" id="{9A99EE76-185B-F12C-23C9-D2000EA8FD5D}"/>
               </a:ext>
             </a:extLst>
           </p:cNvPr>
@@ -10129,7 +10129,7 @@
           <p:cNvPr id="11" name="item_1">
             <a:extLst>
               <a:ext uri="{FF2B5EF4-FFF2-40B4-BE49-F238E27FC236}">
-                <a16:creationId xmlns:a16="http://schemas.microsoft.com/office/drawing/2014/main" id="{369513A2-15EB-0DD3-CA5D-69F9C039B7AE}"/>
+                <a16:creationId xmlns:a16="http://schemas.microsoft.com/office/drawing/2014/main" id="{0181952D-7AEE-357C-6BD4-98A755E4F131}"/>
               </a:ext>
             </a:extLst>
           </p:cNvPr>
@@ -10177,7 +10177,7 @@
           <p:cNvPr id="12" name="item_2_title">
             <a:extLst>
               <a:ext uri="{FF2B5EF4-FFF2-40B4-BE49-F238E27FC236}">
-                <a16:creationId xmlns:a16="http://schemas.microsoft.com/office/drawing/2014/main" id="{ABBAD683-3631-1765-E1EC-FC7DEE1BBD9E}"/>
+                <a16:creationId xmlns:a16="http://schemas.microsoft.com/office/drawing/2014/main" id="{69BFEA5F-2625-1552-9070-BE18BC085EEE}"/>
               </a:ext>
             </a:extLst>
           </p:cNvPr>
@@ -10230,7 +10230,7 @@
           <p:cNvPr id="13" name="item_2">
             <a:extLst>
               <a:ext uri="{FF2B5EF4-FFF2-40B4-BE49-F238E27FC236}">
-                <a16:creationId xmlns:a16="http://schemas.microsoft.com/office/drawing/2014/main" id="{DD96292D-532B-9514-DAB3-DF5344CB348B}"/>
+                <a16:creationId xmlns:a16="http://schemas.microsoft.com/office/drawing/2014/main" id="{9B485882-E483-79B2-15FE-63A46FA27DE7}"/>
               </a:ext>
             </a:extLst>
           </p:cNvPr>
@@ -10278,7 +10278,7 @@
           <p:cNvPr id="14" name="item_3_title">
             <a:extLst>
               <a:ext uri="{FF2B5EF4-FFF2-40B4-BE49-F238E27FC236}">
-                <a16:creationId xmlns:a16="http://schemas.microsoft.com/office/drawing/2014/main" id="{5F601CAF-A079-F289-FBBD-3269FB13EE09}"/>
+                <a16:creationId xmlns:a16="http://schemas.microsoft.com/office/drawing/2014/main" id="{ED1173CA-027A-C9AC-34F9-E97CDBA78027}"/>
               </a:ext>
             </a:extLst>
           </p:cNvPr>
@@ -10331,7 +10331,7 @@
           <p:cNvPr id="15" name="item_3">
             <a:extLst>
               <a:ext uri="{FF2B5EF4-FFF2-40B4-BE49-F238E27FC236}">
-                <a16:creationId xmlns:a16="http://schemas.microsoft.com/office/drawing/2014/main" id="{8264FDE0-567B-9DFC-84BE-57F451842FF6}"/>
+                <a16:creationId xmlns:a16="http://schemas.microsoft.com/office/drawing/2014/main" id="{43C2029C-A711-B632-ECAD-683EA824032D}"/>
               </a:ext>
             </a:extLst>
           </p:cNvPr>
@@ -10379,7 +10379,7 @@
           <p:cNvPr id="16" name="source">
             <a:extLst>
               <a:ext uri="{FF2B5EF4-FFF2-40B4-BE49-F238E27FC236}">
-                <a16:creationId xmlns:a16="http://schemas.microsoft.com/office/drawing/2014/main" id="{12C498D6-AB42-D1FF-C437-C758D8E3FF53}"/>
+                <a16:creationId xmlns:a16="http://schemas.microsoft.com/office/drawing/2014/main" id="{7AF7916E-9031-79FB-42DB-A56B6EF8F55F}"/>
               </a:ext>
             </a:extLst>
           </p:cNvPr>
@@ -10434,7 +10434,7 @@
     </p:spTree>
     <p:extLst>
       <p:ext uri="{BB962C8B-B14F-4D97-AF65-F5344CB8AC3E}">
-        <p14:creationId xmlns:p14="http://schemas.microsoft.com/office/powerpoint/2010/main" val="4092974648"/>
+        <p14:creationId xmlns:p14="http://schemas.microsoft.com/office/powerpoint/2010/main" val="3943439590"/>
       </p:ext>
     </p:extLst>
   </p:cSld>
@@ -10466,7 +10466,7 @@
           <p:cNvPr id="7" name="creative_background">
             <a:extLst>
               <a:ext uri="{FF2B5EF4-FFF2-40B4-BE49-F238E27FC236}">
-                <a16:creationId xmlns:a16="http://schemas.microsoft.com/office/drawing/2014/main" id="{1449D45B-39C8-62E1-DB88-B7493E138671}"/>
+                <a16:creationId xmlns:a16="http://schemas.microsoft.com/office/drawing/2014/main" id="{13E47039-D087-FAE2-ED1E-8480C8157CD4}"/>
               </a:ext>
             </a:extLst>
           </p:cNvPr>
@@ -10539,7 +10539,7 @@
           <a:bodyPr/>
           <a:lstStyle/>
           <a:p>
-            <a:fld id="{F02FB69E-0639-468D-B960-1C2B0522D692}" type="datetimeFigureOut">
+            <a:fld id="{402E347B-D365-49E2-9289-3F52BA4D6BD6}" type="datetimeFigureOut">
               <a:rPr lang="en-US" smtClean="0"/>
               <a:t>10/3/2026</a:t>
             </a:fld>
@@ -10581,7 +10581,7 @@
           <a:bodyPr/>
           <a:lstStyle/>
           <a:p>
-            <a:fld id="{CC0DCAE8-747D-49F7-80B2-98777DEBA5AD}" type="slidenum">
+            <a:fld id="{59E99942-F5A0-42B8-85FC-8F53E2428FF4}" type="slidenum">
               <a:rPr lang="en-US" smtClean="0"/>
               <a:t>‹#›</a:t>
             </a:fld>
@@ -10594,7 +10594,7 @@
           <p:cNvPr id="8" name="body">
             <a:extLst>
               <a:ext uri="{FF2B5EF4-FFF2-40B4-BE49-F238E27FC236}">
-                <a16:creationId xmlns:a16="http://schemas.microsoft.com/office/drawing/2014/main" id="{D9597F94-05F4-25C5-C8E8-78DF70E55B7A}"/>
+                <a16:creationId xmlns:a16="http://schemas.microsoft.com/office/drawing/2014/main" id="{E6E98F5D-A92E-32A4-8358-A7CFC91E4B80}"/>
               </a:ext>
             </a:extLst>
           </p:cNvPr>
@@ -10634,7 +10634,7 @@
           <p:cNvPr id="9" name="kpi_value_1">
             <a:extLst>
               <a:ext uri="{FF2B5EF4-FFF2-40B4-BE49-F238E27FC236}">
-                <a16:creationId xmlns:a16="http://schemas.microsoft.com/office/drawing/2014/main" id="{0766EC8A-9D58-064F-B74F-AC29C0B3104F}"/>
+                <a16:creationId xmlns:a16="http://schemas.microsoft.com/office/drawing/2014/main" id="{43737BD9-8C54-C160-7526-01FEB6767F82}"/>
               </a:ext>
             </a:extLst>
           </p:cNvPr>
@@ -10687,7 +10687,7 @@
           <p:cNvPr id="10" name="kpi_label_1">
             <a:extLst>
               <a:ext uri="{FF2B5EF4-FFF2-40B4-BE49-F238E27FC236}">
-                <a16:creationId xmlns:a16="http://schemas.microsoft.com/office/drawing/2014/main" id="{19215523-6D6B-2383-C255-2230EA4CE1F8}"/>
+                <a16:creationId xmlns:a16="http://schemas.microsoft.com/office/drawing/2014/main" id="{B9F0BBA4-1B97-F08B-E656-FA4BAF555BA3}"/>
               </a:ext>
             </a:extLst>
           </p:cNvPr>
@@ -10735,7 +10735,7 @@
           <p:cNvPr id="11" name="kpi_value_2">
             <a:extLst>
               <a:ext uri="{FF2B5EF4-FFF2-40B4-BE49-F238E27FC236}">
-                <a16:creationId xmlns:a16="http://schemas.microsoft.com/office/drawing/2014/main" id="{472DFAB4-DFED-F7D6-53FC-F62785B68D5E}"/>
+                <a16:creationId xmlns:a16="http://schemas.microsoft.com/office/drawing/2014/main" id="{BDF482EB-C0A6-B3B1-393A-6DC7C21EE190}"/>
               </a:ext>
             </a:extLst>
           </p:cNvPr>
@@ -10788,7 +10788,7 @@
           <p:cNvPr id="12" name="kpi_label_2">
             <a:extLst>
               <a:ext uri="{FF2B5EF4-FFF2-40B4-BE49-F238E27FC236}">
-                <a16:creationId xmlns:a16="http://schemas.microsoft.com/office/drawing/2014/main" id="{BD71E98D-65E9-1973-8FFF-E09605E92004}"/>
+                <a16:creationId xmlns:a16="http://schemas.microsoft.com/office/drawing/2014/main" id="{E0C6491F-D016-EF8A-CBF5-B3005EBD6045}"/>
               </a:ext>
             </a:extLst>
           </p:cNvPr>
@@ -10836,7 +10836,7 @@
           <p:cNvPr id="13" name="source">
             <a:extLst>
               <a:ext uri="{FF2B5EF4-FFF2-40B4-BE49-F238E27FC236}">
-                <a16:creationId xmlns:a16="http://schemas.microsoft.com/office/drawing/2014/main" id="{11F06F42-E754-83A7-D5A6-945CC58F30E5}"/>
+                <a16:creationId xmlns:a16="http://schemas.microsoft.com/office/drawing/2014/main" id="{FC38A06D-5751-109E-7098-AF6B163F07E6}"/>
               </a:ext>
             </a:extLst>
           </p:cNvPr>
@@ -10891,7 +10891,7 @@
     </p:spTree>
     <p:extLst>
       <p:ext uri="{BB962C8B-B14F-4D97-AF65-F5344CB8AC3E}">
-        <p14:creationId xmlns:p14="http://schemas.microsoft.com/office/powerpoint/2010/main" val="3539232221"/>
+        <p14:creationId xmlns:p14="http://schemas.microsoft.com/office/powerpoint/2010/main" val="3245912883"/>
       </p:ext>
     </p:extLst>
   </p:cSld>
@@ -10923,7 +10923,7 @@
           <p:cNvPr id="7" name="creative_background">
             <a:extLst>
               <a:ext uri="{FF2B5EF4-FFF2-40B4-BE49-F238E27FC236}">
-                <a16:creationId xmlns:a16="http://schemas.microsoft.com/office/drawing/2014/main" id="{A184EB83-AC57-C2FB-2673-F7B543A0C287}"/>
+                <a16:creationId xmlns:a16="http://schemas.microsoft.com/office/drawing/2014/main" id="{A5ED6BA1-A180-4765-E9FE-361032BAA0E1}"/>
               </a:ext>
             </a:extLst>
           </p:cNvPr>
@@ -10996,7 +10996,7 @@
           <a:bodyPr/>
           <a:lstStyle/>
           <a:p>
-            <a:fld id="{F02FB69E-0639-468D-B960-1C2B0522D692}" type="datetimeFigureOut">
+            <a:fld id="{402E347B-D365-49E2-9289-3F52BA4D6BD6}" type="datetimeFigureOut">
               <a:rPr lang="en-US" smtClean="0"/>
               <a:t>10/3/2026</a:t>
             </a:fld>
@@ -11038,7 +11038,7 @@
           <a:bodyPr/>
           <a:lstStyle/>
           <a:p>
-            <a:fld id="{CC0DCAE8-747D-49F7-80B2-98777DEBA5AD}" type="slidenum">
+            <a:fld id="{59E99942-F5A0-42B8-85FC-8F53E2428FF4}" type="slidenum">
               <a:rPr lang="en-US" smtClean="0"/>
               <a:t>‹#›</a:t>
             </a:fld>
@@ -11051,7 +11051,7 @@
           <p:cNvPr id="8" name="body">
             <a:extLst>
               <a:ext uri="{FF2B5EF4-FFF2-40B4-BE49-F238E27FC236}">
-                <a16:creationId xmlns:a16="http://schemas.microsoft.com/office/drawing/2014/main" id="{C9FE9B11-BB57-1657-A591-027248CABCA5}"/>
+                <a16:creationId xmlns:a16="http://schemas.microsoft.com/office/drawing/2014/main" id="{8731307A-C7F5-0CCA-F93B-E8D4CC8C18C0}"/>
               </a:ext>
             </a:extLst>
           </p:cNvPr>
@@ -11091,7 +11091,7 @@
           <p:cNvPr id="9" name="kpi_value_1">
             <a:extLst>
               <a:ext uri="{FF2B5EF4-FFF2-40B4-BE49-F238E27FC236}">
-                <a16:creationId xmlns:a16="http://schemas.microsoft.com/office/drawing/2014/main" id="{78D8E82F-030F-F9F8-97AB-D81C525372B1}"/>
+                <a16:creationId xmlns:a16="http://schemas.microsoft.com/office/drawing/2014/main" id="{B05A83E5-E995-BFEF-962B-CB3F3A64F817}"/>
               </a:ext>
             </a:extLst>
           </p:cNvPr>
@@ -11144,7 +11144,7 @@
           <p:cNvPr id="10" name="kpi_label_1">
             <a:extLst>
               <a:ext uri="{FF2B5EF4-FFF2-40B4-BE49-F238E27FC236}">
-                <a16:creationId xmlns:a16="http://schemas.microsoft.com/office/drawing/2014/main" id="{FA94DB65-249E-5839-196A-C3E6643EF08C}"/>
+                <a16:creationId xmlns:a16="http://schemas.microsoft.com/office/drawing/2014/main" id="{62CE50B2-7790-2766-E79D-A773B1112DAC}"/>
               </a:ext>
             </a:extLst>
           </p:cNvPr>
@@ -11192,7 +11192,7 @@
           <p:cNvPr id="11" name="kpi_value_2">
             <a:extLst>
               <a:ext uri="{FF2B5EF4-FFF2-40B4-BE49-F238E27FC236}">
-                <a16:creationId xmlns:a16="http://schemas.microsoft.com/office/drawing/2014/main" id="{DCFA0F9F-2562-CADE-1C97-4C8CBAD1F9A0}"/>
+                <a16:creationId xmlns:a16="http://schemas.microsoft.com/office/drawing/2014/main" id="{AEAE4678-9923-F330-95A9-19451DAE54C4}"/>
               </a:ext>
             </a:extLst>
           </p:cNvPr>
@@ -11245,7 +11245,7 @@
           <p:cNvPr id="12" name="kpi_label_2">
             <a:extLst>
               <a:ext uri="{FF2B5EF4-FFF2-40B4-BE49-F238E27FC236}">
-                <a16:creationId xmlns:a16="http://schemas.microsoft.com/office/drawing/2014/main" id="{92ADD12D-EF6F-139A-95B5-192C83DFC2AF}"/>
+                <a16:creationId xmlns:a16="http://schemas.microsoft.com/office/drawing/2014/main" id="{39F62CB9-79A0-FA14-A204-6A192504A611}"/>
               </a:ext>
             </a:extLst>
           </p:cNvPr>
@@ -11293,7 +11293,7 @@
           <p:cNvPr id="13" name="kpi_value_3">
             <a:extLst>
               <a:ext uri="{FF2B5EF4-FFF2-40B4-BE49-F238E27FC236}">
-                <a16:creationId xmlns:a16="http://schemas.microsoft.com/office/drawing/2014/main" id="{CA4A4DA7-F8D3-739B-E4F8-800CA1006C8F}"/>
+                <a16:creationId xmlns:a16="http://schemas.microsoft.com/office/drawing/2014/main" id="{2CEAC4F6-74A6-B203-0986-173F4A4F8ACE}"/>
               </a:ext>
             </a:extLst>
           </p:cNvPr>
@@ -11346,7 +11346,7 @@
           <p:cNvPr id="14" name="kpi_label_3">
             <a:extLst>
               <a:ext uri="{FF2B5EF4-FFF2-40B4-BE49-F238E27FC236}">
-                <a16:creationId xmlns:a16="http://schemas.microsoft.com/office/drawing/2014/main" id="{E275E08F-DA6F-9C55-AB87-5224E8C45596}"/>
+                <a16:creationId xmlns:a16="http://schemas.microsoft.com/office/drawing/2014/main" id="{5F640C15-E36D-D5E3-A8F3-000E51A1BF67}"/>
               </a:ext>
             </a:extLst>
           </p:cNvPr>
@@ -11394,7 +11394,7 @@
           <p:cNvPr id="15" name="kpi_value_4">
             <a:extLst>
               <a:ext uri="{FF2B5EF4-FFF2-40B4-BE49-F238E27FC236}">
-                <a16:creationId xmlns:a16="http://schemas.microsoft.com/office/drawing/2014/main" id="{ADCEBF50-0962-AF51-1199-02DF969C99D6}"/>
+                <a16:creationId xmlns:a16="http://schemas.microsoft.com/office/drawing/2014/main" id="{3DA8611E-6145-9857-50C6-5A2AB4F6EA42}"/>
               </a:ext>
             </a:extLst>
           </p:cNvPr>
@@ -11447,7 +11447,7 @@
           <p:cNvPr id="16" name="kpi_label_4">
             <a:extLst>
               <a:ext uri="{FF2B5EF4-FFF2-40B4-BE49-F238E27FC236}">
-                <a16:creationId xmlns:a16="http://schemas.microsoft.com/office/drawing/2014/main" id="{22CAB0CF-97C0-E8F3-80C8-9E3AE42AAEDD}"/>
+                <a16:creationId xmlns:a16="http://schemas.microsoft.com/office/drawing/2014/main" id="{6DFA344E-180C-A9E2-975B-47ED2E29507D}"/>
               </a:ext>
             </a:extLst>
           </p:cNvPr>
@@ -11495,7 +11495,7 @@
           <p:cNvPr id="17" name="source">
             <a:extLst>
               <a:ext uri="{FF2B5EF4-FFF2-40B4-BE49-F238E27FC236}">
-                <a16:creationId xmlns:a16="http://schemas.microsoft.com/office/drawing/2014/main" id="{C585D2B3-2EA9-072F-F747-398DA11FBAFC}"/>
+                <a16:creationId xmlns:a16="http://schemas.microsoft.com/office/drawing/2014/main" id="{33C7E744-4563-F5A3-AC81-A72838E8F4BB}"/>
               </a:ext>
             </a:extLst>
           </p:cNvPr>
@@ -11550,7 +11550,7 @@
     </p:spTree>
     <p:extLst>
       <p:ext uri="{BB962C8B-B14F-4D97-AF65-F5344CB8AC3E}">
-        <p14:creationId xmlns:p14="http://schemas.microsoft.com/office/powerpoint/2010/main" val="2427906787"/>
+        <p14:creationId xmlns:p14="http://schemas.microsoft.com/office/powerpoint/2010/main" val="2434029189"/>
       </p:ext>
     </p:extLst>
   </p:cSld>
@@ -11582,7 +11582,7 @@
           <p:cNvPr id="7" name="creative_background">
             <a:extLst>
               <a:ext uri="{FF2B5EF4-FFF2-40B4-BE49-F238E27FC236}">
-                <a16:creationId xmlns:a16="http://schemas.microsoft.com/office/drawing/2014/main" id="{F032BE2F-D044-EAEC-4780-3F134059E152}"/>
+                <a16:creationId xmlns:a16="http://schemas.microsoft.com/office/drawing/2014/main" id="{BBFB58F3-F2F3-1988-5142-EBC75941FB01}"/>
               </a:ext>
             </a:extLst>
           </p:cNvPr>
@@ -11655,7 +11655,7 @@
           <a:bodyPr/>
           <a:lstStyle/>
           <a:p>
-            <a:fld id="{F02FB69E-0639-468D-B960-1C2B0522D692}" type="datetimeFigureOut">
+            <a:fld id="{402E347B-D365-49E2-9289-3F52BA4D6BD6}" type="datetimeFigureOut">
               <a:rPr lang="en-US" smtClean="0"/>
               <a:t>10/3/2026</a:t>
             </a:fld>
@@ -11697,7 +11697,7 @@
           <a:bodyPr/>
           <a:lstStyle/>
           <a:p>
-            <a:fld id="{CC0DCAE8-747D-49F7-80B2-98777DEBA5AD}" type="slidenum">
+            <a:fld id="{59E99942-F5A0-42B8-85FC-8F53E2428FF4}" type="slidenum">
               <a:rPr lang="en-US" smtClean="0"/>
               <a:t>‹#›</a:t>
             </a:fld>
@@ -11710,7 +11710,7 @@
           <p:cNvPr id="8" name="body">
             <a:extLst>
               <a:ext uri="{FF2B5EF4-FFF2-40B4-BE49-F238E27FC236}">
-                <a16:creationId xmlns:a16="http://schemas.microsoft.com/office/drawing/2014/main" id="{FADA376D-37F2-BC36-9889-64B14E922FE6}"/>
+                <a16:creationId xmlns:a16="http://schemas.microsoft.com/office/drawing/2014/main" id="{F5AB7833-8986-F4D5-868D-7C410EB22D23}"/>
               </a:ext>
             </a:extLst>
           </p:cNvPr>
@@ -11750,7 +11750,7 @@
           <p:cNvPr id="9" name="quote">
             <a:extLst>
               <a:ext uri="{FF2B5EF4-FFF2-40B4-BE49-F238E27FC236}">
-                <a16:creationId xmlns:a16="http://schemas.microsoft.com/office/drawing/2014/main" id="{F2EEE7D4-FDFB-C33A-49D6-00754859EF4A}"/>
+                <a16:creationId xmlns:a16="http://schemas.microsoft.com/office/drawing/2014/main" id="{4912BB37-FBA4-B344-B694-47E34FCA9240}"/>
               </a:ext>
             </a:extLst>
           </p:cNvPr>
@@ -11800,7 +11800,7 @@
           <p:cNvPr id="10" name="attribution">
             <a:extLst>
               <a:ext uri="{FF2B5EF4-FFF2-40B4-BE49-F238E27FC236}">
-                <a16:creationId xmlns:a16="http://schemas.microsoft.com/office/drawing/2014/main" id="{8B620788-0EAD-81AE-D996-54412BB2FEEF}"/>
+                <a16:creationId xmlns:a16="http://schemas.microsoft.com/office/drawing/2014/main" id="{794D043C-C738-8FA6-DD34-D818C8E0EA28}"/>
               </a:ext>
             </a:extLst>
           </p:cNvPr>
@@ -11848,7 +11848,7 @@
           <p:cNvPr id="11" name="source">
             <a:extLst>
               <a:ext uri="{FF2B5EF4-FFF2-40B4-BE49-F238E27FC236}">
-                <a16:creationId xmlns:a16="http://schemas.microsoft.com/office/drawing/2014/main" id="{13962B8F-4FF3-C292-4745-EF3EA8223496}"/>
+                <a16:creationId xmlns:a16="http://schemas.microsoft.com/office/drawing/2014/main" id="{73083A12-434C-2768-9E4A-BA86B260356D}"/>
               </a:ext>
             </a:extLst>
           </p:cNvPr>
@@ -11903,7 +11903,7 @@
     </p:spTree>
     <p:extLst>
       <p:ext uri="{BB962C8B-B14F-4D97-AF65-F5344CB8AC3E}">
-        <p14:creationId xmlns:p14="http://schemas.microsoft.com/office/powerpoint/2010/main" val="4182373135"/>
+        <p14:creationId xmlns:p14="http://schemas.microsoft.com/office/powerpoint/2010/main" val="2271155522"/>
       </p:ext>
     </p:extLst>
   </p:cSld>
@@ -11935,7 +11935,7 @@
           <p:cNvPr id="7" name="creative_background">
             <a:extLst>
               <a:ext uri="{FF2B5EF4-FFF2-40B4-BE49-F238E27FC236}">
-                <a16:creationId xmlns:a16="http://schemas.microsoft.com/office/drawing/2014/main" id="{CBD42968-9474-FC4D-6584-0334C229151D}"/>
+                <a16:creationId xmlns:a16="http://schemas.microsoft.com/office/drawing/2014/main" id="{7A1700DF-7289-AB04-D2CB-37B58B446360}"/>
               </a:ext>
             </a:extLst>
           </p:cNvPr>
@@ -12008,7 +12008,7 @@
           <a:bodyPr/>
           <a:lstStyle/>
           <a:p>
-            <a:fld id="{F02FB69E-0639-468D-B960-1C2B0522D692}" type="datetimeFigureOut">
+            <a:fld id="{402E347B-D365-49E2-9289-3F52BA4D6BD6}" type="datetimeFigureOut">
               <a:rPr lang="en-US" smtClean="0"/>
               <a:t>10/3/2026</a:t>
             </a:fld>
@@ -12050,7 +12050,7 @@
           <a:bodyPr/>
           <a:lstStyle/>
           <a:p>
-            <a:fld id="{CC0DCAE8-747D-49F7-80B2-98777DEBA5AD}" type="slidenum">
+            <a:fld id="{59E99942-F5A0-42B8-85FC-8F53E2428FF4}" type="slidenum">
               <a:rPr lang="en-US" smtClean="0"/>
               <a:t>‹#›</a:t>
             </a:fld>
@@ -12063,7 +12063,7 @@
           <p:cNvPr id="8" name="item_1_title">
             <a:extLst>
               <a:ext uri="{FF2B5EF4-FFF2-40B4-BE49-F238E27FC236}">
-                <a16:creationId xmlns:a16="http://schemas.microsoft.com/office/drawing/2014/main" id="{CCB82079-3747-E18C-480A-7B8B3AD8A3E8}"/>
+                <a16:creationId xmlns:a16="http://schemas.microsoft.com/office/drawing/2014/main" id="{AD0D302E-7E82-1036-3B52-20A4E604AF14}"/>
               </a:ext>
             </a:extLst>
           </p:cNvPr>
@@ -12113,7 +12113,7 @@
           <p:cNvPr id="9" name="item_1">
             <a:extLst>
               <a:ext uri="{FF2B5EF4-FFF2-40B4-BE49-F238E27FC236}">
-                <a16:creationId xmlns:a16="http://schemas.microsoft.com/office/drawing/2014/main" id="{0E504FB5-FAED-0345-F18A-FC88091E9315}"/>
+                <a16:creationId xmlns:a16="http://schemas.microsoft.com/office/drawing/2014/main" id="{BCBDC0AF-9C43-9050-642A-BC93E2E2D779}"/>
               </a:ext>
             </a:extLst>
           </p:cNvPr>
@@ -12161,7 +12161,7 @@
           <p:cNvPr id="10" name="item_2_title">
             <a:extLst>
               <a:ext uri="{FF2B5EF4-FFF2-40B4-BE49-F238E27FC236}">
-                <a16:creationId xmlns:a16="http://schemas.microsoft.com/office/drawing/2014/main" id="{534BB516-B822-DEC0-3892-99EE29942C05}"/>
+                <a16:creationId xmlns:a16="http://schemas.microsoft.com/office/drawing/2014/main" id="{24CEB0CA-8939-C4ED-FA79-44F42D8859A1}"/>
               </a:ext>
             </a:extLst>
           </p:cNvPr>
@@ -12214,7 +12214,7 @@
           <p:cNvPr id="11" name="item_2">
             <a:extLst>
               <a:ext uri="{FF2B5EF4-FFF2-40B4-BE49-F238E27FC236}">
-                <a16:creationId xmlns:a16="http://schemas.microsoft.com/office/drawing/2014/main" id="{296170AD-3078-7386-40A0-BC0C7B58DFC2}"/>
+                <a16:creationId xmlns:a16="http://schemas.microsoft.com/office/drawing/2014/main" id="{C2645D9B-427D-C35E-F0CE-6409679219A2}"/>
               </a:ext>
             </a:extLst>
           </p:cNvPr>
@@ -12262,7 +12262,7 @@
           <p:cNvPr id="12" name="item_3_title">
             <a:extLst>
               <a:ext uri="{FF2B5EF4-FFF2-40B4-BE49-F238E27FC236}">
-                <a16:creationId xmlns:a16="http://schemas.microsoft.com/office/drawing/2014/main" id="{F4AB9DB6-102D-354A-C6A3-5C5505548DA7}"/>
+                <a16:creationId xmlns:a16="http://schemas.microsoft.com/office/drawing/2014/main" id="{235B01AC-AF04-4B20-AA23-51989794BC4D}"/>
               </a:ext>
             </a:extLst>
           </p:cNvPr>
@@ -12315,7 +12315,7 @@
           <p:cNvPr id="13" name="item_3">
             <a:extLst>
               <a:ext uri="{FF2B5EF4-FFF2-40B4-BE49-F238E27FC236}">
-                <a16:creationId xmlns:a16="http://schemas.microsoft.com/office/drawing/2014/main" id="{05B340C6-8958-CAD6-4047-3BE8C9CC5F31}"/>
+                <a16:creationId xmlns:a16="http://schemas.microsoft.com/office/drawing/2014/main" id="{3A095187-2BBB-C525-B64C-25CFD18029C1}"/>
               </a:ext>
             </a:extLst>
           </p:cNvPr>
@@ -12363,7 +12363,7 @@
           <p:cNvPr id="14" name="source">
             <a:extLst>
               <a:ext uri="{FF2B5EF4-FFF2-40B4-BE49-F238E27FC236}">
-                <a16:creationId xmlns:a16="http://schemas.microsoft.com/office/drawing/2014/main" id="{2F715F96-F582-C553-85A2-9FA45788E105}"/>
+                <a16:creationId xmlns:a16="http://schemas.microsoft.com/office/drawing/2014/main" id="{A719F5D7-983B-6423-3DF6-1EF21F038B06}"/>
               </a:ext>
             </a:extLst>
           </p:cNvPr>
@@ -12418,7 +12418,7 @@
     </p:spTree>
     <p:extLst>
       <p:ext uri="{BB962C8B-B14F-4D97-AF65-F5344CB8AC3E}">
-        <p14:creationId xmlns:p14="http://schemas.microsoft.com/office/powerpoint/2010/main" val="616180356"/>
+        <p14:creationId xmlns:p14="http://schemas.microsoft.com/office/powerpoint/2010/main" val="209770619"/>
       </p:ext>
     </p:extLst>
   </p:cSld>
@@ -12450,7 +12450,7 @@
           <p:cNvPr id="7" name="creative_background">
             <a:extLst>
               <a:ext uri="{FF2B5EF4-FFF2-40B4-BE49-F238E27FC236}">
-                <a16:creationId xmlns:a16="http://schemas.microsoft.com/office/drawing/2014/main" id="{01A29E9F-5FF2-7665-082B-F7DA1FE73BA2}"/>
+                <a16:creationId xmlns:a16="http://schemas.microsoft.com/office/drawing/2014/main" id="{8E962BA8-7091-6A56-B1B2-2768F88514F7}"/>
               </a:ext>
             </a:extLst>
           </p:cNvPr>
@@ -12523,7 +12523,7 @@
           <a:bodyPr/>
           <a:lstStyle/>
           <a:p>
-            <a:fld id="{F02FB69E-0639-468D-B960-1C2B0522D692}" type="datetimeFigureOut">
+            <a:fld id="{402E347B-D365-49E2-9289-3F52BA4D6BD6}" type="datetimeFigureOut">
               <a:rPr lang="en-US" smtClean="0"/>
               <a:t>10/3/2026</a:t>
             </a:fld>
@@ -12565,7 +12565,7 @@
           <a:bodyPr/>
           <a:lstStyle/>
           <a:p>
-            <a:fld id="{CC0DCAE8-747D-49F7-80B2-98777DEBA5AD}" type="slidenum">
+            <a:fld id="{59E99942-F5A0-42B8-85FC-8F53E2428FF4}" type="slidenum">
               <a:rPr lang="en-US" smtClean="0"/>
               <a:t>‹#›</a:t>
             </a:fld>
@@ -12578,7 +12578,7 @@
           <p:cNvPr id="8" name="item_1_title">
             <a:extLst>
               <a:ext uri="{FF2B5EF4-FFF2-40B4-BE49-F238E27FC236}">
-                <a16:creationId xmlns:a16="http://schemas.microsoft.com/office/drawing/2014/main" id="{E7D08E3C-CE83-EF6F-FEB0-7D511D053F9A}"/>
+                <a16:creationId xmlns:a16="http://schemas.microsoft.com/office/drawing/2014/main" id="{A06A7F71-8733-A7D6-6494-3532F102DF02}"/>
               </a:ext>
             </a:extLst>
           </p:cNvPr>
@@ -12628,7 +12628,7 @@
           <p:cNvPr id="9" name="item_1">
             <a:extLst>
               <a:ext uri="{FF2B5EF4-FFF2-40B4-BE49-F238E27FC236}">
-                <a16:creationId xmlns:a16="http://schemas.microsoft.com/office/drawing/2014/main" id="{16564277-A5A6-F730-ECC7-F66B59DF393A}"/>
+                <a16:creationId xmlns:a16="http://schemas.microsoft.com/office/drawing/2014/main" id="{B86EB580-CE24-76C3-1E66-D412F358B7F5}"/>
               </a:ext>
             </a:extLst>
           </p:cNvPr>
@@ -12676,7 +12676,7 @@
           <p:cNvPr id="10" name="item_2_title">
             <a:extLst>
               <a:ext uri="{FF2B5EF4-FFF2-40B4-BE49-F238E27FC236}">
-                <a16:creationId xmlns:a16="http://schemas.microsoft.com/office/drawing/2014/main" id="{5F21C0CA-5407-6C01-DCD8-82DAC396E54D}"/>
+                <a16:creationId xmlns:a16="http://schemas.microsoft.com/office/drawing/2014/main" id="{36B4C3A7-2D98-7B6E-43B2-AE62B9CD4471}"/>
               </a:ext>
             </a:extLst>
           </p:cNvPr>
@@ -12729,7 +12729,7 @@
           <p:cNvPr id="11" name="item_2">
             <a:extLst>
               <a:ext uri="{FF2B5EF4-FFF2-40B4-BE49-F238E27FC236}">
-                <a16:creationId xmlns:a16="http://schemas.microsoft.com/office/drawing/2014/main" id="{AB2C85F3-4B8C-E439-B768-D59F8EA15167}"/>
+                <a16:creationId xmlns:a16="http://schemas.microsoft.com/office/drawing/2014/main" id="{B376895C-FD9E-45E3-ACA3-F315983738F2}"/>
               </a:ext>
             </a:extLst>
           </p:cNvPr>
@@ -12777,7 +12777,7 @@
           <p:cNvPr id="12" name="source">
             <a:extLst>
               <a:ext uri="{FF2B5EF4-FFF2-40B4-BE49-F238E27FC236}">
-                <a16:creationId xmlns:a16="http://schemas.microsoft.com/office/drawing/2014/main" id="{1988BB77-A728-A54C-890B-3DABFE32733B}"/>
+                <a16:creationId xmlns:a16="http://schemas.microsoft.com/office/drawing/2014/main" id="{8980C3CF-2863-B1C8-F944-D07E52EC2D8B}"/>
               </a:ext>
             </a:extLst>
           </p:cNvPr>
@@ -12832,7 +12832,7 @@
     </p:spTree>
     <p:extLst>
       <p:ext uri="{BB962C8B-B14F-4D97-AF65-F5344CB8AC3E}">
-        <p14:creationId xmlns:p14="http://schemas.microsoft.com/office/powerpoint/2010/main" val="1760843629"/>
+        <p14:creationId xmlns:p14="http://schemas.microsoft.com/office/powerpoint/2010/main" val="441773221"/>
       </p:ext>
     </p:extLst>
   </p:cSld>
@@ -12864,7 +12864,7 @@
           <p:cNvPr id="7" name="creative_background">
             <a:extLst>
               <a:ext uri="{FF2B5EF4-FFF2-40B4-BE49-F238E27FC236}">
-                <a16:creationId xmlns:a16="http://schemas.microsoft.com/office/drawing/2014/main" id="{0F4F3CC0-3FBA-4CD6-28D8-EF4773359BAF}"/>
+                <a16:creationId xmlns:a16="http://schemas.microsoft.com/office/drawing/2014/main" id="{4523EE5B-140E-5157-16F0-8AD46B309FE4}"/>
               </a:ext>
             </a:extLst>
           </p:cNvPr>
@@ -12937,7 +12937,7 @@
           <a:bodyPr/>
           <a:lstStyle/>
           <a:p>
-            <a:fld id="{F02FB69E-0639-468D-B960-1C2B0522D692}" type="datetimeFigureOut">
+            <a:fld id="{402E347B-D365-49E2-9289-3F52BA4D6BD6}" type="datetimeFigureOut">
               <a:rPr lang="en-US" smtClean="0"/>
               <a:t>10/3/2026</a:t>
             </a:fld>
@@ -12979,7 +12979,7 @@
           <a:bodyPr/>
           <a:lstStyle/>
           <a:p>
-            <a:fld id="{CC0DCAE8-747D-49F7-80B2-98777DEBA5AD}" type="slidenum">
+            <a:fld id="{59E99942-F5A0-42B8-85FC-8F53E2428FF4}" type="slidenum">
               <a:rPr lang="en-US" smtClean="0"/>
               <a:t>‹#›</a:t>
             </a:fld>
@@ -12992,7 +12992,7 @@
           <p:cNvPr id="8" name="chart">
             <a:extLst>
               <a:ext uri="{FF2B5EF4-FFF2-40B4-BE49-F238E27FC236}">
-                <a16:creationId xmlns:a16="http://schemas.microsoft.com/office/drawing/2014/main" id="{05A58021-13EE-924D-F307-F301CE7DB140}"/>
+                <a16:creationId xmlns:a16="http://schemas.microsoft.com/office/drawing/2014/main" id="{F7072417-1B38-DB77-8F81-485D81E8A716}"/>
               </a:ext>
             </a:extLst>
           </p:cNvPr>
@@ -13022,7 +13022,7 @@
           <p:cNvPr id="9" name="body">
             <a:extLst>
               <a:ext uri="{FF2B5EF4-FFF2-40B4-BE49-F238E27FC236}">
-                <a16:creationId xmlns:a16="http://schemas.microsoft.com/office/drawing/2014/main" id="{CC0C110D-B5A4-F1AF-23CE-FC3B34906055}"/>
+                <a16:creationId xmlns:a16="http://schemas.microsoft.com/office/drawing/2014/main" id="{82E6E680-5180-187E-AB99-4FF275A06739}"/>
               </a:ext>
             </a:extLst>
           </p:cNvPr>
@@ -13065,7 +13065,7 @@
           <p:cNvPr id="10" name="source">
             <a:extLst>
               <a:ext uri="{FF2B5EF4-FFF2-40B4-BE49-F238E27FC236}">
-                <a16:creationId xmlns:a16="http://schemas.microsoft.com/office/drawing/2014/main" id="{CBC6A059-0901-C561-44AD-EA25D757C3BC}"/>
+                <a16:creationId xmlns:a16="http://schemas.microsoft.com/office/drawing/2014/main" id="{242E5E48-CC47-8027-2278-7D97E564FE14}"/>
               </a:ext>
             </a:extLst>
           </p:cNvPr>
@@ -13120,7 +13120,7 @@
     </p:spTree>
     <p:extLst>
       <p:ext uri="{BB962C8B-B14F-4D97-AF65-F5344CB8AC3E}">
-        <p14:creationId xmlns:p14="http://schemas.microsoft.com/office/powerpoint/2010/main" val="3715863112"/>
+        <p14:creationId xmlns:p14="http://schemas.microsoft.com/office/powerpoint/2010/main" val="3874195866"/>
       </p:ext>
     </p:extLst>
   </p:cSld>
@@ -13152,7 +13152,7 @@
           <p:cNvPr id="7" name="creative_background">
             <a:extLst>
               <a:ext uri="{FF2B5EF4-FFF2-40B4-BE49-F238E27FC236}">
-                <a16:creationId xmlns:a16="http://schemas.microsoft.com/office/drawing/2014/main" id="{4EC0FA39-2316-E243-C0CF-1D0AFE312502}"/>
+                <a16:creationId xmlns:a16="http://schemas.microsoft.com/office/drawing/2014/main" id="{F58AA419-750E-1D47-97CC-4DD50504F979}"/>
               </a:ext>
             </a:extLst>
           </p:cNvPr>
@@ -13225,7 +13225,7 @@
           <a:bodyPr/>
           <a:lstStyle/>
           <a:p>
-            <a:fld id="{F02FB69E-0639-468D-B960-1C2B0522D692}" type="datetimeFigureOut">
+            <a:fld id="{402E347B-D365-49E2-9289-3F52BA4D6BD6}" type="datetimeFigureOut">
               <a:rPr lang="en-US" smtClean="0"/>
               <a:t>10/3/2026</a:t>
             </a:fld>
@@ -13267,7 +13267,7 @@
           <a:bodyPr/>
           <a:lstStyle/>
           <a:p>
-            <a:fld id="{CC0DCAE8-747D-49F7-80B2-98777DEBA5AD}" type="slidenum">
+            <a:fld id="{59E99942-F5A0-42B8-85FC-8F53E2428FF4}" type="slidenum">
               <a:rPr lang="en-US" smtClean="0"/>
               <a:t>‹#›</a:t>
             </a:fld>
@@ -13280,7 +13280,7 @@
           <p:cNvPr id="8" name="item_1_title">
             <a:extLst>
               <a:ext uri="{FF2B5EF4-FFF2-40B4-BE49-F238E27FC236}">
-                <a16:creationId xmlns:a16="http://schemas.microsoft.com/office/drawing/2014/main" id="{82C85142-7936-3455-859A-8DBDE475CDC8}"/>
+                <a16:creationId xmlns:a16="http://schemas.microsoft.com/office/drawing/2014/main" id="{521D129F-9A55-9D45-2E1A-C621393388C5}"/>
               </a:ext>
             </a:extLst>
           </p:cNvPr>
@@ -13330,7 +13330,7 @@
           <p:cNvPr id="9" name="item_1">
             <a:extLst>
               <a:ext uri="{FF2B5EF4-FFF2-40B4-BE49-F238E27FC236}">
-                <a16:creationId xmlns:a16="http://schemas.microsoft.com/office/drawing/2014/main" id="{258D6749-C2BE-9A9E-75E9-A1CC61222970}"/>
+                <a16:creationId xmlns:a16="http://schemas.microsoft.com/office/drawing/2014/main" id="{883335AD-D2FA-AECB-04EA-4AD831A10AD0}"/>
               </a:ext>
             </a:extLst>
           </p:cNvPr>
@@ -13378,7 +13378,7 @@
           <p:cNvPr id="10" name="item_2_title">
             <a:extLst>
               <a:ext uri="{FF2B5EF4-FFF2-40B4-BE49-F238E27FC236}">
-                <a16:creationId xmlns:a16="http://schemas.microsoft.com/office/drawing/2014/main" id="{DE7B681A-B483-EEEF-C302-6C268ACF1ADA}"/>
+                <a16:creationId xmlns:a16="http://schemas.microsoft.com/office/drawing/2014/main" id="{8C35B501-E457-737F-BBBB-FFE7DAD36125}"/>
               </a:ext>
             </a:extLst>
           </p:cNvPr>
@@ -13431,7 +13431,7 @@
           <p:cNvPr id="11" name="item_2">
             <a:extLst>
               <a:ext uri="{FF2B5EF4-FFF2-40B4-BE49-F238E27FC236}">
-                <a16:creationId xmlns:a16="http://schemas.microsoft.com/office/drawing/2014/main" id="{79E6C8E8-F3AC-0334-F3BD-A1CB78161FAA}"/>
+                <a16:creationId xmlns:a16="http://schemas.microsoft.com/office/drawing/2014/main" id="{B31EE71B-07D9-D572-5BD1-9CEA81677A25}"/>
               </a:ext>
             </a:extLst>
           </p:cNvPr>
@@ -13479,7 +13479,7 @@
           <p:cNvPr id="12" name="item_3_title">
             <a:extLst>
               <a:ext uri="{FF2B5EF4-FFF2-40B4-BE49-F238E27FC236}">
-                <a16:creationId xmlns:a16="http://schemas.microsoft.com/office/drawing/2014/main" id="{93B6E092-3DA0-4A5E-8FD8-EA839DBE6B83}"/>
+                <a16:creationId xmlns:a16="http://schemas.microsoft.com/office/drawing/2014/main" id="{ECAD9105-6E4F-570A-9954-778EAE8C3D88}"/>
               </a:ext>
             </a:extLst>
           </p:cNvPr>
@@ -13532,7 +13532,7 @@
           <p:cNvPr id="13" name="item_3">
             <a:extLst>
               <a:ext uri="{FF2B5EF4-FFF2-40B4-BE49-F238E27FC236}">
-                <a16:creationId xmlns:a16="http://schemas.microsoft.com/office/drawing/2014/main" id="{1FAD12E5-DB88-1828-AD54-9DB283052A19}"/>
+                <a16:creationId xmlns:a16="http://schemas.microsoft.com/office/drawing/2014/main" id="{AD4615D5-E033-D292-3047-BAB4EDAFEBAE}"/>
               </a:ext>
             </a:extLst>
           </p:cNvPr>
@@ -13580,7 +13580,7 @@
           <p:cNvPr id="14" name="item_4_title">
             <a:extLst>
               <a:ext uri="{FF2B5EF4-FFF2-40B4-BE49-F238E27FC236}">
-                <a16:creationId xmlns:a16="http://schemas.microsoft.com/office/drawing/2014/main" id="{DA94BF9C-43DD-2768-C215-522CE0441FE8}"/>
+                <a16:creationId xmlns:a16="http://schemas.microsoft.com/office/drawing/2014/main" id="{76970E31-E74F-3C5A-EBE1-99FD944903E7}"/>
               </a:ext>
             </a:extLst>
           </p:cNvPr>
@@ -13633,7 +13633,7 @@
           <p:cNvPr id="15" name="item_4">
             <a:extLst>
               <a:ext uri="{FF2B5EF4-FFF2-40B4-BE49-F238E27FC236}">
-                <a16:creationId xmlns:a16="http://schemas.microsoft.com/office/drawing/2014/main" id="{7907D81B-F8B9-CE20-FDFE-CA6E9A79ABE9}"/>
+                <a16:creationId xmlns:a16="http://schemas.microsoft.com/office/drawing/2014/main" id="{18397133-0D24-DC8C-3C76-9FF4EF9923C0}"/>
               </a:ext>
             </a:extLst>
           </p:cNvPr>
@@ -13681,7 +13681,7 @@
           <p:cNvPr id="16" name="source">
             <a:extLst>
               <a:ext uri="{FF2B5EF4-FFF2-40B4-BE49-F238E27FC236}">
-                <a16:creationId xmlns:a16="http://schemas.microsoft.com/office/drawing/2014/main" id="{F1213314-EB92-B4BE-3390-D1992A897EA6}"/>
+                <a16:creationId xmlns:a16="http://schemas.microsoft.com/office/drawing/2014/main" id="{9D416969-6041-994D-4215-0382F72CAE41}"/>
               </a:ext>
             </a:extLst>
           </p:cNvPr>
@@ -13736,7 +13736,7 @@
     </p:spTree>
     <p:extLst>
       <p:ext uri="{BB962C8B-B14F-4D97-AF65-F5344CB8AC3E}">
-        <p14:creationId xmlns:p14="http://schemas.microsoft.com/office/powerpoint/2010/main" val="3609355159"/>
+        <p14:creationId xmlns:p14="http://schemas.microsoft.com/office/powerpoint/2010/main" val="438558441"/>
       </p:ext>
     </p:extLst>
   </p:cSld>
@@ -13773,7 +13773,7 @@
           <p:cNvPr id="9" name="creative_background_master">
             <a:extLst>
               <a:ext uri="{FF2B5EF4-FFF2-40B4-BE49-F238E27FC236}">
-                <a16:creationId xmlns:a16="http://schemas.microsoft.com/office/drawing/2014/main" id="{48AFEF3F-866A-0A28-0382-44C9AD8F7CFA}"/>
+                <a16:creationId xmlns:a16="http://schemas.microsoft.com/office/drawing/2014/main" id="{0F7B903A-BC18-C982-A946-8F5B89887586}"/>
               </a:ext>
             </a:extLst>
           </p:cNvPr>
@@ -13934,7 +13934,7 @@
             </a:lvl1pPr>
           </a:lstStyle>
           <a:p>
-            <a:fld id="{F02FB69E-0639-468D-B960-1C2B0522D692}" type="datetimeFigureOut">
+            <a:fld id="{402E347B-D365-49E2-9289-3F52BA4D6BD6}" type="datetimeFigureOut">
               <a:rPr lang="en-US" smtClean="0"/>
               <a:t>10/3/2026</a:t>
             </a:fld>
@@ -14016,7 +14016,7 @@
             </a:lvl1pPr>
           </a:lstStyle>
           <a:p>
-            <a:fld id="{CC0DCAE8-747D-49F7-80B2-98777DEBA5AD}" type="slidenum">
+            <a:fld id="{59E99942-F5A0-42B8-85FC-8F53E2428FF4}" type="slidenum">
               <a:rPr lang="en-US" smtClean="0"/>
               <a:t>‹#›</a:t>
             </a:fld>
@@ -14027,7 +14027,7 @@
     </p:spTree>
     <p:extLst>
       <p:ext uri="{BB962C8B-B14F-4D97-AF65-F5344CB8AC3E}">
-        <p14:creationId xmlns:p14="http://schemas.microsoft.com/office/powerpoint/2010/main" val="4049031657"/>
+        <p14:creationId xmlns:p14="http://schemas.microsoft.com/office/powerpoint/2010/main" val="3137953373"/>
       </p:ext>
     </p:extLst>
   </p:cSld>
@@ -14420,10 +14420,10 @@
         <a:srgbClr val="E8E8E6"/>
       </a:lt2>
       <a:accent1>
-        <a:srgbClr val="315FA8"/>
+        <a:srgbClr val="1A3558"/>
       </a:accent1>
       <a:accent2>
-        <a:srgbClr val="1A3558"/>
+        <a:srgbClr val="315FA8"/>
       </a:accent2>
       <a:accent3>
         <a:srgbClr val="4A5058"/>
@@ -14432,7 +14432,7 @@
         <a:srgbClr val="1A3558"/>
       </a:accent4>
       <a:accent5>
-        <a:srgbClr val="315FA8"/>
+        <a:srgbClr val="1A3558"/>
       </a:accent5>
       <a:accent6>
         <a:srgbClr val="4A5058"/>

--- a/design/templates/papyrus-lapis/template.pptx
+++ b/design/templates/papyrus-lapis/template.pptx
@@ -126,7 +126,7 @@
           <p:cNvPr id="9" name="creative_background">
             <a:extLst>
               <a:ext uri="{FF2B5EF4-FFF2-40B4-BE49-F238E27FC236}">
-                <a16:creationId xmlns:a16="http://schemas.microsoft.com/office/drawing/2014/main" id="{0AC145A0-89A3-1382-2B40-BF931B24F935}"/>
+                <a16:creationId xmlns:a16="http://schemas.microsoft.com/office/drawing/2014/main" id="{48E36843-047A-BBAD-52CD-E6C754011800}"/>
               </a:ext>
             </a:extLst>
           </p:cNvPr>
@@ -290,9 +290,9 @@
             </a:lvl1pPr>
           </a:lstStyle>
           <a:p>
-            <a:fld id="{402E347B-D365-49E2-9289-3F52BA4D6BD6}" type="datetimeFigureOut">
+            <a:fld id="{953E3269-9E78-4D7E-9A3E-1CB27CD92A12}" type="datetimeFigureOut">
               <a:rPr lang="en-US" smtClean="0"/>
-              <a:t>10/3/2026</a:t>
+              <a:t>10/4/2026</a:t>
             </a:fld>
             <a:endParaRPr lang="en-US"/>
           </a:p>
@@ -332,7 +332,7 @@
           <a:bodyPr/>
           <a:lstStyle/>
           <a:p>
-            <a:fld id="{59E99942-F5A0-42B8-85FC-8F53E2428FF4}" type="slidenum">
+            <a:fld id="{F16D5B57-F7EE-4146-9EF5-FE1410ECAA61}" type="slidenum">
               <a:rPr lang="en-US" smtClean="0"/>
               <a:t>‹#›</a:t>
             </a:fld>
@@ -343,7 +343,7 @@
     </p:spTree>
     <p:extLst>
       <p:ext uri="{BB962C8B-B14F-4D97-AF65-F5344CB8AC3E}">
-        <p14:creationId xmlns:p14="http://schemas.microsoft.com/office/powerpoint/2010/main" val="3037253553"/>
+        <p14:creationId xmlns:p14="http://schemas.microsoft.com/office/powerpoint/2010/main" val="3011735481"/>
       </p:ext>
     </p:extLst>
   </p:cSld>
@@ -375,7 +375,7 @@
           <p:cNvPr id="7" name="creative_background">
             <a:extLst>
               <a:ext uri="{FF2B5EF4-FFF2-40B4-BE49-F238E27FC236}">
-                <a16:creationId xmlns:a16="http://schemas.microsoft.com/office/drawing/2014/main" id="{5A8DAFF3-D7C2-4B55-6978-437C95F0C2FD}"/>
+                <a16:creationId xmlns:a16="http://schemas.microsoft.com/office/drawing/2014/main" id="{3E5A628D-66DB-91CA-6EF4-C6D8A603F67C}"/>
               </a:ext>
             </a:extLst>
           </p:cNvPr>
@@ -448,9 +448,9 @@
           <a:bodyPr/>
           <a:lstStyle/>
           <a:p>
-            <a:fld id="{402E347B-D365-49E2-9289-3F52BA4D6BD6}" type="datetimeFigureOut">
+            <a:fld id="{953E3269-9E78-4D7E-9A3E-1CB27CD92A12}" type="datetimeFigureOut">
               <a:rPr lang="en-US" smtClean="0"/>
-              <a:t>10/3/2026</a:t>
+              <a:t>10/4/2026</a:t>
             </a:fld>
             <a:endParaRPr lang="en-US"/>
           </a:p>
@@ -490,7 +490,7 @@
           <a:bodyPr/>
           <a:lstStyle/>
           <a:p>
-            <a:fld id="{59E99942-F5A0-42B8-85FC-8F53E2428FF4}" type="slidenum">
+            <a:fld id="{F16D5B57-F7EE-4146-9EF5-FE1410ECAA61}" type="slidenum">
               <a:rPr lang="en-US" smtClean="0"/>
               <a:t>‹#›</a:t>
             </a:fld>
@@ -503,7 +503,7 @@
           <p:cNvPr id="8" name="body">
             <a:extLst>
               <a:ext uri="{FF2B5EF4-FFF2-40B4-BE49-F238E27FC236}">
-                <a16:creationId xmlns:a16="http://schemas.microsoft.com/office/drawing/2014/main" id="{373492A1-3A8F-723B-E3B2-6A64A3AF5F21}"/>
+                <a16:creationId xmlns:a16="http://schemas.microsoft.com/office/drawing/2014/main" id="{0583D66D-4506-B1D9-3C63-68052EDBFE4B}"/>
               </a:ext>
             </a:extLst>
           </p:cNvPr>
@@ -543,7 +543,7 @@
           <p:cNvPr id="9" name="source">
             <a:extLst>
               <a:ext uri="{FF2B5EF4-FFF2-40B4-BE49-F238E27FC236}">
-                <a16:creationId xmlns:a16="http://schemas.microsoft.com/office/drawing/2014/main" id="{5704C7FC-A367-0636-9D9A-7A71B3D5CC8C}"/>
+                <a16:creationId xmlns:a16="http://schemas.microsoft.com/office/drawing/2014/main" id="{4AC1F770-5448-543C-C8F4-EDEB3917F8B7}"/>
               </a:ext>
             </a:extLst>
           </p:cNvPr>
@@ -598,7 +598,7 @@
     </p:spTree>
     <p:extLst>
       <p:ext uri="{BB962C8B-B14F-4D97-AF65-F5344CB8AC3E}">
-        <p14:creationId xmlns:p14="http://schemas.microsoft.com/office/powerpoint/2010/main" val="1077363343"/>
+        <p14:creationId xmlns:p14="http://schemas.microsoft.com/office/powerpoint/2010/main" val="2696567185"/>
       </p:ext>
     </p:extLst>
   </p:cSld>
@@ -630,7 +630,7 @@
           <p:cNvPr id="7" name="creative_background">
             <a:extLst>
               <a:ext uri="{FF2B5EF4-FFF2-40B4-BE49-F238E27FC236}">
-                <a16:creationId xmlns:a16="http://schemas.microsoft.com/office/drawing/2014/main" id="{6D610A31-7936-47C2-6063-74A6F9EE36AF}"/>
+                <a16:creationId xmlns:a16="http://schemas.microsoft.com/office/drawing/2014/main" id="{71C57094-F384-9964-5BFF-CD31054958CA}"/>
               </a:ext>
             </a:extLst>
           </p:cNvPr>
@@ -703,9 +703,9 @@
           <a:bodyPr/>
           <a:lstStyle/>
           <a:p>
-            <a:fld id="{402E347B-D365-49E2-9289-3F52BA4D6BD6}" type="datetimeFigureOut">
+            <a:fld id="{953E3269-9E78-4D7E-9A3E-1CB27CD92A12}" type="datetimeFigureOut">
               <a:rPr lang="en-US" smtClean="0"/>
-              <a:t>10/3/2026</a:t>
+              <a:t>10/4/2026</a:t>
             </a:fld>
             <a:endParaRPr lang="en-US"/>
           </a:p>
@@ -745,7 +745,7 @@
           <a:bodyPr/>
           <a:lstStyle/>
           <a:p>
-            <a:fld id="{59E99942-F5A0-42B8-85FC-8F53E2428FF4}" type="slidenum">
+            <a:fld id="{F16D5B57-F7EE-4146-9EF5-FE1410ECAA61}" type="slidenum">
               <a:rPr lang="en-US" smtClean="0"/>
               <a:t>‹#›</a:t>
             </a:fld>
@@ -758,7 +758,7 @@
           <p:cNvPr id="8" name="body">
             <a:extLst>
               <a:ext uri="{FF2B5EF4-FFF2-40B4-BE49-F238E27FC236}">
-                <a16:creationId xmlns:a16="http://schemas.microsoft.com/office/drawing/2014/main" id="{DE515DDB-D826-7F56-05D2-61471745A166}"/>
+                <a16:creationId xmlns:a16="http://schemas.microsoft.com/office/drawing/2014/main" id="{5864E849-5CA2-35FE-0DC5-BB903078994D}"/>
               </a:ext>
             </a:extLst>
           </p:cNvPr>
@@ -801,7 +801,7 @@
     </p:spTree>
     <p:extLst>
       <p:ext uri="{BB962C8B-B14F-4D97-AF65-F5344CB8AC3E}">
-        <p14:creationId xmlns:p14="http://schemas.microsoft.com/office/powerpoint/2010/main" val="2500053371"/>
+        <p14:creationId xmlns:p14="http://schemas.microsoft.com/office/powerpoint/2010/main" val="2552197294"/>
       </p:ext>
     </p:extLst>
   </p:cSld>
@@ -877,7 +877,7 @@
           <p:cNvPr id="6" name="section_number">
             <a:extLst>
               <a:ext uri="{FF2B5EF4-FFF2-40B4-BE49-F238E27FC236}">
-                <a16:creationId xmlns:a16="http://schemas.microsoft.com/office/drawing/2014/main" id="{3181A235-FA62-F8BC-DF5E-F3DEDBC8EAD7}"/>
+                <a16:creationId xmlns:a16="http://schemas.microsoft.com/office/drawing/2014/main" id="{E41FB56C-9BDA-63DD-00AF-1C6675B412D5}"/>
               </a:ext>
             </a:extLst>
           </p:cNvPr>
@@ -933,7 +933,7 @@
           <p:cNvPr id="7" name="subtitle">
             <a:extLst>
               <a:ext uri="{FF2B5EF4-FFF2-40B4-BE49-F238E27FC236}">
-                <a16:creationId xmlns:a16="http://schemas.microsoft.com/office/drawing/2014/main" id="{A12DB891-E9CA-0B51-A507-B326434D4F2C}"/>
+                <a16:creationId xmlns:a16="http://schemas.microsoft.com/office/drawing/2014/main" id="{92A4E5BD-5826-F458-C905-AE46EA5F9ADD}"/>
               </a:ext>
             </a:extLst>
           </p:cNvPr>
@@ -985,7 +985,7 @@
           <p:cNvPr id="8" name="divider_rule">
             <a:extLst>
               <a:ext uri="{FF2B5EF4-FFF2-40B4-BE49-F238E27FC236}">
-                <a16:creationId xmlns:a16="http://schemas.microsoft.com/office/drawing/2014/main" id="{016EF455-6601-9E78-B788-2C13567D0CC3}"/>
+                <a16:creationId xmlns:a16="http://schemas.microsoft.com/office/drawing/2014/main" id="{934AFBDE-E717-61DF-80BA-82D4B8B4BD7A}"/>
               </a:ext>
             </a:extLst>
           </p:cNvPr>
@@ -1032,7 +1032,7 @@
           <p:cNvPr id="9" name="divider_rule">
             <a:extLst>
               <a:ext uri="{FF2B5EF4-FFF2-40B4-BE49-F238E27FC236}">
-                <a16:creationId xmlns:a16="http://schemas.microsoft.com/office/drawing/2014/main" id="{7469E063-7E4B-51B3-5C82-E62371A9BF34}"/>
+                <a16:creationId xmlns:a16="http://schemas.microsoft.com/office/drawing/2014/main" id="{0B43BB37-08A8-0161-E707-694E33F16A79}"/>
               </a:ext>
             </a:extLst>
           </p:cNvPr>
@@ -1079,7 +1079,7 @@
           <p:cNvPr id="10" name="divider_rule">
             <a:extLst>
               <a:ext uri="{FF2B5EF4-FFF2-40B4-BE49-F238E27FC236}">
-                <a16:creationId xmlns:a16="http://schemas.microsoft.com/office/drawing/2014/main" id="{9E028642-A43B-271E-7649-D6122AB840B7}"/>
+                <a16:creationId xmlns:a16="http://schemas.microsoft.com/office/drawing/2014/main" id="{9FC551DF-90F0-C661-EB42-7AB58CAAF2FE}"/>
               </a:ext>
             </a:extLst>
           </p:cNvPr>
@@ -1124,7 +1124,7 @@
     </p:spTree>
     <p:extLst>
       <p:ext uri="{BB962C8B-B14F-4D97-AF65-F5344CB8AC3E}">
-        <p14:creationId xmlns:p14="http://schemas.microsoft.com/office/powerpoint/2010/main" val="3486377069"/>
+        <p14:creationId xmlns:p14="http://schemas.microsoft.com/office/powerpoint/2010/main" val="2783060429"/>
       </p:ext>
     </p:extLst>
   </p:cSld>
@@ -1156,7 +1156,7 @@
           <p:cNvPr id="7" name="creative_background">
             <a:extLst>
               <a:ext uri="{FF2B5EF4-FFF2-40B4-BE49-F238E27FC236}">
-                <a16:creationId xmlns:a16="http://schemas.microsoft.com/office/drawing/2014/main" id="{B4A26FB8-07AB-9C98-ABBB-ECA360F04242}"/>
+                <a16:creationId xmlns:a16="http://schemas.microsoft.com/office/drawing/2014/main" id="{EA11B500-AA3B-F127-A47A-7B2B90359746}"/>
               </a:ext>
             </a:extLst>
           </p:cNvPr>
@@ -1229,9 +1229,9 @@
           <a:bodyPr/>
           <a:lstStyle/>
           <a:p>
-            <a:fld id="{402E347B-D365-49E2-9289-3F52BA4D6BD6}" type="datetimeFigureOut">
+            <a:fld id="{953E3269-9E78-4D7E-9A3E-1CB27CD92A12}" type="datetimeFigureOut">
               <a:rPr lang="en-US" smtClean="0"/>
-              <a:t>10/3/2026</a:t>
+              <a:t>10/4/2026</a:t>
             </a:fld>
             <a:endParaRPr lang="en-US"/>
           </a:p>
@@ -1271,7 +1271,7 @@
           <a:bodyPr/>
           <a:lstStyle/>
           <a:p>
-            <a:fld id="{59E99942-F5A0-42B8-85FC-8F53E2428FF4}" type="slidenum">
+            <a:fld id="{F16D5B57-F7EE-4146-9EF5-FE1410ECAA61}" type="slidenum">
               <a:rPr lang="en-US" smtClean="0"/>
               <a:t>‹#›</a:t>
             </a:fld>
@@ -1284,7 +1284,7 @@
           <p:cNvPr id="8" name="item_1_title">
             <a:extLst>
               <a:ext uri="{FF2B5EF4-FFF2-40B4-BE49-F238E27FC236}">
-                <a16:creationId xmlns:a16="http://schemas.microsoft.com/office/drawing/2014/main" id="{25DC806D-6839-C98E-FD1E-6E25C71F953B}"/>
+                <a16:creationId xmlns:a16="http://schemas.microsoft.com/office/drawing/2014/main" id="{91604302-7969-23E1-8CBC-0EA921579D09}"/>
               </a:ext>
             </a:extLst>
           </p:cNvPr>
@@ -1334,7 +1334,7 @@
           <p:cNvPr id="9" name="item_1">
             <a:extLst>
               <a:ext uri="{FF2B5EF4-FFF2-40B4-BE49-F238E27FC236}">
-                <a16:creationId xmlns:a16="http://schemas.microsoft.com/office/drawing/2014/main" id="{495FFC53-0A93-B3DB-2F88-770855E0FC50}"/>
+                <a16:creationId xmlns:a16="http://schemas.microsoft.com/office/drawing/2014/main" id="{EA7B5EBC-8726-01B1-0A43-B063E7046A33}"/>
               </a:ext>
             </a:extLst>
           </p:cNvPr>
@@ -1382,7 +1382,7 @@
           <p:cNvPr id="10" name="item_2_title">
             <a:extLst>
               <a:ext uri="{FF2B5EF4-FFF2-40B4-BE49-F238E27FC236}">
-                <a16:creationId xmlns:a16="http://schemas.microsoft.com/office/drawing/2014/main" id="{D6E9FCD9-4C66-FEB8-DC3C-40EDAFA7A067}"/>
+                <a16:creationId xmlns:a16="http://schemas.microsoft.com/office/drawing/2014/main" id="{357EA08C-1B22-97C4-DBDF-79BEABCD5022}"/>
               </a:ext>
             </a:extLst>
           </p:cNvPr>
@@ -1435,7 +1435,7 @@
           <p:cNvPr id="11" name="item_2">
             <a:extLst>
               <a:ext uri="{FF2B5EF4-FFF2-40B4-BE49-F238E27FC236}">
-                <a16:creationId xmlns:a16="http://schemas.microsoft.com/office/drawing/2014/main" id="{C770AC0C-1C54-82A0-4B00-2C3329976829}"/>
+                <a16:creationId xmlns:a16="http://schemas.microsoft.com/office/drawing/2014/main" id="{D84271FC-4428-4618-3307-753419A2293A}"/>
               </a:ext>
             </a:extLst>
           </p:cNvPr>
@@ -1483,7 +1483,7 @@
           <p:cNvPr id="12" name="item_3_title">
             <a:extLst>
               <a:ext uri="{FF2B5EF4-FFF2-40B4-BE49-F238E27FC236}">
-                <a16:creationId xmlns:a16="http://schemas.microsoft.com/office/drawing/2014/main" id="{11ABE897-AC88-2AF6-92A6-9F15D3552032}"/>
+                <a16:creationId xmlns:a16="http://schemas.microsoft.com/office/drawing/2014/main" id="{32C7F4AD-F5B0-5025-8927-D327DF63D039}"/>
               </a:ext>
             </a:extLst>
           </p:cNvPr>
@@ -1536,7 +1536,7 @@
           <p:cNvPr id="13" name="item_3">
             <a:extLst>
               <a:ext uri="{FF2B5EF4-FFF2-40B4-BE49-F238E27FC236}">
-                <a16:creationId xmlns:a16="http://schemas.microsoft.com/office/drawing/2014/main" id="{88CC387F-D9B5-A218-EF9C-C3C8A0AC8CC4}"/>
+                <a16:creationId xmlns:a16="http://schemas.microsoft.com/office/drawing/2014/main" id="{406CA3FD-A96A-11D2-6247-02875CA3B172}"/>
               </a:ext>
             </a:extLst>
           </p:cNvPr>
@@ -1584,7 +1584,7 @@
           <p:cNvPr id="14" name="item_4_title">
             <a:extLst>
               <a:ext uri="{FF2B5EF4-FFF2-40B4-BE49-F238E27FC236}">
-                <a16:creationId xmlns:a16="http://schemas.microsoft.com/office/drawing/2014/main" id="{59185CB6-EC66-A9DC-54F5-17DCAB0D228E}"/>
+                <a16:creationId xmlns:a16="http://schemas.microsoft.com/office/drawing/2014/main" id="{9EDA3901-3B19-D3A6-3601-664C27435D6F}"/>
               </a:ext>
             </a:extLst>
           </p:cNvPr>
@@ -1637,7 +1637,7 @@
           <p:cNvPr id="15" name="item_4">
             <a:extLst>
               <a:ext uri="{FF2B5EF4-FFF2-40B4-BE49-F238E27FC236}">
-                <a16:creationId xmlns:a16="http://schemas.microsoft.com/office/drawing/2014/main" id="{73979204-2F19-9ADE-9AA8-FBD51329707C}"/>
+                <a16:creationId xmlns:a16="http://schemas.microsoft.com/office/drawing/2014/main" id="{604A677C-732F-E39F-BF3D-787D812F10D1}"/>
               </a:ext>
             </a:extLst>
           </p:cNvPr>
@@ -1685,7 +1685,7 @@
           <p:cNvPr id="16" name="source">
             <a:extLst>
               <a:ext uri="{FF2B5EF4-FFF2-40B4-BE49-F238E27FC236}">
-                <a16:creationId xmlns:a16="http://schemas.microsoft.com/office/drawing/2014/main" id="{2F48E33B-2BE6-3ADC-DC7A-7B43C01E3F06}"/>
+                <a16:creationId xmlns:a16="http://schemas.microsoft.com/office/drawing/2014/main" id="{8FD50341-7A44-85BA-CC4F-3DED5C5C6B6A}"/>
               </a:ext>
             </a:extLst>
           </p:cNvPr>
@@ -1740,7 +1740,7 @@
     </p:spTree>
     <p:extLst>
       <p:ext uri="{BB962C8B-B14F-4D97-AF65-F5344CB8AC3E}">
-        <p14:creationId xmlns:p14="http://schemas.microsoft.com/office/powerpoint/2010/main" val="1549964459"/>
+        <p14:creationId xmlns:p14="http://schemas.microsoft.com/office/powerpoint/2010/main" val="3776699085"/>
       </p:ext>
     </p:extLst>
   </p:cSld>
@@ -1772,7 +1772,7 @@
           <p:cNvPr id="7" name="creative_background">
             <a:extLst>
               <a:ext uri="{FF2B5EF4-FFF2-40B4-BE49-F238E27FC236}">
-                <a16:creationId xmlns:a16="http://schemas.microsoft.com/office/drawing/2014/main" id="{66475E60-49B5-0729-3FE2-25486D345E3F}"/>
+                <a16:creationId xmlns:a16="http://schemas.microsoft.com/office/drawing/2014/main" id="{39B490D5-D877-E016-3792-7EF9C2ECEFA9}"/>
               </a:ext>
             </a:extLst>
           </p:cNvPr>
@@ -1845,9 +1845,9 @@
           <a:bodyPr/>
           <a:lstStyle/>
           <a:p>
-            <a:fld id="{402E347B-D365-49E2-9289-3F52BA4D6BD6}" type="datetimeFigureOut">
+            <a:fld id="{953E3269-9E78-4D7E-9A3E-1CB27CD92A12}" type="datetimeFigureOut">
               <a:rPr lang="en-US" smtClean="0"/>
-              <a:t>10/3/2026</a:t>
+              <a:t>10/4/2026</a:t>
             </a:fld>
             <a:endParaRPr lang="en-US"/>
           </a:p>
@@ -1887,7 +1887,7 @@
           <a:bodyPr/>
           <a:lstStyle/>
           <a:p>
-            <a:fld id="{59E99942-F5A0-42B8-85FC-8F53E2428FF4}" type="slidenum">
+            <a:fld id="{F16D5B57-F7EE-4146-9EF5-FE1410ECAA61}" type="slidenum">
               <a:rPr lang="en-US" smtClean="0"/>
               <a:t>‹#›</a:t>
             </a:fld>
@@ -1900,7 +1900,7 @@
           <p:cNvPr id="8" name="body">
             <a:extLst>
               <a:ext uri="{FF2B5EF4-FFF2-40B4-BE49-F238E27FC236}">
-                <a16:creationId xmlns:a16="http://schemas.microsoft.com/office/drawing/2014/main" id="{022D6230-8F18-6B61-ED18-19EA6E4C3650}"/>
+                <a16:creationId xmlns:a16="http://schemas.microsoft.com/office/drawing/2014/main" id="{9F9D0DE8-87EE-1E4C-7555-13C517EEF088}"/>
               </a:ext>
             </a:extLst>
           </p:cNvPr>
@@ -1945,7 +1945,7 @@
           <p:cNvPr id="9" name="source">
             <a:extLst>
               <a:ext uri="{FF2B5EF4-FFF2-40B4-BE49-F238E27FC236}">
-                <a16:creationId xmlns:a16="http://schemas.microsoft.com/office/drawing/2014/main" id="{383134E2-23D9-5F20-16BD-8998F1038395}"/>
+                <a16:creationId xmlns:a16="http://schemas.microsoft.com/office/drawing/2014/main" id="{4323F9EC-CC51-9E9C-CEEE-9A521D156634}"/>
               </a:ext>
             </a:extLst>
           </p:cNvPr>
@@ -2000,7 +2000,7 @@
     </p:spTree>
     <p:extLst>
       <p:ext uri="{BB962C8B-B14F-4D97-AF65-F5344CB8AC3E}">
-        <p14:creationId xmlns:p14="http://schemas.microsoft.com/office/powerpoint/2010/main" val="2361635168"/>
+        <p14:creationId xmlns:p14="http://schemas.microsoft.com/office/powerpoint/2010/main" val="4274143"/>
       </p:ext>
     </p:extLst>
   </p:cSld>
@@ -2032,7 +2032,7 @@
           <p:cNvPr id="7" name="creative_background">
             <a:extLst>
               <a:ext uri="{FF2B5EF4-FFF2-40B4-BE49-F238E27FC236}">
-                <a16:creationId xmlns:a16="http://schemas.microsoft.com/office/drawing/2014/main" id="{78D3EFB1-BD15-9021-353A-BCB70D000669}"/>
+                <a16:creationId xmlns:a16="http://schemas.microsoft.com/office/drawing/2014/main" id="{1748DA19-1D64-4356-564A-363F4E89A3D0}"/>
               </a:ext>
             </a:extLst>
           </p:cNvPr>
@@ -2105,9 +2105,9 @@
           <a:bodyPr/>
           <a:lstStyle/>
           <a:p>
-            <a:fld id="{402E347B-D365-49E2-9289-3F52BA4D6BD6}" type="datetimeFigureOut">
+            <a:fld id="{953E3269-9E78-4D7E-9A3E-1CB27CD92A12}" type="datetimeFigureOut">
               <a:rPr lang="en-US" smtClean="0"/>
-              <a:t>10/3/2026</a:t>
+              <a:t>10/4/2026</a:t>
             </a:fld>
             <a:endParaRPr lang="en-US"/>
           </a:p>
@@ -2147,7 +2147,7 @@
           <a:bodyPr/>
           <a:lstStyle/>
           <a:p>
-            <a:fld id="{59E99942-F5A0-42B8-85FC-8F53E2428FF4}" type="slidenum">
+            <a:fld id="{F16D5B57-F7EE-4146-9EF5-FE1410ECAA61}" type="slidenum">
               <a:rPr lang="en-US" smtClean="0"/>
               <a:t>‹#›</a:t>
             </a:fld>
@@ -2160,7 +2160,7 @@
           <p:cNvPr id="8" name="item_1_title">
             <a:extLst>
               <a:ext uri="{FF2B5EF4-FFF2-40B4-BE49-F238E27FC236}">
-                <a16:creationId xmlns:a16="http://schemas.microsoft.com/office/drawing/2014/main" id="{108FBCE1-0DEB-7E8C-1C74-44D0ABE7B398}"/>
+                <a16:creationId xmlns:a16="http://schemas.microsoft.com/office/drawing/2014/main" id="{FAD8F530-3529-6564-C506-BD1CBC00E4F4}"/>
               </a:ext>
             </a:extLst>
           </p:cNvPr>
@@ -2210,7 +2210,7 @@
           <p:cNvPr id="9" name="item_1">
             <a:extLst>
               <a:ext uri="{FF2B5EF4-FFF2-40B4-BE49-F238E27FC236}">
-                <a16:creationId xmlns:a16="http://schemas.microsoft.com/office/drawing/2014/main" id="{C7C9A96D-2540-0592-0948-C1BA3757C77F}"/>
+                <a16:creationId xmlns:a16="http://schemas.microsoft.com/office/drawing/2014/main" id="{C0EC9B9F-5C54-0878-405E-C2BBF9009751}"/>
               </a:ext>
             </a:extLst>
           </p:cNvPr>
@@ -2258,7 +2258,7 @@
           <p:cNvPr id="10" name="item_2_title">
             <a:extLst>
               <a:ext uri="{FF2B5EF4-FFF2-40B4-BE49-F238E27FC236}">
-                <a16:creationId xmlns:a16="http://schemas.microsoft.com/office/drawing/2014/main" id="{14431B98-FE9B-30A5-AE3F-62D5099A9858}"/>
+                <a16:creationId xmlns:a16="http://schemas.microsoft.com/office/drawing/2014/main" id="{9B915F3C-3D15-FAFF-710B-B0B829099E73}"/>
               </a:ext>
             </a:extLst>
           </p:cNvPr>
@@ -2311,7 +2311,7 @@
           <p:cNvPr id="11" name="item_2">
             <a:extLst>
               <a:ext uri="{FF2B5EF4-FFF2-40B4-BE49-F238E27FC236}">
-                <a16:creationId xmlns:a16="http://schemas.microsoft.com/office/drawing/2014/main" id="{3DFB2056-CEBF-C857-6FCD-80739323E687}"/>
+                <a16:creationId xmlns:a16="http://schemas.microsoft.com/office/drawing/2014/main" id="{4F5D95C7-DFE1-221D-EDF1-262CC037D54B}"/>
               </a:ext>
             </a:extLst>
           </p:cNvPr>
@@ -2359,7 +2359,7 @@
           <p:cNvPr id="12" name="item_3_title">
             <a:extLst>
               <a:ext uri="{FF2B5EF4-FFF2-40B4-BE49-F238E27FC236}">
-                <a16:creationId xmlns:a16="http://schemas.microsoft.com/office/drawing/2014/main" id="{4B04EC4E-1965-A213-4543-5D5BFB8FFA65}"/>
+                <a16:creationId xmlns:a16="http://schemas.microsoft.com/office/drawing/2014/main" id="{45B2CF8E-8FD1-F9EB-131E-ACDF323B32DA}"/>
               </a:ext>
             </a:extLst>
           </p:cNvPr>
@@ -2412,7 +2412,7 @@
           <p:cNvPr id="13" name="item_3">
             <a:extLst>
               <a:ext uri="{FF2B5EF4-FFF2-40B4-BE49-F238E27FC236}">
-                <a16:creationId xmlns:a16="http://schemas.microsoft.com/office/drawing/2014/main" id="{EBCA6A33-0CA4-38BE-9F75-490C32752D24}"/>
+                <a16:creationId xmlns:a16="http://schemas.microsoft.com/office/drawing/2014/main" id="{D3A9803F-0441-FF9A-924C-0715E971D3F0}"/>
               </a:ext>
             </a:extLst>
           </p:cNvPr>
@@ -2460,7 +2460,7 @@
           <p:cNvPr id="14" name="item_4_title">
             <a:extLst>
               <a:ext uri="{FF2B5EF4-FFF2-40B4-BE49-F238E27FC236}">
-                <a16:creationId xmlns:a16="http://schemas.microsoft.com/office/drawing/2014/main" id="{C5161877-42A1-4C5F-2CB5-D26FCB7E35A5}"/>
+                <a16:creationId xmlns:a16="http://schemas.microsoft.com/office/drawing/2014/main" id="{AB48DEBE-3940-0D09-C3EF-9AC8E74A286B}"/>
               </a:ext>
             </a:extLst>
           </p:cNvPr>
@@ -2513,7 +2513,7 @@
           <p:cNvPr id="15" name="item_4">
             <a:extLst>
               <a:ext uri="{FF2B5EF4-FFF2-40B4-BE49-F238E27FC236}">
-                <a16:creationId xmlns:a16="http://schemas.microsoft.com/office/drawing/2014/main" id="{E48FCECA-3171-B231-A211-F96FCB2DF0B3}"/>
+                <a16:creationId xmlns:a16="http://schemas.microsoft.com/office/drawing/2014/main" id="{A092F976-A25F-9427-B65B-B22BDCDA3C6A}"/>
               </a:ext>
             </a:extLst>
           </p:cNvPr>
@@ -2561,7 +2561,7 @@
           <p:cNvPr id="16" name="source">
             <a:extLst>
               <a:ext uri="{FF2B5EF4-FFF2-40B4-BE49-F238E27FC236}">
-                <a16:creationId xmlns:a16="http://schemas.microsoft.com/office/drawing/2014/main" id="{39E7AAC3-61B9-E1AC-197D-FFCF2FBB92A1}"/>
+                <a16:creationId xmlns:a16="http://schemas.microsoft.com/office/drawing/2014/main" id="{B76C413B-8B27-A46B-FCB6-225F0E998D0F}"/>
               </a:ext>
             </a:extLst>
           </p:cNvPr>
@@ -2616,7 +2616,7 @@
     </p:spTree>
     <p:extLst>
       <p:ext uri="{BB962C8B-B14F-4D97-AF65-F5344CB8AC3E}">
-        <p14:creationId xmlns:p14="http://schemas.microsoft.com/office/powerpoint/2010/main" val="1844372598"/>
+        <p14:creationId xmlns:p14="http://schemas.microsoft.com/office/powerpoint/2010/main" val="149340283"/>
       </p:ext>
     </p:extLst>
   </p:cSld>
@@ -2648,7 +2648,7 @@
           <p:cNvPr id="7" name="creative_background">
             <a:extLst>
               <a:ext uri="{FF2B5EF4-FFF2-40B4-BE49-F238E27FC236}">
-                <a16:creationId xmlns:a16="http://schemas.microsoft.com/office/drawing/2014/main" id="{8C89B593-2442-2645-27E6-68C461B5ABE6}"/>
+                <a16:creationId xmlns:a16="http://schemas.microsoft.com/office/drawing/2014/main" id="{DD50DAF6-9ACE-12D3-A0A7-F6FB6500C612}"/>
               </a:ext>
             </a:extLst>
           </p:cNvPr>
@@ -2721,9 +2721,9 @@
           <a:bodyPr/>
           <a:lstStyle/>
           <a:p>
-            <a:fld id="{402E347B-D365-49E2-9289-3F52BA4D6BD6}" type="datetimeFigureOut">
+            <a:fld id="{953E3269-9E78-4D7E-9A3E-1CB27CD92A12}" type="datetimeFigureOut">
               <a:rPr lang="en-US" smtClean="0"/>
-              <a:t>10/3/2026</a:t>
+              <a:t>10/4/2026</a:t>
             </a:fld>
             <a:endParaRPr lang="en-US"/>
           </a:p>
@@ -2763,7 +2763,7 @@
           <a:bodyPr/>
           <a:lstStyle/>
           <a:p>
-            <a:fld id="{59E99942-F5A0-42B8-85FC-8F53E2428FF4}" type="slidenum">
+            <a:fld id="{F16D5B57-F7EE-4146-9EF5-FE1410ECAA61}" type="slidenum">
               <a:rPr lang="en-US" smtClean="0"/>
               <a:t>‹#›</a:t>
             </a:fld>
@@ -2776,7 +2776,7 @@
           <p:cNvPr id="8" name="body">
             <a:extLst>
               <a:ext uri="{FF2B5EF4-FFF2-40B4-BE49-F238E27FC236}">
-                <a16:creationId xmlns:a16="http://schemas.microsoft.com/office/drawing/2014/main" id="{7BCBD5A9-E38A-472F-3A2F-C1800838EDE9}"/>
+                <a16:creationId xmlns:a16="http://schemas.microsoft.com/office/drawing/2014/main" id="{A4AF7255-EE22-D896-23BA-EC7B6174B54C}"/>
               </a:ext>
             </a:extLst>
           </p:cNvPr>
@@ -2816,7 +2816,7 @@
           <p:cNvPr id="9" name="kpi_value_1">
             <a:extLst>
               <a:ext uri="{FF2B5EF4-FFF2-40B4-BE49-F238E27FC236}">
-                <a16:creationId xmlns:a16="http://schemas.microsoft.com/office/drawing/2014/main" id="{24ECF94E-0A30-D4EB-8688-6326E8153F7F}"/>
+                <a16:creationId xmlns:a16="http://schemas.microsoft.com/office/drawing/2014/main" id="{83982894-65F5-BE70-9761-B4BAE4D4151B}"/>
               </a:ext>
             </a:extLst>
           </p:cNvPr>
@@ -2869,7 +2869,7 @@
           <p:cNvPr id="10" name="kpi_label_1">
             <a:extLst>
               <a:ext uri="{FF2B5EF4-FFF2-40B4-BE49-F238E27FC236}">
-                <a16:creationId xmlns:a16="http://schemas.microsoft.com/office/drawing/2014/main" id="{CF49E05B-4B1D-1D58-6D6F-2F7D1C572719}"/>
+                <a16:creationId xmlns:a16="http://schemas.microsoft.com/office/drawing/2014/main" id="{F7165B84-5959-55B5-BABA-E6F8D740141B}"/>
               </a:ext>
             </a:extLst>
           </p:cNvPr>
@@ -2917,7 +2917,7 @@
           <p:cNvPr id="11" name="source">
             <a:extLst>
               <a:ext uri="{FF2B5EF4-FFF2-40B4-BE49-F238E27FC236}">
-                <a16:creationId xmlns:a16="http://schemas.microsoft.com/office/drawing/2014/main" id="{B88C7629-A009-30A1-E791-6B24B74941F1}"/>
+                <a16:creationId xmlns:a16="http://schemas.microsoft.com/office/drawing/2014/main" id="{049FCB6E-F17E-F01D-A92E-DD60684BF45D}"/>
               </a:ext>
             </a:extLst>
           </p:cNvPr>
@@ -2972,7 +2972,7 @@
     </p:spTree>
     <p:extLst>
       <p:ext uri="{BB962C8B-B14F-4D97-AF65-F5344CB8AC3E}">
-        <p14:creationId xmlns:p14="http://schemas.microsoft.com/office/powerpoint/2010/main" val="1045261881"/>
+        <p14:creationId xmlns:p14="http://schemas.microsoft.com/office/powerpoint/2010/main" val="2580826322"/>
       </p:ext>
     </p:extLst>
   </p:cSld>
@@ -3004,7 +3004,7 @@
           <p:cNvPr id="7" name="creative_background">
             <a:extLst>
               <a:ext uri="{FF2B5EF4-FFF2-40B4-BE49-F238E27FC236}">
-                <a16:creationId xmlns:a16="http://schemas.microsoft.com/office/drawing/2014/main" id="{BD3F2F84-1EC1-E1BF-9460-7734CC756F90}"/>
+                <a16:creationId xmlns:a16="http://schemas.microsoft.com/office/drawing/2014/main" id="{58F5F9D8-F441-CF02-3A12-C13AEBF3191B}"/>
               </a:ext>
             </a:extLst>
           </p:cNvPr>
@@ -3077,9 +3077,9 @@
           <a:bodyPr/>
           <a:lstStyle/>
           <a:p>
-            <a:fld id="{402E347B-D365-49E2-9289-3F52BA4D6BD6}" type="datetimeFigureOut">
+            <a:fld id="{953E3269-9E78-4D7E-9A3E-1CB27CD92A12}" type="datetimeFigureOut">
               <a:rPr lang="en-US" smtClean="0"/>
-              <a:t>10/3/2026</a:t>
+              <a:t>10/4/2026</a:t>
             </a:fld>
             <a:endParaRPr lang="en-US"/>
           </a:p>
@@ -3119,7 +3119,7 @@
           <a:bodyPr/>
           <a:lstStyle/>
           <a:p>
-            <a:fld id="{59E99942-F5A0-42B8-85FC-8F53E2428FF4}" type="slidenum">
+            <a:fld id="{F16D5B57-F7EE-4146-9EF5-FE1410ECAA61}" type="slidenum">
               <a:rPr lang="en-US" smtClean="0"/>
               <a:t>‹#›</a:t>
             </a:fld>
@@ -3132,7 +3132,7 @@
           <p:cNvPr id="8" name="body">
             <a:extLst>
               <a:ext uri="{FF2B5EF4-FFF2-40B4-BE49-F238E27FC236}">
-                <a16:creationId xmlns:a16="http://schemas.microsoft.com/office/drawing/2014/main" id="{9FAE3219-A9FD-25A1-E802-94EF39379144}"/>
+                <a16:creationId xmlns:a16="http://schemas.microsoft.com/office/drawing/2014/main" id="{81CBC269-5707-C87A-6CB9-9B05E4DB7DD2}"/>
               </a:ext>
             </a:extLst>
           </p:cNvPr>
@@ -3172,7 +3172,7 @@
           <p:cNvPr id="9" name="kpi_value_1">
             <a:extLst>
               <a:ext uri="{FF2B5EF4-FFF2-40B4-BE49-F238E27FC236}">
-                <a16:creationId xmlns:a16="http://schemas.microsoft.com/office/drawing/2014/main" id="{122B4C0A-8E5E-BC12-EB70-8C61630E9A3B}"/>
+                <a16:creationId xmlns:a16="http://schemas.microsoft.com/office/drawing/2014/main" id="{A2B07AD3-73C7-FB4D-6586-D3534F170BB1}"/>
               </a:ext>
             </a:extLst>
           </p:cNvPr>
@@ -3225,7 +3225,7 @@
           <p:cNvPr id="10" name="kpi_label_1">
             <a:extLst>
               <a:ext uri="{FF2B5EF4-FFF2-40B4-BE49-F238E27FC236}">
-                <a16:creationId xmlns:a16="http://schemas.microsoft.com/office/drawing/2014/main" id="{0F4747C9-2847-57B7-348E-C55CE47ED477}"/>
+                <a16:creationId xmlns:a16="http://schemas.microsoft.com/office/drawing/2014/main" id="{853B812A-0206-D4F8-83C6-045FCCF0E536}"/>
               </a:ext>
             </a:extLst>
           </p:cNvPr>
@@ -3273,7 +3273,7 @@
           <p:cNvPr id="11" name="kpi_value_2">
             <a:extLst>
               <a:ext uri="{FF2B5EF4-FFF2-40B4-BE49-F238E27FC236}">
-                <a16:creationId xmlns:a16="http://schemas.microsoft.com/office/drawing/2014/main" id="{130B48A5-2772-7128-5D0C-198B49977A1E}"/>
+                <a16:creationId xmlns:a16="http://schemas.microsoft.com/office/drawing/2014/main" id="{81552106-2F0B-F8C1-B84F-A2F13E8DA829}"/>
               </a:ext>
             </a:extLst>
           </p:cNvPr>
@@ -3326,7 +3326,7 @@
           <p:cNvPr id="12" name="kpi_label_2">
             <a:extLst>
               <a:ext uri="{FF2B5EF4-FFF2-40B4-BE49-F238E27FC236}">
-                <a16:creationId xmlns:a16="http://schemas.microsoft.com/office/drawing/2014/main" id="{12FB42FE-DACC-24C2-6A02-D47F83BFBE11}"/>
+                <a16:creationId xmlns:a16="http://schemas.microsoft.com/office/drawing/2014/main" id="{A6791A2E-367A-940A-5544-DC965871F5A9}"/>
               </a:ext>
             </a:extLst>
           </p:cNvPr>
@@ -3374,7 +3374,7 @@
           <p:cNvPr id="13" name="kpi_value_3">
             <a:extLst>
               <a:ext uri="{FF2B5EF4-FFF2-40B4-BE49-F238E27FC236}">
-                <a16:creationId xmlns:a16="http://schemas.microsoft.com/office/drawing/2014/main" id="{A6016D59-A79B-D72B-EAC9-D7F09383D633}"/>
+                <a16:creationId xmlns:a16="http://schemas.microsoft.com/office/drawing/2014/main" id="{991B5589-EA5B-1F62-ED11-883784C0455B}"/>
               </a:ext>
             </a:extLst>
           </p:cNvPr>
@@ -3427,7 +3427,7 @@
           <p:cNvPr id="14" name="kpi_label_3">
             <a:extLst>
               <a:ext uri="{FF2B5EF4-FFF2-40B4-BE49-F238E27FC236}">
-                <a16:creationId xmlns:a16="http://schemas.microsoft.com/office/drawing/2014/main" id="{DBDC55FE-3972-C39A-0383-D37AEE058B2D}"/>
+                <a16:creationId xmlns:a16="http://schemas.microsoft.com/office/drawing/2014/main" id="{B7D0A40B-C773-A81B-8011-F02DE51FD11F}"/>
               </a:ext>
             </a:extLst>
           </p:cNvPr>
@@ -3475,7 +3475,7 @@
           <p:cNvPr id="15" name="kpi_value_4">
             <a:extLst>
               <a:ext uri="{FF2B5EF4-FFF2-40B4-BE49-F238E27FC236}">
-                <a16:creationId xmlns:a16="http://schemas.microsoft.com/office/drawing/2014/main" id="{D9D0CB08-4E00-FE5B-D1D0-9E6452E88559}"/>
+                <a16:creationId xmlns:a16="http://schemas.microsoft.com/office/drawing/2014/main" id="{00B2B2F4-738A-3555-3EBC-1C86532D5FC1}"/>
               </a:ext>
             </a:extLst>
           </p:cNvPr>
@@ -3528,7 +3528,7 @@
           <p:cNvPr id="16" name="kpi_label_4">
             <a:extLst>
               <a:ext uri="{FF2B5EF4-FFF2-40B4-BE49-F238E27FC236}">
-                <a16:creationId xmlns:a16="http://schemas.microsoft.com/office/drawing/2014/main" id="{DF04D71F-C293-3E3A-49ED-CAB004C45EBD}"/>
+                <a16:creationId xmlns:a16="http://schemas.microsoft.com/office/drawing/2014/main" id="{954F1667-02E3-D991-E714-EC17D4F4724C}"/>
               </a:ext>
             </a:extLst>
           </p:cNvPr>
@@ -3576,7 +3576,7 @@
           <p:cNvPr id="17" name="source">
             <a:extLst>
               <a:ext uri="{FF2B5EF4-FFF2-40B4-BE49-F238E27FC236}">
-                <a16:creationId xmlns:a16="http://schemas.microsoft.com/office/drawing/2014/main" id="{B0B96A84-0BC5-5D03-160C-D479D564D1C2}"/>
+                <a16:creationId xmlns:a16="http://schemas.microsoft.com/office/drawing/2014/main" id="{920E64AE-3A34-9982-9A57-4E66458C3867}"/>
               </a:ext>
             </a:extLst>
           </p:cNvPr>
@@ -3631,7 +3631,7 @@
     </p:spTree>
     <p:extLst>
       <p:ext uri="{BB962C8B-B14F-4D97-AF65-F5344CB8AC3E}">
-        <p14:creationId xmlns:p14="http://schemas.microsoft.com/office/powerpoint/2010/main" val="2723907728"/>
+        <p14:creationId xmlns:p14="http://schemas.microsoft.com/office/powerpoint/2010/main" val="156878366"/>
       </p:ext>
     </p:extLst>
   </p:cSld>
@@ -3663,7 +3663,7 @@
           <p:cNvPr id="7" name="creative_background">
             <a:extLst>
               <a:ext uri="{FF2B5EF4-FFF2-40B4-BE49-F238E27FC236}">
-                <a16:creationId xmlns:a16="http://schemas.microsoft.com/office/drawing/2014/main" id="{67AAF1C7-2280-5B72-CDB2-0EB5C6828A33}"/>
+                <a16:creationId xmlns:a16="http://schemas.microsoft.com/office/drawing/2014/main" id="{B91E1329-0057-CC09-4E2C-A44D7D712F50}"/>
               </a:ext>
             </a:extLst>
           </p:cNvPr>
@@ -3736,9 +3736,9 @@
           <a:bodyPr/>
           <a:lstStyle/>
           <a:p>
-            <a:fld id="{402E347B-D365-49E2-9289-3F52BA4D6BD6}" type="datetimeFigureOut">
+            <a:fld id="{953E3269-9E78-4D7E-9A3E-1CB27CD92A12}" type="datetimeFigureOut">
               <a:rPr lang="en-US" smtClean="0"/>
-              <a:t>10/3/2026</a:t>
+              <a:t>10/4/2026</a:t>
             </a:fld>
             <a:endParaRPr lang="en-US"/>
           </a:p>
@@ -3778,7 +3778,7 @@
           <a:bodyPr/>
           <a:lstStyle/>
           <a:p>
-            <a:fld id="{59E99942-F5A0-42B8-85FC-8F53E2428FF4}" type="slidenum">
+            <a:fld id="{F16D5B57-F7EE-4146-9EF5-FE1410ECAA61}" type="slidenum">
               <a:rPr lang="en-US" smtClean="0"/>
               <a:t>‹#›</a:t>
             </a:fld>
@@ -3791,7 +3791,7 @@
           <p:cNvPr id="8" name="body">
             <a:extLst>
               <a:ext uri="{FF2B5EF4-FFF2-40B4-BE49-F238E27FC236}">
-                <a16:creationId xmlns:a16="http://schemas.microsoft.com/office/drawing/2014/main" id="{2BAB5C9D-2845-641F-9F6F-B7B3EBD92E58}"/>
+                <a16:creationId xmlns:a16="http://schemas.microsoft.com/office/drawing/2014/main" id="{1B7D37D0-2F3F-A8F4-1F4C-4D880ABD05BD}"/>
               </a:ext>
             </a:extLst>
           </p:cNvPr>
@@ -3831,7 +3831,7 @@
           <p:cNvPr id="9" name="kpi_value_1">
             <a:extLst>
               <a:ext uri="{FF2B5EF4-FFF2-40B4-BE49-F238E27FC236}">
-                <a16:creationId xmlns:a16="http://schemas.microsoft.com/office/drawing/2014/main" id="{FA94E300-98EF-EE42-D646-8233632F9310}"/>
+                <a16:creationId xmlns:a16="http://schemas.microsoft.com/office/drawing/2014/main" id="{E466DEF4-9A03-083C-D14E-D557B11BE668}"/>
               </a:ext>
             </a:extLst>
           </p:cNvPr>
@@ -3884,7 +3884,7 @@
           <p:cNvPr id="10" name="kpi_label_1">
             <a:extLst>
               <a:ext uri="{FF2B5EF4-FFF2-40B4-BE49-F238E27FC236}">
-                <a16:creationId xmlns:a16="http://schemas.microsoft.com/office/drawing/2014/main" id="{AD522387-F4B5-6F99-D468-660D4EC926D9}"/>
+                <a16:creationId xmlns:a16="http://schemas.microsoft.com/office/drawing/2014/main" id="{BE470F74-FB08-46AB-536C-076B78E5E8C8}"/>
               </a:ext>
             </a:extLst>
           </p:cNvPr>
@@ -3932,7 +3932,7 @@
           <p:cNvPr id="11" name="kpi_value_2">
             <a:extLst>
               <a:ext uri="{FF2B5EF4-FFF2-40B4-BE49-F238E27FC236}">
-                <a16:creationId xmlns:a16="http://schemas.microsoft.com/office/drawing/2014/main" id="{F4870908-9081-719C-91C4-C96A15B36C63}"/>
+                <a16:creationId xmlns:a16="http://schemas.microsoft.com/office/drawing/2014/main" id="{1293885D-58C2-5F5D-E693-42DB7EA84471}"/>
               </a:ext>
             </a:extLst>
           </p:cNvPr>
@@ -3985,7 +3985,7 @@
           <p:cNvPr id="12" name="kpi_label_2">
             <a:extLst>
               <a:ext uri="{FF2B5EF4-FFF2-40B4-BE49-F238E27FC236}">
-                <a16:creationId xmlns:a16="http://schemas.microsoft.com/office/drawing/2014/main" id="{AE6D9203-5D20-B950-0924-71BD640B0726}"/>
+                <a16:creationId xmlns:a16="http://schemas.microsoft.com/office/drawing/2014/main" id="{AA21F4B1-8232-AD7B-4937-6D200DC9D811}"/>
               </a:ext>
             </a:extLst>
           </p:cNvPr>
@@ -4033,7 +4033,7 @@
           <p:cNvPr id="13" name="source">
             <a:extLst>
               <a:ext uri="{FF2B5EF4-FFF2-40B4-BE49-F238E27FC236}">
-                <a16:creationId xmlns:a16="http://schemas.microsoft.com/office/drawing/2014/main" id="{155D4AFD-063B-765B-A359-D32A08F12D29}"/>
+                <a16:creationId xmlns:a16="http://schemas.microsoft.com/office/drawing/2014/main" id="{15984261-9E9F-FA1D-C3FD-F7E54E613736}"/>
               </a:ext>
             </a:extLst>
           </p:cNvPr>
@@ -4088,7 +4088,7 @@
     </p:spTree>
     <p:extLst>
       <p:ext uri="{BB962C8B-B14F-4D97-AF65-F5344CB8AC3E}">
-        <p14:creationId xmlns:p14="http://schemas.microsoft.com/office/powerpoint/2010/main" val="1380130374"/>
+        <p14:creationId xmlns:p14="http://schemas.microsoft.com/office/powerpoint/2010/main" val="3041015723"/>
       </p:ext>
     </p:extLst>
   </p:cSld>
@@ -4120,7 +4120,7 @@
           <p:cNvPr id="7" name="creative_background">
             <a:extLst>
               <a:ext uri="{FF2B5EF4-FFF2-40B4-BE49-F238E27FC236}">
-                <a16:creationId xmlns:a16="http://schemas.microsoft.com/office/drawing/2014/main" id="{FCC5AF07-7458-5F1A-D4B4-E2AE7B69B806}"/>
+                <a16:creationId xmlns:a16="http://schemas.microsoft.com/office/drawing/2014/main" id="{F2635D1E-8252-AA58-2DAE-D6FCC3B06C88}"/>
               </a:ext>
             </a:extLst>
           </p:cNvPr>
@@ -4193,9 +4193,9 @@
           <a:bodyPr/>
           <a:lstStyle/>
           <a:p>
-            <a:fld id="{402E347B-D365-49E2-9289-3F52BA4D6BD6}" type="datetimeFigureOut">
+            <a:fld id="{953E3269-9E78-4D7E-9A3E-1CB27CD92A12}" type="datetimeFigureOut">
               <a:rPr lang="en-US" smtClean="0"/>
-              <a:t>10/3/2026</a:t>
+              <a:t>10/4/2026</a:t>
             </a:fld>
             <a:endParaRPr lang="en-US"/>
           </a:p>
@@ -4235,7 +4235,7 @@
           <a:bodyPr/>
           <a:lstStyle/>
           <a:p>
-            <a:fld id="{59E99942-F5A0-42B8-85FC-8F53E2428FF4}" type="slidenum">
+            <a:fld id="{F16D5B57-F7EE-4146-9EF5-FE1410ECAA61}" type="slidenum">
               <a:rPr lang="en-US" smtClean="0"/>
               <a:t>‹#›</a:t>
             </a:fld>
@@ -4248,7 +4248,7 @@
           <p:cNvPr id="8" name="body">
             <a:extLst>
               <a:ext uri="{FF2B5EF4-FFF2-40B4-BE49-F238E27FC236}">
-                <a16:creationId xmlns:a16="http://schemas.microsoft.com/office/drawing/2014/main" id="{D2EEB325-4371-D844-F756-B09DB907D09A}"/>
+                <a16:creationId xmlns:a16="http://schemas.microsoft.com/office/drawing/2014/main" id="{4BA7ACE4-67D9-98B4-8DA7-A5709D58ED56}"/>
               </a:ext>
             </a:extLst>
           </p:cNvPr>
@@ -4288,7 +4288,7 @@
           <p:cNvPr id="9" name="kpi_value_1">
             <a:extLst>
               <a:ext uri="{FF2B5EF4-FFF2-40B4-BE49-F238E27FC236}">
-                <a16:creationId xmlns:a16="http://schemas.microsoft.com/office/drawing/2014/main" id="{A42A14CC-E5CB-1114-1819-F46312ADCC87}"/>
+                <a16:creationId xmlns:a16="http://schemas.microsoft.com/office/drawing/2014/main" id="{DBD03B8A-2267-9DC3-386A-213686FAD0C9}"/>
               </a:ext>
             </a:extLst>
           </p:cNvPr>
@@ -4341,7 +4341,7 @@
           <p:cNvPr id="10" name="kpi_label_1">
             <a:extLst>
               <a:ext uri="{FF2B5EF4-FFF2-40B4-BE49-F238E27FC236}">
-                <a16:creationId xmlns:a16="http://schemas.microsoft.com/office/drawing/2014/main" id="{E92D9E80-7EB0-815A-6D81-4C8A6B09F273}"/>
+                <a16:creationId xmlns:a16="http://schemas.microsoft.com/office/drawing/2014/main" id="{C9AB825B-0C3B-61AB-4F9A-BC67E3C4AD8F}"/>
               </a:ext>
             </a:extLst>
           </p:cNvPr>
@@ -4389,7 +4389,7 @@
           <p:cNvPr id="11" name="kpi_value_2">
             <a:extLst>
               <a:ext uri="{FF2B5EF4-FFF2-40B4-BE49-F238E27FC236}">
-                <a16:creationId xmlns:a16="http://schemas.microsoft.com/office/drawing/2014/main" id="{10A3CB27-0A55-1418-C05B-752915CF8812}"/>
+                <a16:creationId xmlns:a16="http://schemas.microsoft.com/office/drawing/2014/main" id="{3CD04C2A-479E-F286-03A6-90A57A9E6E29}"/>
               </a:ext>
             </a:extLst>
           </p:cNvPr>
@@ -4442,7 +4442,7 @@
           <p:cNvPr id="12" name="kpi_label_2">
             <a:extLst>
               <a:ext uri="{FF2B5EF4-FFF2-40B4-BE49-F238E27FC236}">
-                <a16:creationId xmlns:a16="http://schemas.microsoft.com/office/drawing/2014/main" id="{F9317F1F-E6EA-71A0-B427-0545F046DE95}"/>
+                <a16:creationId xmlns:a16="http://schemas.microsoft.com/office/drawing/2014/main" id="{A6C42A46-D747-84C1-A476-700EBB54BBD7}"/>
               </a:ext>
             </a:extLst>
           </p:cNvPr>
@@ -4490,7 +4490,7 @@
           <p:cNvPr id="13" name="kpi_value_3">
             <a:extLst>
               <a:ext uri="{FF2B5EF4-FFF2-40B4-BE49-F238E27FC236}">
-                <a16:creationId xmlns:a16="http://schemas.microsoft.com/office/drawing/2014/main" id="{85BED66C-45FD-3430-522E-8DA9827F248C}"/>
+                <a16:creationId xmlns:a16="http://schemas.microsoft.com/office/drawing/2014/main" id="{4D58809D-CD8B-2CD8-FA71-DA28D36CB07C}"/>
               </a:ext>
             </a:extLst>
           </p:cNvPr>
@@ -4543,7 +4543,7 @@
           <p:cNvPr id="14" name="kpi_label_3">
             <a:extLst>
               <a:ext uri="{FF2B5EF4-FFF2-40B4-BE49-F238E27FC236}">
-                <a16:creationId xmlns:a16="http://schemas.microsoft.com/office/drawing/2014/main" id="{3E13F5AE-445A-6944-A71D-65B29DA1883F}"/>
+                <a16:creationId xmlns:a16="http://schemas.microsoft.com/office/drawing/2014/main" id="{86AC1B5D-537E-8F7E-C1E0-B33E69B938A8}"/>
               </a:ext>
             </a:extLst>
           </p:cNvPr>
@@ -4591,7 +4591,7 @@
           <p:cNvPr id="15" name="kpi_value_4">
             <a:extLst>
               <a:ext uri="{FF2B5EF4-FFF2-40B4-BE49-F238E27FC236}">
-                <a16:creationId xmlns:a16="http://schemas.microsoft.com/office/drawing/2014/main" id="{F9C0E969-5D17-0681-4FF2-6BDAA9509092}"/>
+                <a16:creationId xmlns:a16="http://schemas.microsoft.com/office/drawing/2014/main" id="{547FF971-649D-7571-D6EC-D97989191C26}"/>
               </a:ext>
             </a:extLst>
           </p:cNvPr>
@@ -4644,7 +4644,7 @@
           <p:cNvPr id="16" name="kpi_label_4">
             <a:extLst>
               <a:ext uri="{FF2B5EF4-FFF2-40B4-BE49-F238E27FC236}">
-                <a16:creationId xmlns:a16="http://schemas.microsoft.com/office/drawing/2014/main" id="{21A25B8B-D9B2-4C9E-BBB1-E044066DB41C}"/>
+                <a16:creationId xmlns:a16="http://schemas.microsoft.com/office/drawing/2014/main" id="{9988F606-6404-9B73-7293-4CFDDEF4BDB8}"/>
               </a:ext>
             </a:extLst>
           </p:cNvPr>
@@ -4692,7 +4692,7 @@
           <p:cNvPr id="17" name="source">
             <a:extLst>
               <a:ext uri="{FF2B5EF4-FFF2-40B4-BE49-F238E27FC236}">
-                <a16:creationId xmlns:a16="http://schemas.microsoft.com/office/drawing/2014/main" id="{0E3A1B8B-A0AD-962D-E03B-BB23B701E567}"/>
+                <a16:creationId xmlns:a16="http://schemas.microsoft.com/office/drawing/2014/main" id="{87AD088C-31EB-ED52-74E6-CA4ACF936E07}"/>
               </a:ext>
             </a:extLst>
           </p:cNvPr>
@@ -4747,7 +4747,7 @@
     </p:spTree>
     <p:extLst>
       <p:ext uri="{BB962C8B-B14F-4D97-AF65-F5344CB8AC3E}">
-        <p14:creationId xmlns:p14="http://schemas.microsoft.com/office/powerpoint/2010/main" val="4209280943"/>
+        <p14:creationId xmlns:p14="http://schemas.microsoft.com/office/powerpoint/2010/main" val="1546652488"/>
       </p:ext>
     </p:extLst>
   </p:cSld>
@@ -4779,7 +4779,7 @@
           <p:cNvPr id="7" name="creative_background">
             <a:extLst>
               <a:ext uri="{FF2B5EF4-FFF2-40B4-BE49-F238E27FC236}">
-                <a16:creationId xmlns:a16="http://schemas.microsoft.com/office/drawing/2014/main" id="{1768DEB0-641A-A15E-2DDF-791B73CA9C77}"/>
+                <a16:creationId xmlns:a16="http://schemas.microsoft.com/office/drawing/2014/main" id="{72DC298E-FC1E-10FB-D314-5B65800B6F63}"/>
               </a:ext>
             </a:extLst>
           </p:cNvPr>
@@ -4852,9 +4852,9 @@
           <a:bodyPr/>
           <a:lstStyle/>
           <a:p>
-            <a:fld id="{402E347B-D365-49E2-9289-3F52BA4D6BD6}" type="datetimeFigureOut">
+            <a:fld id="{953E3269-9E78-4D7E-9A3E-1CB27CD92A12}" type="datetimeFigureOut">
               <a:rPr lang="en-US" smtClean="0"/>
-              <a:t>10/3/2026</a:t>
+              <a:t>10/4/2026</a:t>
             </a:fld>
             <a:endParaRPr lang="en-US"/>
           </a:p>
@@ -4894,7 +4894,7 @@
           <a:bodyPr/>
           <a:lstStyle/>
           <a:p>
-            <a:fld id="{59E99942-F5A0-42B8-85FC-8F53E2428FF4}" type="slidenum">
+            <a:fld id="{F16D5B57-F7EE-4146-9EF5-FE1410ECAA61}" type="slidenum">
               <a:rPr lang="en-US" smtClean="0"/>
               <a:t>‹#›</a:t>
             </a:fld>
@@ -4907,7 +4907,7 @@
           <p:cNvPr id="8" name="item_1_title">
             <a:extLst>
               <a:ext uri="{FF2B5EF4-FFF2-40B4-BE49-F238E27FC236}">
-                <a16:creationId xmlns:a16="http://schemas.microsoft.com/office/drawing/2014/main" id="{2374A7D7-20F5-470C-F64B-06C6C9EEE139}"/>
+                <a16:creationId xmlns:a16="http://schemas.microsoft.com/office/drawing/2014/main" id="{14B2C136-455F-CCD9-7B31-73BEA48EBFEF}"/>
               </a:ext>
             </a:extLst>
           </p:cNvPr>
@@ -4957,7 +4957,7 @@
           <p:cNvPr id="9" name="item_1">
             <a:extLst>
               <a:ext uri="{FF2B5EF4-FFF2-40B4-BE49-F238E27FC236}">
-                <a16:creationId xmlns:a16="http://schemas.microsoft.com/office/drawing/2014/main" id="{A48A4BEA-9607-95CC-ADA2-FC3D2745BD23}"/>
+                <a16:creationId xmlns:a16="http://schemas.microsoft.com/office/drawing/2014/main" id="{D5E17753-C880-A7D0-ADCD-4D6AC8816958}"/>
               </a:ext>
             </a:extLst>
           </p:cNvPr>
@@ -5005,7 +5005,7 @@
           <p:cNvPr id="10" name="item_2_title">
             <a:extLst>
               <a:ext uri="{FF2B5EF4-FFF2-40B4-BE49-F238E27FC236}">
-                <a16:creationId xmlns:a16="http://schemas.microsoft.com/office/drawing/2014/main" id="{7DAE965C-BF31-30C7-E499-8A5E779625C4}"/>
+                <a16:creationId xmlns:a16="http://schemas.microsoft.com/office/drawing/2014/main" id="{85CE0103-852A-1781-D584-5D9B1CF5627A}"/>
               </a:ext>
             </a:extLst>
           </p:cNvPr>
@@ -5058,7 +5058,7 @@
           <p:cNvPr id="11" name="item_2">
             <a:extLst>
               <a:ext uri="{FF2B5EF4-FFF2-40B4-BE49-F238E27FC236}">
-                <a16:creationId xmlns:a16="http://schemas.microsoft.com/office/drawing/2014/main" id="{040B5FE1-0DF9-A31D-B179-B8FC52CFD799}"/>
+                <a16:creationId xmlns:a16="http://schemas.microsoft.com/office/drawing/2014/main" id="{15329F44-D828-6F84-C2D3-55AA296BDFF2}"/>
               </a:ext>
             </a:extLst>
           </p:cNvPr>
@@ -5106,7 +5106,7 @@
           <p:cNvPr id="12" name="item_3_title">
             <a:extLst>
               <a:ext uri="{FF2B5EF4-FFF2-40B4-BE49-F238E27FC236}">
-                <a16:creationId xmlns:a16="http://schemas.microsoft.com/office/drawing/2014/main" id="{911AA02F-D6AA-4FEC-F916-670E0C3D655B}"/>
+                <a16:creationId xmlns:a16="http://schemas.microsoft.com/office/drawing/2014/main" id="{A5C626D7-B961-0717-E513-B4B0262AD4EB}"/>
               </a:ext>
             </a:extLst>
           </p:cNvPr>
@@ -5159,7 +5159,7 @@
           <p:cNvPr id="13" name="item_3">
             <a:extLst>
               <a:ext uri="{FF2B5EF4-FFF2-40B4-BE49-F238E27FC236}">
-                <a16:creationId xmlns:a16="http://schemas.microsoft.com/office/drawing/2014/main" id="{E707BDD6-9C9F-4527-BA21-FEF81D7F3FAC}"/>
+                <a16:creationId xmlns:a16="http://schemas.microsoft.com/office/drawing/2014/main" id="{E7F34DF2-C7BF-21AE-9146-CA17837632CB}"/>
               </a:ext>
             </a:extLst>
           </p:cNvPr>
@@ -5207,7 +5207,7 @@
           <p:cNvPr id="14" name="item_4_title">
             <a:extLst>
               <a:ext uri="{FF2B5EF4-FFF2-40B4-BE49-F238E27FC236}">
-                <a16:creationId xmlns:a16="http://schemas.microsoft.com/office/drawing/2014/main" id="{2ACB30CA-C055-222C-0530-49C7DC2C6527}"/>
+                <a16:creationId xmlns:a16="http://schemas.microsoft.com/office/drawing/2014/main" id="{AA0FC4AA-8E34-F9BD-5B13-86EB200506D9}"/>
               </a:ext>
             </a:extLst>
           </p:cNvPr>
@@ -5260,7 +5260,7 @@
           <p:cNvPr id="15" name="item_4">
             <a:extLst>
               <a:ext uri="{FF2B5EF4-FFF2-40B4-BE49-F238E27FC236}">
-                <a16:creationId xmlns:a16="http://schemas.microsoft.com/office/drawing/2014/main" id="{38ED8FB7-D356-79E4-38AC-543D03D8AB48}"/>
+                <a16:creationId xmlns:a16="http://schemas.microsoft.com/office/drawing/2014/main" id="{438CCD14-D591-4575-EA30-F3CA696EE371}"/>
               </a:ext>
             </a:extLst>
           </p:cNvPr>
@@ -5308,7 +5308,7 @@
           <p:cNvPr id="16" name="source">
             <a:extLst>
               <a:ext uri="{FF2B5EF4-FFF2-40B4-BE49-F238E27FC236}">
-                <a16:creationId xmlns:a16="http://schemas.microsoft.com/office/drawing/2014/main" id="{57DCF87D-E4DE-D722-A52F-E41DE87C2F1F}"/>
+                <a16:creationId xmlns:a16="http://schemas.microsoft.com/office/drawing/2014/main" id="{8DE34778-9503-4082-28E8-26AF56676EE8}"/>
               </a:ext>
             </a:extLst>
           </p:cNvPr>
@@ -5363,7 +5363,7 @@
     </p:spTree>
     <p:extLst>
       <p:ext uri="{BB962C8B-B14F-4D97-AF65-F5344CB8AC3E}">
-        <p14:creationId xmlns:p14="http://schemas.microsoft.com/office/powerpoint/2010/main" val="116115756"/>
+        <p14:creationId xmlns:p14="http://schemas.microsoft.com/office/powerpoint/2010/main" val="1576468747"/>
       </p:ext>
     </p:extLst>
   </p:cSld>
@@ -5395,7 +5395,7 @@
           <p:cNvPr id="7" name="creative_background">
             <a:extLst>
               <a:ext uri="{FF2B5EF4-FFF2-40B4-BE49-F238E27FC236}">
-                <a16:creationId xmlns:a16="http://schemas.microsoft.com/office/drawing/2014/main" id="{CA1B1C87-4D20-095B-5142-7F841BDB0B48}"/>
+                <a16:creationId xmlns:a16="http://schemas.microsoft.com/office/drawing/2014/main" id="{54191F13-5D84-F1ED-74C6-039C293B9589}"/>
               </a:ext>
             </a:extLst>
           </p:cNvPr>
@@ -5468,9 +5468,9 @@
           <a:bodyPr/>
           <a:lstStyle/>
           <a:p>
-            <a:fld id="{402E347B-D365-49E2-9289-3F52BA4D6BD6}" type="datetimeFigureOut">
+            <a:fld id="{953E3269-9E78-4D7E-9A3E-1CB27CD92A12}" type="datetimeFigureOut">
               <a:rPr lang="en-US" smtClean="0"/>
-              <a:t>10/3/2026</a:t>
+              <a:t>10/4/2026</a:t>
             </a:fld>
             <a:endParaRPr lang="en-US"/>
           </a:p>
@@ -5510,7 +5510,7 @@
           <a:bodyPr/>
           <a:lstStyle/>
           <a:p>
-            <a:fld id="{59E99942-F5A0-42B8-85FC-8F53E2428FF4}" type="slidenum">
+            <a:fld id="{F16D5B57-F7EE-4146-9EF5-FE1410ECAA61}" type="slidenum">
               <a:rPr lang="en-US" smtClean="0"/>
               <a:t>‹#›</a:t>
             </a:fld>
@@ -5523,7 +5523,7 @@
           <p:cNvPr id="8" name="marker_1">
             <a:extLst>
               <a:ext uri="{FF2B5EF4-FFF2-40B4-BE49-F238E27FC236}">
-                <a16:creationId xmlns:a16="http://schemas.microsoft.com/office/drawing/2014/main" id="{C3682A0F-02F4-BE42-679F-B0F38C9F2517}"/>
+                <a16:creationId xmlns:a16="http://schemas.microsoft.com/office/drawing/2014/main" id="{CD16182D-C97B-1E94-A9E4-72910A47B94D}"/>
               </a:ext>
             </a:extLst>
           </p:cNvPr>
@@ -5579,7 +5579,7 @@
           <p:cNvPr id="9" name="item_1_title">
             <a:extLst>
               <a:ext uri="{FF2B5EF4-FFF2-40B4-BE49-F238E27FC236}">
-                <a16:creationId xmlns:a16="http://schemas.microsoft.com/office/drawing/2014/main" id="{43348FC1-3294-3977-21F1-E9171A2493D9}"/>
+                <a16:creationId xmlns:a16="http://schemas.microsoft.com/office/drawing/2014/main" id="{901DCFC0-E906-96D8-0CED-B0DF33C4888D}"/>
               </a:ext>
             </a:extLst>
           </p:cNvPr>
@@ -5632,7 +5632,7 @@
           <p:cNvPr id="10" name="item_1">
             <a:extLst>
               <a:ext uri="{FF2B5EF4-FFF2-40B4-BE49-F238E27FC236}">
-                <a16:creationId xmlns:a16="http://schemas.microsoft.com/office/drawing/2014/main" id="{691F345F-C601-E604-D1F9-E801E596A22D}"/>
+                <a16:creationId xmlns:a16="http://schemas.microsoft.com/office/drawing/2014/main" id="{819BF1AC-3C5C-6E03-61DD-4B0B8470A7DC}"/>
               </a:ext>
             </a:extLst>
           </p:cNvPr>
@@ -5680,7 +5680,7 @@
           <p:cNvPr id="11" name="marker_2">
             <a:extLst>
               <a:ext uri="{FF2B5EF4-FFF2-40B4-BE49-F238E27FC236}">
-                <a16:creationId xmlns:a16="http://schemas.microsoft.com/office/drawing/2014/main" id="{994BD9D2-F5BC-8E6C-00D5-C64820755670}"/>
+                <a16:creationId xmlns:a16="http://schemas.microsoft.com/office/drawing/2014/main" id="{C888FB1C-7FB4-0730-76F7-3E9030C08F1E}"/>
               </a:ext>
             </a:extLst>
           </p:cNvPr>
@@ -5736,7 +5736,7 @@
           <p:cNvPr id="12" name="item_2_title">
             <a:extLst>
               <a:ext uri="{FF2B5EF4-FFF2-40B4-BE49-F238E27FC236}">
-                <a16:creationId xmlns:a16="http://schemas.microsoft.com/office/drawing/2014/main" id="{ADA2EE93-E37E-F7C7-4253-2F48AE31AB19}"/>
+                <a16:creationId xmlns:a16="http://schemas.microsoft.com/office/drawing/2014/main" id="{383E24CC-5A7A-526F-BAF1-15BBC81930FE}"/>
               </a:ext>
             </a:extLst>
           </p:cNvPr>
@@ -5789,7 +5789,7 @@
           <p:cNvPr id="13" name="item_2">
             <a:extLst>
               <a:ext uri="{FF2B5EF4-FFF2-40B4-BE49-F238E27FC236}">
-                <a16:creationId xmlns:a16="http://schemas.microsoft.com/office/drawing/2014/main" id="{1C69E6B2-9791-9B22-CC53-BA729CB2841F}"/>
+                <a16:creationId xmlns:a16="http://schemas.microsoft.com/office/drawing/2014/main" id="{C1896FBA-315D-A863-1A2C-DC375657DBFE}"/>
               </a:ext>
             </a:extLst>
           </p:cNvPr>
@@ -5837,7 +5837,7 @@
           <p:cNvPr id="14" name="source">
             <a:extLst>
               <a:ext uri="{FF2B5EF4-FFF2-40B4-BE49-F238E27FC236}">
-                <a16:creationId xmlns:a16="http://schemas.microsoft.com/office/drawing/2014/main" id="{062C735C-F3A4-1ACF-BC2F-C8DBD58EA0D7}"/>
+                <a16:creationId xmlns:a16="http://schemas.microsoft.com/office/drawing/2014/main" id="{15587C01-EF20-51F6-68FE-DC0212BFA963}"/>
               </a:ext>
             </a:extLst>
           </p:cNvPr>
@@ -5892,7 +5892,7 @@
     </p:spTree>
     <p:extLst>
       <p:ext uri="{BB962C8B-B14F-4D97-AF65-F5344CB8AC3E}">
-        <p14:creationId xmlns:p14="http://schemas.microsoft.com/office/powerpoint/2010/main" val="1759842810"/>
+        <p14:creationId xmlns:p14="http://schemas.microsoft.com/office/powerpoint/2010/main" val="2788206468"/>
       </p:ext>
     </p:extLst>
   </p:cSld>
@@ -5924,7 +5924,7 @@
           <p:cNvPr id="7" name="creative_background">
             <a:extLst>
               <a:ext uri="{FF2B5EF4-FFF2-40B4-BE49-F238E27FC236}">
-                <a16:creationId xmlns:a16="http://schemas.microsoft.com/office/drawing/2014/main" id="{9E5D051A-9CEA-5981-4DD7-81EC9C68829E}"/>
+                <a16:creationId xmlns:a16="http://schemas.microsoft.com/office/drawing/2014/main" id="{5D0DDF55-A85B-2277-F015-E549318419D0}"/>
               </a:ext>
             </a:extLst>
           </p:cNvPr>
@@ -5997,9 +5997,9 @@
           <a:bodyPr/>
           <a:lstStyle/>
           <a:p>
-            <a:fld id="{402E347B-D365-49E2-9289-3F52BA4D6BD6}" type="datetimeFigureOut">
+            <a:fld id="{953E3269-9E78-4D7E-9A3E-1CB27CD92A12}" type="datetimeFigureOut">
               <a:rPr lang="en-US" smtClean="0"/>
-              <a:t>10/3/2026</a:t>
+              <a:t>10/4/2026</a:t>
             </a:fld>
             <a:endParaRPr lang="en-US"/>
           </a:p>
@@ -6039,7 +6039,7 @@
           <a:bodyPr/>
           <a:lstStyle/>
           <a:p>
-            <a:fld id="{59E99942-F5A0-42B8-85FC-8F53E2428FF4}" type="slidenum">
+            <a:fld id="{F16D5B57-F7EE-4146-9EF5-FE1410ECAA61}" type="slidenum">
               <a:rPr lang="en-US" smtClean="0"/>
               <a:t>‹#›</a:t>
             </a:fld>
@@ -6052,7 +6052,7 @@
           <p:cNvPr id="8" name="item_1_title">
             <a:extLst>
               <a:ext uri="{FF2B5EF4-FFF2-40B4-BE49-F238E27FC236}">
-                <a16:creationId xmlns:a16="http://schemas.microsoft.com/office/drawing/2014/main" id="{1FC4E9C2-3AC7-3826-CBFC-4633C9A16CF7}"/>
+                <a16:creationId xmlns:a16="http://schemas.microsoft.com/office/drawing/2014/main" id="{1EBCE00C-CCE9-357B-0CE0-35ADE9A6DFD4}"/>
               </a:ext>
             </a:extLst>
           </p:cNvPr>
@@ -6102,7 +6102,7 @@
           <p:cNvPr id="9" name="item_1">
             <a:extLst>
               <a:ext uri="{FF2B5EF4-FFF2-40B4-BE49-F238E27FC236}">
-                <a16:creationId xmlns:a16="http://schemas.microsoft.com/office/drawing/2014/main" id="{4A994B9A-DEED-4378-7006-C170221590EB}"/>
+                <a16:creationId xmlns:a16="http://schemas.microsoft.com/office/drawing/2014/main" id="{A725DEC5-DB30-6A5B-E31B-A3E95C40599D}"/>
               </a:ext>
             </a:extLst>
           </p:cNvPr>
@@ -6150,7 +6150,7 @@
           <p:cNvPr id="10" name="item_2_title">
             <a:extLst>
               <a:ext uri="{FF2B5EF4-FFF2-40B4-BE49-F238E27FC236}">
-                <a16:creationId xmlns:a16="http://schemas.microsoft.com/office/drawing/2014/main" id="{4B0B782E-4FC4-BFC2-F708-199F2B635ADB}"/>
+                <a16:creationId xmlns:a16="http://schemas.microsoft.com/office/drawing/2014/main" id="{FA136EFD-1C63-5F0A-9181-59627F547223}"/>
               </a:ext>
             </a:extLst>
           </p:cNvPr>
@@ -6203,7 +6203,7 @@
           <p:cNvPr id="11" name="item_2">
             <a:extLst>
               <a:ext uri="{FF2B5EF4-FFF2-40B4-BE49-F238E27FC236}">
-                <a16:creationId xmlns:a16="http://schemas.microsoft.com/office/drawing/2014/main" id="{669D82AE-CE91-C12C-C759-F65CB2D2323B}"/>
+                <a16:creationId xmlns:a16="http://schemas.microsoft.com/office/drawing/2014/main" id="{578F15CA-F146-C2CE-7C4E-AC01FAECD03C}"/>
               </a:ext>
             </a:extLst>
           </p:cNvPr>
@@ -6251,7 +6251,7 @@
           <p:cNvPr id="12" name="item_3_title">
             <a:extLst>
               <a:ext uri="{FF2B5EF4-FFF2-40B4-BE49-F238E27FC236}">
-                <a16:creationId xmlns:a16="http://schemas.microsoft.com/office/drawing/2014/main" id="{192EFA42-DFDE-6F22-F553-9F85AF70DC87}"/>
+                <a16:creationId xmlns:a16="http://schemas.microsoft.com/office/drawing/2014/main" id="{691B24E4-F508-EC31-685B-1373AD1F6CFF}"/>
               </a:ext>
             </a:extLst>
           </p:cNvPr>
@@ -6304,7 +6304,7 @@
           <p:cNvPr id="13" name="item_3">
             <a:extLst>
               <a:ext uri="{FF2B5EF4-FFF2-40B4-BE49-F238E27FC236}">
-                <a16:creationId xmlns:a16="http://schemas.microsoft.com/office/drawing/2014/main" id="{18667022-FED8-9622-6D9D-9F146E2D2185}"/>
+                <a16:creationId xmlns:a16="http://schemas.microsoft.com/office/drawing/2014/main" id="{18112719-3E9F-F585-9720-3F4E2DDE905A}"/>
               </a:ext>
             </a:extLst>
           </p:cNvPr>
@@ -6352,7 +6352,7 @@
           <p:cNvPr id="14" name="item_4_title">
             <a:extLst>
               <a:ext uri="{FF2B5EF4-FFF2-40B4-BE49-F238E27FC236}">
-                <a16:creationId xmlns:a16="http://schemas.microsoft.com/office/drawing/2014/main" id="{33B5BF41-8A87-AD93-CDCB-C8AA079EEFE8}"/>
+                <a16:creationId xmlns:a16="http://schemas.microsoft.com/office/drawing/2014/main" id="{4C2830F2-F30D-CADD-8026-68517EA47C07}"/>
               </a:ext>
             </a:extLst>
           </p:cNvPr>
@@ -6405,7 +6405,7 @@
           <p:cNvPr id="15" name="item_4">
             <a:extLst>
               <a:ext uri="{FF2B5EF4-FFF2-40B4-BE49-F238E27FC236}">
-                <a16:creationId xmlns:a16="http://schemas.microsoft.com/office/drawing/2014/main" id="{5E7072F0-874E-81E1-56D4-C6DCCE6A887C}"/>
+                <a16:creationId xmlns:a16="http://schemas.microsoft.com/office/drawing/2014/main" id="{07D11BCE-140C-B89F-2672-6CF9204F7B85}"/>
               </a:ext>
             </a:extLst>
           </p:cNvPr>
@@ -6453,7 +6453,7 @@
           <p:cNvPr id="16" name="source">
             <a:extLst>
               <a:ext uri="{FF2B5EF4-FFF2-40B4-BE49-F238E27FC236}">
-                <a16:creationId xmlns:a16="http://schemas.microsoft.com/office/drawing/2014/main" id="{77D573D9-4231-211D-939F-6850F9F30EF9}"/>
+                <a16:creationId xmlns:a16="http://schemas.microsoft.com/office/drawing/2014/main" id="{FC588C12-2C67-6BFE-99F8-C7A3778A68E9}"/>
               </a:ext>
             </a:extLst>
           </p:cNvPr>
@@ -6508,7 +6508,7 @@
     </p:spTree>
     <p:extLst>
       <p:ext uri="{BB962C8B-B14F-4D97-AF65-F5344CB8AC3E}">
-        <p14:creationId xmlns:p14="http://schemas.microsoft.com/office/powerpoint/2010/main" val="278531137"/>
+        <p14:creationId xmlns:p14="http://schemas.microsoft.com/office/powerpoint/2010/main" val="2057517578"/>
       </p:ext>
     </p:extLst>
   </p:cSld>
@@ -6540,7 +6540,7 @@
           <p:cNvPr id="7" name="creative_background">
             <a:extLst>
               <a:ext uri="{FF2B5EF4-FFF2-40B4-BE49-F238E27FC236}">
-                <a16:creationId xmlns:a16="http://schemas.microsoft.com/office/drawing/2014/main" id="{23D0C48E-4901-4EC9-891A-02084E28A2A8}"/>
+                <a16:creationId xmlns:a16="http://schemas.microsoft.com/office/drawing/2014/main" id="{6CF483A1-209B-B487-3E7A-9232639B9D45}"/>
               </a:ext>
             </a:extLst>
           </p:cNvPr>
@@ -6613,9 +6613,9 @@
           <a:bodyPr/>
           <a:lstStyle/>
           <a:p>
-            <a:fld id="{402E347B-D365-49E2-9289-3F52BA4D6BD6}" type="datetimeFigureOut">
+            <a:fld id="{953E3269-9E78-4D7E-9A3E-1CB27CD92A12}" type="datetimeFigureOut">
               <a:rPr lang="en-US" smtClean="0"/>
-              <a:t>10/3/2026</a:t>
+              <a:t>10/4/2026</a:t>
             </a:fld>
             <a:endParaRPr lang="en-US"/>
           </a:p>
@@ -6655,7 +6655,7 @@
           <a:bodyPr/>
           <a:lstStyle/>
           <a:p>
-            <a:fld id="{59E99942-F5A0-42B8-85FC-8F53E2428FF4}" type="slidenum">
+            <a:fld id="{F16D5B57-F7EE-4146-9EF5-FE1410ECAA61}" type="slidenum">
               <a:rPr lang="en-US" smtClean="0"/>
               <a:t>‹#›</a:t>
             </a:fld>
@@ -6668,7 +6668,7 @@
           <p:cNvPr id="8" name="item_1_title">
             <a:extLst>
               <a:ext uri="{FF2B5EF4-FFF2-40B4-BE49-F238E27FC236}">
-                <a16:creationId xmlns:a16="http://schemas.microsoft.com/office/drawing/2014/main" id="{D662841D-E9D8-BFE9-0358-DEED585CD547}"/>
+                <a16:creationId xmlns:a16="http://schemas.microsoft.com/office/drawing/2014/main" id="{FACC3263-4B55-C5B8-246B-D7EF3DB21B7E}"/>
               </a:ext>
             </a:extLst>
           </p:cNvPr>
@@ -6718,7 +6718,7 @@
           <p:cNvPr id="9" name="item_1">
             <a:extLst>
               <a:ext uri="{FF2B5EF4-FFF2-40B4-BE49-F238E27FC236}">
-                <a16:creationId xmlns:a16="http://schemas.microsoft.com/office/drawing/2014/main" id="{6C9047F6-AC4D-AC96-0500-C071B018912B}"/>
+                <a16:creationId xmlns:a16="http://schemas.microsoft.com/office/drawing/2014/main" id="{30087FB0-F088-23D8-40D9-8891AF6F8700}"/>
               </a:ext>
             </a:extLst>
           </p:cNvPr>
@@ -6766,7 +6766,7 @@
           <p:cNvPr id="10" name="item_2_title">
             <a:extLst>
               <a:ext uri="{FF2B5EF4-FFF2-40B4-BE49-F238E27FC236}">
-                <a16:creationId xmlns:a16="http://schemas.microsoft.com/office/drawing/2014/main" id="{D522F42E-BB3F-01E8-F089-1144642D76A4}"/>
+                <a16:creationId xmlns:a16="http://schemas.microsoft.com/office/drawing/2014/main" id="{A3C1F061-4B23-1160-F5C3-9C07CB3C4CC7}"/>
               </a:ext>
             </a:extLst>
           </p:cNvPr>
@@ -6819,7 +6819,7 @@
           <p:cNvPr id="11" name="item_2">
             <a:extLst>
               <a:ext uri="{FF2B5EF4-FFF2-40B4-BE49-F238E27FC236}">
-                <a16:creationId xmlns:a16="http://schemas.microsoft.com/office/drawing/2014/main" id="{539BC020-3C4A-52EB-C373-EBA490C64533}"/>
+                <a16:creationId xmlns:a16="http://schemas.microsoft.com/office/drawing/2014/main" id="{DF6818FE-9EFD-1A1C-264A-DC2E60E7AB42}"/>
               </a:ext>
             </a:extLst>
           </p:cNvPr>
@@ -6867,7 +6867,7 @@
           <p:cNvPr id="12" name="item_3_title">
             <a:extLst>
               <a:ext uri="{FF2B5EF4-FFF2-40B4-BE49-F238E27FC236}">
-                <a16:creationId xmlns:a16="http://schemas.microsoft.com/office/drawing/2014/main" id="{4CBE13E6-0830-5EED-8987-AC0CEC861E40}"/>
+                <a16:creationId xmlns:a16="http://schemas.microsoft.com/office/drawing/2014/main" id="{14C59D70-0F8C-49D5-CDAB-A3F653A83273}"/>
               </a:ext>
             </a:extLst>
           </p:cNvPr>
@@ -6920,7 +6920,7 @@
           <p:cNvPr id="13" name="item_3">
             <a:extLst>
               <a:ext uri="{FF2B5EF4-FFF2-40B4-BE49-F238E27FC236}">
-                <a16:creationId xmlns:a16="http://schemas.microsoft.com/office/drawing/2014/main" id="{DC945406-2629-AF6D-937F-8254C544D6F9}"/>
+                <a16:creationId xmlns:a16="http://schemas.microsoft.com/office/drawing/2014/main" id="{71125C1E-EAC4-2343-0221-8402F97B804E}"/>
               </a:ext>
             </a:extLst>
           </p:cNvPr>
@@ -6968,7 +6968,7 @@
           <p:cNvPr id="14" name="item_4_title">
             <a:extLst>
               <a:ext uri="{FF2B5EF4-FFF2-40B4-BE49-F238E27FC236}">
-                <a16:creationId xmlns:a16="http://schemas.microsoft.com/office/drawing/2014/main" id="{68831182-8AF4-DB39-CBFD-4C8B13A62424}"/>
+                <a16:creationId xmlns:a16="http://schemas.microsoft.com/office/drawing/2014/main" id="{63A87C32-F833-6E81-5D15-B2CC42D04D49}"/>
               </a:ext>
             </a:extLst>
           </p:cNvPr>
@@ -7021,7 +7021,7 @@
           <p:cNvPr id="15" name="item_4">
             <a:extLst>
               <a:ext uri="{FF2B5EF4-FFF2-40B4-BE49-F238E27FC236}">
-                <a16:creationId xmlns:a16="http://schemas.microsoft.com/office/drawing/2014/main" id="{4723CE1C-D0DC-9406-D691-BD071262D4F2}"/>
+                <a16:creationId xmlns:a16="http://schemas.microsoft.com/office/drawing/2014/main" id="{225BDA86-D70B-0D55-9A35-85B5454DB183}"/>
               </a:ext>
             </a:extLst>
           </p:cNvPr>
@@ -7069,7 +7069,7 @@
           <p:cNvPr id="16" name="source">
             <a:extLst>
               <a:ext uri="{FF2B5EF4-FFF2-40B4-BE49-F238E27FC236}">
-                <a16:creationId xmlns:a16="http://schemas.microsoft.com/office/drawing/2014/main" id="{800CE1C9-164C-2F4C-DF9E-744D55B34E80}"/>
+                <a16:creationId xmlns:a16="http://schemas.microsoft.com/office/drawing/2014/main" id="{FD584DE9-B412-8ADD-4C90-948DE7CCE617}"/>
               </a:ext>
             </a:extLst>
           </p:cNvPr>
@@ -7124,7 +7124,7 @@
     </p:spTree>
     <p:extLst>
       <p:ext uri="{BB962C8B-B14F-4D97-AF65-F5344CB8AC3E}">
-        <p14:creationId xmlns:p14="http://schemas.microsoft.com/office/powerpoint/2010/main" val="4255720813"/>
+        <p14:creationId xmlns:p14="http://schemas.microsoft.com/office/powerpoint/2010/main" val="1968397380"/>
       </p:ext>
     </p:extLst>
   </p:cSld>
@@ -7156,7 +7156,7 @@
           <p:cNvPr id="7" name="creative_background">
             <a:extLst>
               <a:ext uri="{FF2B5EF4-FFF2-40B4-BE49-F238E27FC236}">
-                <a16:creationId xmlns:a16="http://schemas.microsoft.com/office/drawing/2014/main" id="{4429DB96-7659-D7DE-2439-7042788637B5}"/>
+                <a16:creationId xmlns:a16="http://schemas.microsoft.com/office/drawing/2014/main" id="{603B7C0B-469D-98A0-805F-F9206DC0495A}"/>
               </a:ext>
             </a:extLst>
           </p:cNvPr>
@@ -7229,9 +7229,9 @@
           <a:bodyPr/>
           <a:lstStyle/>
           <a:p>
-            <a:fld id="{402E347B-D365-49E2-9289-3F52BA4D6BD6}" type="datetimeFigureOut">
+            <a:fld id="{953E3269-9E78-4D7E-9A3E-1CB27CD92A12}" type="datetimeFigureOut">
               <a:rPr lang="en-US" smtClean="0"/>
-              <a:t>10/3/2026</a:t>
+              <a:t>10/4/2026</a:t>
             </a:fld>
             <a:endParaRPr lang="en-US"/>
           </a:p>
@@ -7271,7 +7271,7 @@
           <a:bodyPr/>
           <a:lstStyle/>
           <a:p>
-            <a:fld id="{59E99942-F5A0-42B8-85FC-8F53E2428FF4}" type="slidenum">
+            <a:fld id="{F16D5B57-F7EE-4146-9EF5-FE1410ECAA61}" type="slidenum">
               <a:rPr lang="en-US" smtClean="0"/>
               <a:t>‹#›</a:t>
             </a:fld>
@@ -7284,7 +7284,7 @@
           <p:cNvPr id="8" name="kpi_value_1">
             <a:extLst>
               <a:ext uri="{FF2B5EF4-FFF2-40B4-BE49-F238E27FC236}">
-                <a16:creationId xmlns:a16="http://schemas.microsoft.com/office/drawing/2014/main" id="{B018921E-CD12-FE96-0992-69BB04542892}"/>
+                <a16:creationId xmlns:a16="http://schemas.microsoft.com/office/drawing/2014/main" id="{AD31B986-C3A2-245E-0FCD-894D25D024E9}"/>
               </a:ext>
             </a:extLst>
           </p:cNvPr>
@@ -7334,7 +7334,7 @@
           <p:cNvPr id="9" name="kpi_label_1">
             <a:extLst>
               <a:ext uri="{FF2B5EF4-FFF2-40B4-BE49-F238E27FC236}">
-                <a16:creationId xmlns:a16="http://schemas.microsoft.com/office/drawing/2014/main" id="{B7A0BE41-E200-4BA2-86CB-D71440C18102}"/>
+                <a16:creationId xmlns:a16="http://schemas.microsoft.com/office/drawing/2014/main" id="{DE0FFB51-24BB-28A7-0889-9BA291566A33}"/>
               </a:ext>
             </a:extLst>
           </p:cNvPr>
@@ -7382,7 +7382,7 @@
           <p:cNvPr id="10" name="quote">
             <a:extLst>
               <a:ext uri="{FF2B5EF4-FFF2-40B4-BE49-F238E27FC236}">
-                <a16:creationId xmlns:a16="http://schemas.microsoft.com/office/drawing/2014/main" id="{B472E3C2-E655-26DD-E92D-D81FF8E8ED34}"/>
+                <a16:creationId xmlns:a16="http://schemas.microsoft.com/office/drawing/2014/main" id="{26652ADB-811A-B13F-0088-C72E0776A545}"/>
               </a:ext>
             </a:extLst>
           </p:cNvPr>
@@ -7432,7 +7432,7 @@
           <p:cNvPr id="11" name="attribution">
             <a:extLst>
               <a:ext uri="{FF2B5EF4-FFF2-40B4-BE49-F238E27FC236}">
-                <a16:creationId xmlns:a16="http://schemas.microsoft.com/office/drawing/2014/main" id="{3044613B-F22E-72FB-46AF-A774C8DBC18C}"/>
+                <a16:creationId xmlns:a16="http://schemas.microsoft.com/office/drawing/2014/main" id="{8999F893-CB12-2924-2108-AF220F86B1AF}"/>
               </a:ext>
             </a:extLst>
           </p:cNvPr>
@@ -7480,7 +7480,7 @@
           <p:cNvPr id="12" name="item_1_title">
             <a:extLst>
               <a:ext uri="{FF2B5EF4-FFF2-40B4-BE49-F238E27FC236}">
-                <a16:creationId xmlns:a16="http://schemas.microsoft.com/office/drawing/2014/main" id="{0D646FCE-6BA3-8F07-5910-DEE11B3BDF4F}"/>
+                <a16:creationId xmlns:a16="http://schemas.microsoft.com/office/drawing/2014/main" id="{918EAD96-ED7B-EF4C-9AC4-D86167DE8E3F}"/>
               </a:ext>
             </a:extLst>
           </p:cNvPr>
@@ -7533,7 +7533,7 @@
           <p:cNvPr id="13" name="item_1">
             <a:extLst>
               <a:ext uri="{FF2B5EF4-FFF2-40B4-BE49-F238E27FC236}">
-                <a16:creationId xmlns:a16="http://schemas.microsoft.com/office/drawing/2014/main" id="{263750AE-914E-1D6F-F9C0-91648D4EC1F0}"/>
+                <a16:creationId xmlns:a16="http://schemas.microsoft.com/office/drawing/2014/main" id="{A0AAF790-F263-72FC-3AE8-1508FA7EB218}"/>
               </a:ext>
             </a:extLst>
           </p:cNvPr>
@@ -7581,7 +7581,7 @@
           <p:cNvPr id="14" name="source">
             <a:extLst>
               <a:ext uri="{FF2B5EF4-FFF2-40B4-BE49-F238E27FC236}">
-                <a16:creationId xmlns:a16="http://schemas.microsoft.com/office/drawing/2014/main" id="{C951320E-4102-D834-52EE-CF292F48A4A1}"/>
+                <a16:creationId xmlns:a16="http://schemas.microsoft.com/office/drawing/2014/main" id="{B4D14483-35CD-24D7-23C0-D362A6536FC2}"/>
               </a:ext>
             </a:extLst>
           </p:cNvPr>
@@ -7636,7 +7636,7 @@
     </p:spTree>
     <p:extLst>
       <p:ext uri="{BB962C8B-B14F-4D97-AF65-F5344CB8AC3E}">
-        <p14:creationId xmlns:p14="http://schemas.microsoft.com/office/powerpoint/2010/main" val="1767209152"/>
+        <p14:creationId xmlns:p14="http://schemas.microsoft.com/office/powerpoint/2010/main" val="958568766"/>
       </p:ext>
     </p:extLst>
   </p:cSld>
@@ -7668,7 +7668,7 @@
           <p:cNvPr id="7" name="creative_background">
             <a:extLst>
               <a:ext uri="{FF2B5EF4-FFF2-40B4-BE49-F238E27FC236}">
-                <a16:creationId xmlns:a16="http://schemas.microsoft.com/office/drawing/2014/main" id="{A0D4382F-E087-6CCC-2EED-5F741A639BDD}"/>
+                <a16:creationId xmlns:a16="http://schemas.microsoft.com/office/drawing/2014/main" id="{4E2A8150-E955-313B-8F96-0F0D653BF9AE}"/>
               </a:ext>
             </a:extLst>
           </p:cNvPr>
@@ -7741,9 +7741,9 @@
           <a:bodyPr/>
           <a:lstStyle/>
           <a:p>
-            <a:fld id="{402E347B-D365-49E2-9289-3F52BA4D6BD6}" type="datetimeFigureOut">
+            <a:fld id="{953E3269-9E78-4D7E-9A3E-1CB27CD92A12}" type="datetimeFigureOut">
               <a:rPr lang="en-US" smtClean="0"/>
-              <a:t>10/3/2026</a:t>
+              <a:t>10/4/2026</a:t>
             </a:fld>
             <a:endParaRPr lang="en-US"/>
           </a:p>
@@ -7783,7 +7783,7 @@
           <a:bodyPr/>
           <a:lstStyle/>
           <a:p>
-            <a:fld id="{59E99942-F5A0-42B8-85FC-8F53E2428FF4}" type="slidenum">
+            <a:fld id="{F16D5B57-F7EE-4146-9EF5-FE1410ECAA61}" type="slidenum">
               <a:rPr lang="en-US" smtClean="0"/>
               <a:t>‹#›</a:t>
             </a:fld>
@@ -7796,7 +7796,7 @@
           <p:cNvPr id="8" name="item_1_title">
             <a:extLst>
               <a:ext uri="{FF2B5EF4-FFF2-40B4-BE49-F238E27FC236}">
-                <a16:creationId xmlns:a16="http://schemas.microsoft.com/office/drawing/2014/main" id="{EC1DE402-3E84-58D6-BFEF-A5C097A2DFC8}"/>
+                <a16:creationId xmlns:a16="http://schemas.microsoft.com/office/drawing/2014/main" id="{A5493A26-6BB9-E457-EBD9-B9DF1A70FAA5}"/>
               </a:ext>
             </a:extLst>
           </p:cNvPr>
@@ -7846,7 +7846,7 @@
           <p:cNvPr id="9" name="item_1">
             <a:extLst>
               <a:ext uri="{FF2B5EF4-FFF2-40B4-BE49-F238E27FC236}">
-                <a16:creationId xmlns:a16="http://schemas.microsoft.com/office/drawing/2014/main" id="{23755139-8217-E965-267F-1CFCC17BA489}"/>
+                <a16:creationId xmlns:a16="http://schemas.microsoft.com/office/drawing/2014/main" id="{0EA0119D-0FFC-5E53-985F-A5429EA16C7F}"/>
               </a:ext>
             </a:extLst>
           </p:cNvPr>
@@ -7894,7 +7894,7 @@
           <p:cNvPr id="10" name="item_2_title">
             <a:extLst>
               <a:ext uri="{FF2B5EF4-FFF2-40B4-BE49-F238E27FC236}">
-                <a16:creationId xmlns:a16="http://schemas.microsoft.com/office/drawing/2014/main" id="{BC1B043A-9689-0C1D-6E7B-8DB33462DC9F}"/>
+                <a16:creationId xmlns:a16="http://schemas.microsoft.com/office/drawing/2014/main" id="{2C9833ED-F9D1-1449-86A9-34C0DA86A7EB}"/>
               </a:ext>
             </a:extLst>
           </p:cNvPr>
@@ -7947,7 +7947,7 @@
           <p:cNvPr id="11" name="item_2">
             <a:extLst>
               <a:ext uri="{FF2B5EF4-FFF2-40B4-BE49-F238E27FC236}">
-                <a16:creationId xmlns:a16="http://schemas.microsoft.com/office/drawing/2014/main" id="{8B11088B-AD11-6793-6FAC-DEEDB475FFD1}"/>
+                <a16:creationId xmlns:a16="http://schemas.microsoft.com/office/drawing/2014/main" id="{6E96C1F2-2B73-09F8-FA24-2B8070629664}"/>
               </a:ext>
             </a:extLst>
           </p:cNvPr>
@@ -7995,7 +7995,7 @@
           <p:cNvPr id="12" name="item_3_title">
             <a:extLst>
               <a:ext uri="{FF2B5EF4-FFF2-40B4-BE49-F238E27FC236}">
-                <a16:creationId xmlns:a16="http://schemas.microsoft.com/office/drawing/2014/main" id="{683611D4-6573-8806-7F43-439E23593168}"/>
+                <a16:creationId xmlns:a16="http://schemas.microsoft.com/office/drawing/2014/main" id="{9A95EB7F-85BD-0E18-B162-4AAA4E24A1DD}"/>
               </a:ext>
             </a:extLst>
           </p:cNvPr>
@@ -8048,7 +8048,7 @@
           <p:cNvPr id="13" name="item_3">
             <a:extLst>
               <a:ext uri="{FF2B5EF4-FFF2-40B4-BE49-F238E27FC236}">
-                <a16:creationId xmlns:a16="http://schemas.microsoft.com/office/drawing/2014/main" id="{B199A3F1-C2B3-0F42-D27F-171AC9BFB307}"/>
+                <a16:creationId xmlns:a16="http://schemas.microsoft.com/office/drawing/2014/main" id="{4ACEDD82-8DEE-008F-26D4-13EB1EA20BED}"/>
               </a:ext>
             </a:extLst>
           </p:cNvPr>
@@ -8096,7 +8096,7 @@
           <p:cNvPr id="14" name="source">
             <a:extLst>
               <a:ext uri="{FF2B5EF4-FFF2-40B4-BE49-F238E27FC236}">
-                <a16:creationId xmlns:a16="http://schemas.microsoft.com/office/drawing/2014/main" id="{BB95DD7D-2F73-D318-A93E-17D933630795}"/>
+                <a16:creationId xmlns:a16="http://schemas.microsoft.com/office/drawing/2014/main" id="{F7C82BDF-4A18-DC97-78F8-A7E1E5ABE37E}"/>
               </a:ext>
             </a:extLst>
           </p:cNvPr>
@@ -8151,7 +8151,7 @@
     </p:spTree>
     <p:extLst>
       <p:ext uri="{BB962C8B-B14F-4D97-AF65-F5344CB8AC3E}">
-        <p14:creationId xmlns:p14="http://schemas.microsoft.com/office/powerpoint/2010/main" val="1648082350"/>
+        <p14:creationId xmlns:p14="http://schemas.microsoft.com/office/powerpoint/2010/main" val="4286227675"/>
       </p:ext>
     </p:extLst>
   </p:cSld>
@@ -8183,7 +8183,7 @@
           <p:cNvPr id="7" name="creative_background">
             <a:extLst>
               <a:ext uri="{FF2B5EF4-FFF2-40B4-BE49-F238E27FC236}">
-                <a16:creationId xmlns:a16="http://schemas.microsoft.com/office/drawing/2014/main" id="{2C6DC366-840D-0C1D-AF9C-FED9203FD014}"/>
+                <a16:creationId xmlns:a16="http://schemas.microsoft.com/office/drawing/2014/main" id="{DE1B4452-2DCB-16AD-6A45-13C8EE420EC5}"/>
               </a:ext>
             </a:extLst>
           </p:cNvPr>
@@ -8256,9 +8256,9 @@
           <a:bodyPr/>
           <a:lstStyle/>
           <a:p>
-            <a:fld id="{402E347B-D365-49E2-9289-3F52BA4D6BD6}" type="datetimeFigureOut">
+            <a:fld id="{953E3269-9E78-4D7E-9A3E-1CB27CD92A12}" type="datetimeFigureOut">
               <a:rPr lang="en-US" smtClean="0"/>
-              <a:t>10/3/2026</a:t>
+              <a:t>10/4/2026</a:t>
             </a:fld>
             <a:endParaRPr lang="en-US"/>
           </a:p>
@@ -8298,7 +8298,7 @@
           <a:bodyPr/>
           <a:lstStyle/>
           <a:p>
-            <a:fld id="{59E99942-F5A0-42B8-85FC-8F53E2428FF4}" type="slidenum">
+            <a:fld id="{F16D5B57-F7EE-4146-9EF5-FE1410ECAA61}" type="slidenum">
               <a:rPr lang="en-US" smtClean="0"/>
               <a:t>‹#›</a:t>
             </a:fld>
@@ -8311,7 +8311,7 @@
           <p:cNvPr id="8" name="marker_1">
             <a:extLst>
               <a:ext uri="{FF2B5EF4-FFF2-40B4-BE49-F238E27FC236}">
-                <a16:creationId xmlns:a16="http://schemas.microsoft.com/office/drawing/2014/main" id="{28083B0E-D8E3-92AA-266E-1AF6C72AC6B3}"/>
+                <a16:creationId xmlns:a16="http://schemas.microsoft.com/office/drawing/2014/main" id="{6D0B1B0B-1C4F-003C-9D6C-13E4435B5812}"/>
               </a:ext>
             </a:extLst>
           </p:cNvPr>
@@ -8367,7 +8367,7 @@
           <p:cNvPr id="9" name="item_1_title">
             <a:extLst>
               <a:ext uri="{FF2B5EF4-FFF2-40B4-BE49-F238E27FC236}">
-                <a16:creationId xmlns:a16="http://schemas.microsoft.com/office/drawing/2014/main" id="{C2B60993-7354-21EF-8F8A-290A8BEB72AC}"/>
+                <a16:creationId xmlns:a16="http://schemas.microsoft.com/office/drawing/2014/main" id="{350ED9DD-7E98-E7BE-5AD6-4C2641FD9BCF}"/>
               </a:ext>
             </a:extLst>
           </p:cNvPr>
@@ -8420,7 +8420,7 @@
           <p:cNvPr id="10" name="item_1">
             <a:extLst>
               <a:ext uri="{FF2B5EF4-FFF2-40B4-BE49-F238E27FC236}">
-                <a16:creationId xmlns:a16="http://schemas.microsoft.com/office/drawing/2014/main" id="{2B04D01D-95CE-16DB-4695-226477151DA3}"/>
+                <a16:creationId xmlns:a16="http://schemas.microsoft.com/office/drawing/2014/main" id="{039B5BC7-8F8B-5E88-0D73-896A35537973}"/>
               </a:ext>
             </a:extLst>
           </p:cNvPr>
@@ -8468,7 +8468,7 @@
           <p:cNvPr id="11" name="marker_2">
             <a:extLst>
               <a:ext uri="{FF2B5EF4-FFF2-40B4-BE49-F238E27FC236}">
-                <a16:creationId xmlns:a16="http://schemas.microsoft.com/office/drawing/2014/main" id="{F8543F8D-A28A-8718-6192-7BEFC34BF62A}"/>
+                <a16:creationId xmlns:a16="http://schemas.microsoft.com/office/drawing/2014/main" id="{70924C5B-D34E-F9A7-6F53-D28044684E46}"/>
               </a:ext>
             </a:extLst>
           </p:cNvPr>
@@ -8524,7 +8524,7 @@
           <p:cNvPr id="12" name="item_2_title">
             <a:extLst>
               <a:ext uri="{FF2B5EF4-FFF2-40B4-BE49-F238E27FC236}">
-                <a16:creationId xmlns:a16="http://schemas.microsoft.com/office/drawing/2014/main" id="{260A2F70-9465-320F-80AE-AB71C25886CA}"/>
+                <a16:creationId xmlns:a16="http://schemas.microsoft.com/office/drawing/2014/main" id="{3D372411-ABB6-878F-C28E-EFD0331B813D}"/>
               </a:ext>
             </a:extLst>
           </p:cNvPr>
@@ -8577,7 +8577,7 @@
           <p:cNvPr id="13" name="item_2">
             <a:extLst>
               <a:ext uri="{FF2B5EF4-FFF2-40B4-BE49-F238E27FC236}">
-                <a16:creationId xmlns:a16="http://schemas.microsoft.com/office/drawing/2014/main" id="{ECC55D42-09D4-5E7F-41ED-07A86F44713F}"/>
+                <a16:creationId xmlns:a16="http://schemas.microsoft.com/office/drawing/2014/main" id="{C2620B74-FE01-5737-6AB1-87297267B4D6}"/>
               </a:ext>
             </a:extLst>
           </p:cNvPr>
@@ -8625,7 +8625,7 @@
           <p:cNvPr id="14" name="source">
             <a:extLst>
               <a:ext uri="{FF2B5EF4-FFF2-40B4-BE49-F238E27FC236}">
-                <a16:creationId xmlns:a16="http://schemas.microsoft.com/office/drawing/2014/main" id="{271948A3-3312-A119-DD58-D375A02BB108}"/>
+                <a16:creationId xmlns:a16="http://schemas.microsoft.com/office/drawing/2014/main" id="{9F779B73-11DE-BBFA-1E5F-22DEF0758B7D}"/>
               </a:ext>
             </a:extLst>
           </p:cNvPr>
@@ -8680,7 +8680,7 @@
     </p:spTree>
     <p:extLst>
       <p:ext uri="{BB962C8B-B14F-4D97-AF65-F5344CB8AC3E}">
-        <p14:creationId xmlns:p14="http://schemas.microsoft.com/office/powerpoint/2010/main" val="1620971767"/>
+        <p14:creationId xmlns:p14="http://schemas.microsoft.com/office/powerpoint/2010/main" val="3326262911"/>
       </p:ext>
     </p:extLst>
   </p:cSld>
@@ -8712,7 +8712,7 @@
           <p:cNvPr id="7" name="creative_background">
             <a:extLst>
               <a:ext uri="{FF2B5EF4-FFF2-40B4-BE49-F238E27FC236}">
-                <a16:creationId xmlns:a16="http://schemas.microsoft.com/office/drawing/2014/main" id="{531E9E69-C501-C0BD-DE71-5D60413298CC}"/>
+                <a16:creationId xmlns:a16="http://schemas.microsoft.com/office/drawing/2014/main" id="{01B4BAF8-A3A6-9385-07AA-19B4DD10C087}"/>
               </a:ext>
             </a:extLst>
           </p:cNvPr>
@@ -8785,9 +8785,9 @@
           <a:bodyPr/>
           <a:lstStyle/>
           <a:p>
-            <a:fld id="{402E347B-D365-49E2-9289-3F52BA4D6BD6}" type="datetimeFigureOut">
+            <a:fld id="{953E3269-9E78-4D7E-9A3E-1CB27CD92A12}" type="datetimeFigureOut">
               <a:rPr lang="en-US" smtClean="0"/>
-              <a:t>10/3/2026</a:t>
+              <a:t>10/4/2026</a:t>
             </a:fld>
             <a:endParaRPr lang="en-US"/>
           </a:p>
@@ -8827,7 +8827,7 @@
           <a:bodyPr/>
           <a:lstStyle/>
           <a:p>
-            <a:fld id="{59E99942-F5A0-42B8-85FC-8F53E2428FF4}" type="slidenum">
+            <a:fld id="{F16D5B57-F7EE-4146-9EF5-FE1410ECAA61}" type="slidenum">
               <a:rPr lang="en-US" smtClean="0"/>
               <a:t>‹#›</a:t>
             </a:fld>
@@ -8840,7 +8840,7 @@
           <p:cNvPr id="8" name="kpi_value_1">
             <a:extLst>
               <a:ext uri="{FF2B5EF4-FFF2-40B4-BE49-F238E27FC236}">
-                <a16:creationId xmlns:a16="http://schemas.microsoft.com/office/drawing/2014/main" id="{49C8B1EA-8D97-F13A-2EAF-330E3683B859}"/>
+                <a16:creationId xmlns:a16="http://schemas.microsoft.com/office/drawing/2014/main" id="{DD7222B2-3B45-3799-D471-C6E9627A4C46}"/>
               </a:ext>
             </a:extLst>
           </p:cNvPr>
@@ -8890,7 +8890,7 @@
           <p:cNvPr id="9" name="kpi_label_1">
             <a:extLst>
               <a:ext uri="{FF2B5EF4-FFF2-40B4-BE49-F238E27FC236}">
-                <a16:creationId xmlns:a16="http://schemas.microsoft.com/office/drawing/2014/main" id="{E569279E-246E-443D-B8B1-1B58BBE0A115}"/>
+                <a16:creationId xmlns:a16="http://schemas.microsoft.com/office/drawing/2014/main" id="{14B8C557-C15B-477C-B1F3-9CE07BE848CE}"/>
               </a:ext>
             </a:extLst>
           </p:cNvPr>
@@ -8938,7 +8938,7 @@
           <p:cNvPr id="10" name="quote">
             <a:extLst>
               <a:ext uri="{FF2B5EF4-FFF2-40B4-BE49-F238E27FC236}">
-                <a16:creationId xmlns:a16="http://schemas.microsoft.com/office/drawing/2014/main" id="{94CA081B-007D-1D80-7ED6-4EB3B84F706C}"/>
+                <a16:creationId xmlns:a16="http://schemas.microsoft.com/office/drawing/2014/main" id="{B81D6554-6BF7-0C13-1DE3-DCA56E41C6A6}"/>
               </a:ext>
             </a:extLst>
           </p:cNvPr>
@@ -8988,7 +8988,7 @@
           <p:cNvPr id="11" name="attribution">
             <a:extLst>
               <a:ext uri="{FF2B5EF4-FFF2-40B4-BE49-F238E27FC236}">
-                <a16:creationId xmlns:a16="http://schemas.microsoft.com/office/drawing/2014/main" id="{79E66203-6BC9-AE97-9A8F-B89444B90181}"/>
+                <a16:creationId xmlns:a16="http://schemas.microsoft.com/office/drawing/2014/main" id="{4694B398-D3D5-B3DE-51F2-09C0C2D94451}"/>
               </a:ext>
             </a:extLst>
           </p:cNvPr>
@@ -9036,7 +9036,7 @@
           <p:cNvPr id="12" name="item_1_title">
             <a:extLst>
               <a:ext uri="{FF2B5EF4-FFF2-40B4-BE49-F238E27FC236}">
-                <a16:creationId xmlns:a16="http://schemas.microsoft.com/office/drawing/2014/main" id="{E056F42B-0344-43EA-6705-B655A55EB1D8}"/>
+                <a16:creationId xmlns:a16="http://schemas.microsoft.com/office/drawing/2014/main" id="{3F8C9B80-9D6B-9231-AF6E-768FABCBEC2D}"/>
               </a:ext>
             </a:extLst>
           </p:cNvPr>
@@ -9089,7 +9089,7 @@
           <p:cNvPr id="13" name="item_1">
             <a:extLst>
               <a:ext uri="{FF2B5EF4-FFF2-40B4-BE49-F238E27FC236}">
-                <a16:creationId xmlns:a16="http://schemas.microsoft.com/office/drawing/2014/main" id="{57248D2D-0075-71B2-0721-F2623BC789B4}"/>
+                <a16:creationId xmlns:a16="http://schemas.microsoft.com/office/drawing/2014/main" id="{1C87457D-24A5-E13B-E727-286B17ECDEC9}"/>
               </a:ext>
             </a:extLst>
           </p:cNvPr>
@@ -9137,7 +9137,7 @@
           <p:cNvPr id="14" name="source">
             <a:extLst>
               <a:ext uri="{FF2B5EF4-FFF2-40B4-BE49-F238E27FC236}">
-                <a16:creationId xmlns:a16="http://schemas.microsoft.com/office/drawing/2014/main" id="{056BD69A-4CD8-085A-70E1-82BB45360302}"/>
+                <a16:creationId xmlns:a16="http://schemas.microsoft.com/office/drawing/2014/main" id="{2858E346-F301-7D64-67A9-14DD66B461DB}"/>
               </a:ext>
             </a:extLst>
           </p:cNvPr>
@@ -9192,7 +9192,7 @@
     </p:spTree>
     <p:extLst>
       <p:ext uri="{BB962C8B-B14F-4D97-AF65-F5344CB8AC3E}">
-        <p14:creationId xmlns:p14="http://schemas.microsoft.com/office/powerpoint/2010/main" val="1367014621"/>
+        <p14:creationId xmlns:p14="http://schemas.microsoft.com/office/powerpoint/2010/main" val="693960833"/>
       </p:ext>
     </p:extLst>
   </p:cSld>
@@ -9224,7 +9224,7 @@
           <p:cNvPr id="7" name="creative_background">
             <a:extLst>
               <a:ext uri="{FF2B5EF4-FFF2-40B4-BE49-F238E27FC236}">
-                <a16:creationId xmlns:a16="http://schemas.microsoft.com/office/drawing/2014/main" id="{E24FC8FC-E76E-14E0-8ECF-01B7E97158F2}"/>
+                <a16:creationId xmlns:a16="http://schemas.microsoft.com/office/drawing/2014/main" id="{1581B8EA-9A98-4C4E-A60C-4406ED8A530C}"/>
               </a:ext>
             </a:extLst>
           </p:cNvPr>
@@ -9297,9 +9297,9 @@
           <a:bodyPr/>
           <a:lstStyle/>
           <a:p>
-            <a:fld id="{402E347B-D365-49E2-9289-3F52BA4D6BD6}" type="datetimeFigureOut">
+            <a:fld id="{953E3269-9E78-4D7E-9A3E-1CB27CD92A12}" type="datetimeFigureOut">
               <a:rPr lang="en-US" smtClean="0"/>
-              <a:t>10/3/2026</a:t>
+              <a:t>10/4/2026</a:t>
             </a:fld>
             <a:endParaRPr lang="en-US"/>
           </a:p>
@@ -9339,7 +9339,7 @@
           <a:bodyPr/>
           <a:lstStyle/>
           <a:p>
-            <a:fld id="{59E99942-F5A0-42B8-85FC-8F53E2428FF4}" type="slidenum">
+            <a:fld id="{F16D5B57-F7EE-4146-9EF5-FE1410ECAA61}" type="slidenum">
               <a:rPr lang="en-US" smtClean="0"/>
               <a:t>‹#›</a:t>
             </a:fld>
@@ -9352,7 +9352,7 @@
           <p:cNvPr id="8" name="marker_1">
             <a:extLst>
               <a:ext uri="{FF2B5EF4-FFF2-40B4-BE49-F238E27FC236}">
-                <a16:creationId xmlns:a16="http://schemas.microsoft.com/office/drawing/2014/main" id="{D547A39E-9DAE-3AAC-23B7-5E0F79B985D9}"/>
+                <a16:creationId xmlns:a16="http://schemas.microsoft.com/office/drawing/2014/main" id="{10204A45-B8FB-EBAC-D616-2D4AEC947F8C}"/>
               </a:ext>
             </a:extLst>
           </p:cNvPr>
@@ -9408,7 +9408,7 @@
           <p:cNvPr id="9" name="item_1">
             <a:extLst>
               <a:ext uri="{FF2B5EF4-FFF2-40B4-BE49-F238E27FC236}">
-                <a16:creationId xmlns:a16="http://schemas.microsoft.com/office/drawing/2014/main" id="{BFD7EFC3-4EE5-CE05-B21F-61A30671B7A8}"/>
+                <a16:creationId xmlns:a16="http://schemas.microsoft.com/office/drawing/2014/main" id="{FFB66443-B4F4-1C3D-295F-2F6814B2F9E0}"/>
               </a:ext>
             </a:extLst>
           </p:cNvPr>
@@ -9456,7 +9456,7 @@
           <p:cNvPr id="10" name="marker_2">
             <a:extLst>
               <a:ext uri="{FF2B5EF4-FFF2-40B4-BE49-F238E27FC236}">
-                <a16:creationId xmlns:a16="http://schemas.microsoft.com/office/drawing/2014/main" id="{438FF659-090B-F4C2-9BAA-E3030FCF9C9D}"/>
+                <a16:creationId xmlns:a16="http://schemas.microsoft.com/office/drawing/2014/main" id="{245EF52C-7666-AC2A-59A6-E3F03A8EF718}"/>
               </a:ext>
             </a:extLst>
           </p:cNvPr>
@@ -9512,7 +9512,7 @@
           <p:cNvPr id="11" name="item_2">
             <a:extLst>
               <a:ext uri="{FF2B5EF4-FFF2-40B4-BE49-F238E27FC236}">
-                <a16:creationId xmlns:a16="http://schemas.microsoft.com/office/drawing/2014/main" id="{91C36124-0094-B4C7-7A42-64D6B5B12789}"/>
+                <a16:creationId xmlns:a16="http://schemas.microsoft.com/office/drawing/2014/main" id="{C318B980-2ABD-E8F1-6116-1F83B392ECD3}"/>
               </a:ext>
             </a:extLst>
           </p:cNvPr>
@@ -9560,7 +9560,7 @@
           <p:cNvPr id="12" name="marker_3">
             <a:extLst>
               <a:ext uri="{FF2B5EF4-FFF2-40B4-BE49-F238E27FC236}">
-                <a16:creationId xmlns:a16="http://schemas.microsoft.com/office/drawing/2014/main" id="{6CA619B8-8AF6-4BD3-258F-503B1C0780B1}"/>
+                <a16:creationId xmlns:a16="http://schemas.microsoft.com/office/drawing/2014/main" id="{7F826B24-BE3D-4C43-AE1C-BF6FE58DABC6}"/>
               </a:ext>
             </a:extLst>
           </p:cNvPr>
@@ -9616,7 +9616,7 @@
           <p:cNvPr id="13" name="item_3">
             <a:extLst>
               <a:ext uri="{FF2B5EF4-FFF2-40B4-BE49-F238E27FC236}">
-                <a16:creationId xmlns:a16="http://schemas.microsoft.com/office/drawing/2014/main" id="{31D704B3-FC36-0314-F773-7201276BEA6B}"/>
+                <a16:creationId xmlns:a16="http://schemas.microsoft.com/office/drawing/2014/main" id="{5D0647E2-ED05-A2A1-D484-1C579F7EBAAA}"/>
               </a:ext>
             </a:extLst>
           </p:cNvPr>
@@ -9664,7 +9664,7 @@
           <p:cNvPr id="14" name="marker_4">
             <a:extLst>
               <a:ext uri="{FF2B5EF4-FFF2-40B4-BE49-F238E27FC236}">
-                <a16:creationId xmlns:a16="http://schemas.microsoft.com/office/drawing/2014/main" id="{12CBD3E5-27BD-F73C-7248-0D2F149B486F}"/>
+                <a16:creationId xmlns:a16="http://schemas.microsoft.com/office/drawing/2014/main" id="{1CADAFCA-9A30-0FEE-BF50-FDCD9FC01460}"/>
               </a:ext>
             </a:extLst>
           </p:cNvPr>
@@ -9720,7 +9720,7 @@
           <p:cNvPr id="15" name="item_4">
             <a:extLst>
               <a:ext uri="{FF2B5EF4-FFF2-40B4-BE49-F238E27FC236}">
-                <a16:creationId xmlns:a16="http://schemas.microsoft.com/office/drawing/2014/main" id="{2203E6B8-BB7A-7585-9347-DF0738DA7E74}"/>
+                <a16:creationId xmlns:a16="http://schemas.microsoft.com/office/drawing/2014/main" id="{770FC47B-3C82-F75A-8542-722BF83837D4}"/>
               </a:ext>
             </a:extLst>
           </p:cNvPr>
@@ -9768,7 +9768,7 @@
           <p:cNvPr id="16" name="source">
             <a:extLst>
               <a:ext uri="{FF2B5EF4-FFF2-40B4-BE49-F238E27FC236}">
-                <a16:creationId xmlns:a16="http://schemas.microsoft.com/office/drawing/2014/main" id="{70ED0625-BFC8-8BFA-731B-4E171748867F}"/>
+                <a16:creationId xmlns:a16="http://schemas.microsoft.com/office/drawing/2014/main" id="{CA11687E-7D91-3C7B-C9D8-187647590CAD}"/>
               </a:ext>
             </a:extLst>
           </p:cNvPr>
@@ -9823,7 +9823,7 @@
     </p:spTree>
     <p:extLst>
       <p:ext uri="{BB962C8B-B14F-4D97-AF65-F5344CB8AC3E}">
-        <p14:creationId xmlns:p14="http://schemas.microsoft.com/office/powerpoint/2010/main" val="4029897623"/>
+        <p14:creationId xmlns:p14="http://schemas.microsoft.com/office/powerpoint/2010/main" val="1938960164"/>
       </p:ext>
     </p:extLst>
   </p:cSld>
@@ -9855,7 +9855,7 @@
           <p:cNvPr id="7" name="creative_background">
             <a:extLst>
               <a:ext uri="{FF2B5EF4-FFF2-40B4-BE49-F238E27FC236}">
-                <a16:creationId xmlns:a16="http://schemas.microsoft.com/office/drawing/2014/main" id="{9B13EFE9-AB46-F7EC-EA63-4A837B2103CB}"/>
+                <a16:creationId xmlns:a16="http://schemas.microsoft.com/office/drawing/2014/main" id="{1F131F8F-39E9-C15E-735F-B6A243049D48}"/>
               </a:ext>
             </a:extLst>
           </p:cNvPr>
@@ -9928,9 +9928,9 @@
           <a:bodyPr/>
           <a:lstStyle/>
           <a:p>
-            <a:fld id="{402E347B-D365-49E2-9289-3F52BA4D6BD6}" type="datetimeFigureOut">
+            <a:fld id="{953E3269-9E78-4D7E-9A3E-1CB27CD92A12}" type="datetimeFigureOut">
               <a:rPr lang="en-US" smtClean="0"/>
-              <a:t>10/3/2026</a:t>
+              <a:t>10/4/2026</a:t>
             </a:fld>
             <a:endParaRPr lang="en-US"/>
           </a:p>
@@ -9970,7 +9970,7 @@
           <a:bodyPr/>
           <a:lstStyle/>
           <a:p>
-            <a:fld id="{59E99942-F5A0-42B8-85FC-8F53E2428FF4}" type="slidenum">
+            <a:fld id="{F16D5B57-F7EE-4146-9EF5-FE1410ECAA61}" type="slidenum">
               <a:rPr lang="en-US" smtClean="0"/>
               <a:t>‹#›</a:t>
             </a:fld>
@@ -9983,7 +9983,7 @@
           <p:cNvPr id="8" name="decisions_title">
             <a:extLst>
               <a:ext uri="{FF2B5EF4-FFF2-40B4-BE49-F238E27FC236}">
-                <a16:creationId xmlns:a16="http://schemas.microsoft.com/office/drawing/2014/main" id="{E3AB3D67-B6D7-15B3-DD8A-AE10DAED14F9}"/>
+                <a16:creationId xmlns:a16="http://schemas.microsoft.com/office/drawing/2014/main" id="{F2A3F6C5-3908-3EB6-5C8A-AC69F5E3EA5A}"/>
               </a:ext>
             </a:extLst>
           </p:cNvPr>
@@ -10033,7 +10033,7 @@
           <p:cNvPr id="9" name="decisions">
             <a:extLst>
               <a:ext uri="{FF2B5EF4-FFF2-40B4-BE49-F238E27FC236}">
-                <a16:creationId xmlns:a16="http://schemas.microsoft.com/office/drawing/2014/main" id="{9E901251-A3C0-90B9-943A-6440E809B171}"/>
+                <a16:creationId xmlns:a16="http://schemas.microsoft.com/office/drawing/2014/main" id="{C5C9CAFF-1EBB-9B9E-097C-B4326BE22B67}"/>
               </a:ext>
             </a:extLst>
           </p:cNvPr>
@@ -10076,7 +10076,7 @@
           <p:cNvPr id="10" name="item_1_title">
             <a:extLst>
               <a:ext uri="{FF2B5EF4-FFF2-40B4-BE49-F238E27FC236}">
-                <a16:creationId xmlns:a16="http://schemas.microsoft.com/office/drawing/2014/main" id="{9A99EE76-185B-F12C-23C9-D2000EA8FD5D}"/>
+                <a16:creationId xmlns:a16="http://schemas.microsoft.com/office/drawing/2014/main" id="{2FB7EDF1-23AE-DE15-55E3-CDF58957D467}"/>
               </a:ext>
             </a:extLst>
           </p:cNvPr>
@@ -10129,7 +10129,7 @@
           <p:cNvPr id="11" name="item_1">
             <a:extLst>
               <a:ext uri="{FF2B5EF4-FFF2-40B4-BE49-F238E27FC236}">
-                <a16:creationId xmlns:a16="http://schemas.microsoft.com/office/drawing/2014/main" id="{0181952D-7AEE-357C-6BD4-98A755E4F131}"/>
+                <a16:creationId xmlns:a16="http://schemas.microsoft.com/office/drawing/2014/main" id="{A1C1E34C-2B4C-10C8-3218-A1A6C7559D1F}"/>
               </a:ext>
             </a:extLst>
           </p:cNvPr>
@@ -10177,7 +10177,7 @@
           <p:cNvPr id="12" name="item_2_title">
             <a:extLst>
               <a:ext uri="{FF2B5EF4-FFF2-40B4-BE49-F238E27FC236}">
-                <a16:creationId xmlns:a16="http://schemas.microsoft.com/office/drawing/2014/main" id="{69BFEA5F-2625-1552-9070-BE18BC085EEE}"/>
+                <a16:creationId xmlns:a16="http://schemas.microsoft.com/office/drawing/2014/main" id="{D74DBB16-5999-43B1-D5D4-892C09E5C7A0}"/>
               </a:ext>
             </a:extLst>
           </p:cNvPr>
@@ -10230,7 +10230,7 @@
           <p:cNvPr id="13" name="item_2">
             <a:extLst>
               <a:ext uri="{FF2B5EF4-FFF2-40B4-BE49-F238E27FC236}">
-                <a16:creationId xmlns:a16="http://schemas.microsoft.com/office/drawing/2014/main" id="{9B485882-E483-79B2-15FE-63A46FA27DE7}"/>
+                <a16:creationId xmlns:a16="http://schemas.microsoft.com/office/drawing/2014/main" id="{94285228-C063-16E9-9908-903EBD308C16}"/>
               </a:ext>
             </a:extLst>
           </p:cNvPr>
@@ -10278,7 +10278,7 @@
           <p:cNvPr id="14" name="item_3_title">
             <a:extLst>
               <a:ext uri="{FF2B5EF4-FFF2-40B4-BE49-F238E27FC236}">
-                <a16:creationId xmlns:a16="http://schemas.microsoft.com/office/drawing/2014/main" id="{ED1173CA-027A-C9AC-34F9-E97CDBA78027}"/>
+                <a16:creationId xmlns:a16="http://schemas.microsoft.com/office/drawing/2014/main" id="{85554F51-B52B-1018-DD0C-D3427EF337CA}"/>
               </a:ext>
             </a:extLst>
           </p:cNvPr>
@@ -10331,7 +10331,7 @@
           <p:cNvPr id="15" name="item_3">
             <a:extLst>
               <a:ext uri="{FF2B5EF4-FFF2-40B4-BE49-F238E27FC236}">
-                <a16:creationId xmlns:a16="http://schemas.microsoft.com/office/drawing/2014/main" id="{43C2029C-A711-B632-ECAD-683EA824032D}"/>
+                <a16:creationId xmlns:a16="http://schemas.microsoft.com/office/drawing/2014/main" id="{23C1EBDA-B819-ABB7-BB42-A0010A160DCA}"/>
               </a:ext>
             </a:extLst>
           </p:cNvPr>
@@ -10379,7 +10379,7 @@
           <p:cNvPr id="16" name="source">
             <a:extLst>
               <a:ext uri="{FF2B5EF4-FFF2-40B4-BE49-F238E27FC236}">
-                <a16:creationId xmlns:a16="http://schemas.microsoft.com/office/drawing/2014/main" id="{7AF7916E-9031-79FB-42DB-A56B6EF8F55F}"/>
+                <a16:creationId xmlns:a16="http://schemas.microsoft.com/office/drawing/2014/main" id="{3120EF31-EA63-5EF5-A01C-CB66B49DA25B}"/>
               </a:ext>
             </a:extLst>
           </p:cNvPr>
@@ -10434,7 +10434,7 @@
     </p:spTree>
     <p:extLst>
       <p:ext uri="{BB962C8B-B14F-4D97-AF65-F5344CB8AC3E}">
-        <p14:creationId xmlns:p14="http://schemas.microsoft.com/office/powerpoint/2010/main" val="3943439590"/>
+        <p14:creationId xmlns:p14="http://schemas.microsoft.com/office/powerpoint/2010/main" val="2458469187"/>
       </p:ext>
     </p:extLst>
   </p:cSld>
@@ -10466,7 +10466,7 @@
           <p:cNvPr id="7" name="creative_background">
             <a:extLst>
               <a:ext uri="{FF2B5EF4-FFF2-40B4-BE49-F238E27FC236}">
-                <a16:creationId xmlns:a16="http://schemas.microsoft.com/office/drawing/2014/main" id="{13E47039-D087-FAE2-ED1E-8480C8157CD4}"/>
+                <a16:creationId xmlns:a16="http://schemas.microsoft.com/office/drawing/2014/main" id="{B1255091-0BBE-B555-E8B2-6B2D7A2040B4}"/>
               </a:ext>
             </a:extLst>
           </p:cNvPr>
@@ -10539,9 +10539,9 @@
           <a:bodyPr/>
           <a:lstStyle/>
           <a:p>
-            <a:fld id="{402E347B-D365-49E2-9289-3F52BA4D6BD6}" type="datetimeFigureOut">
+            <a:fld id="{953E3269-9E78-4D7E-9A3E-1CB27CD92A12}" type="datetimeFigureOut">
               <a:rPr lang="en-US" smtClean="0"/>
-              <a:t>10/3/2026</a:t>
+              <a:t>10/4/2026</a:t>
             </a:fld>
             <a:endParaRPr lang="en-US"/>
           </a:p>
@@ -10581,7 +10581,7 @@
           <a:bodyPr/>
           <a:lstStyle/>
           <a:p>
-            <a:fld id="{59E99942-F5A0-42B8-85FC-8F53E2428FF4}" type="slidenum">
+            <a:fld id="{F16D5B57-F7EE-4146-9EF5-FE1410ECAA61}" type="slidenum">
               <a:rPr lang="en-US" smtClean="0"/>
               <a:t>‹#›</a:t>
             </a:fld>
@@ -10594,7 +10594,7 @@
           <p:cNvPr id="8" name="body">
             <a:extLst>
               <a:ext uri="{FF2B5EF4-FFF2-40B4-BE49-F238E27FC236}">
-                <a16:creationId xmlns:a16="http://schemas.microsoft.com/office/drawing/2014/main" id="{E6E98F5D-A92E-32A4-8358-A7CFC91E4B80}"/>
+                <a16:creationId xmlns:a16="http://schemas.microsoft.com/office/drawing/2014/main" id="{092A5AA0-74C4-5C89-4A51-D044AF7719D1}"/>
               </a:ext>
             </a:extLst>
           </p:cNvPr>
@@ -10634,7 +10634,7 @@
           <p:cNvPr id="9" name="kpi_value_1">
             <a:extLst>
               <a:ext uri="{FF2B5EF4-FFF2-40B4-BE49-F238E27FC236}">
-                <a16:creationId xmlns:a16="http://schemas.microsoft.com/office/drawing/2014/main" id="{43737BD9-8C54-C160-7526-01FEB6767F82}"/>
+                <a16:creationId xmlns:a16="http://schemas.microsoft.com/office/drawing/2014/main" id="{AF9BCFF4-D84F-637E-A57B-FE8EF2E489CD}"/>
               </a:ext>
             </a:extLst>
           </p:cNvPr>
@@ -10687,7 +10687,7 @@
           <p:cNvPr id="10" name="kpi_label_1">
             <a:extLst>
               <a:ext uri="{FF2B5EF4-FFF2-40B4-BE49-F238E27FC236}">
-                <a16:creationId xmlns:a16="http://schemas.microsoft.com/office/drawing/2014/main" id="{B9F0BBA4-1B97-F08B-E656-FA4BAF555BA3}"/>
+                <a16:creationId xmlns:a16="http://schemas.microsoft.com/office/drawing/2014/main" id="{80F038EB-88E0-827D-D086-8B0C5B99FE30}"/>
               </a:ext>
             </a:extLst>
           </p:cNvPr>
@@ -10735,7 +10735,7 @@
           <p:cNvPr id="11" name="kpi_value_2">
             <a:extLst>
               <a:ext uri="{FF2B5EF4-FFF2-40B4-BE49-F238E27FC236}">
-                <a16:creationId xmlns:a16="http://schemas.microsoft.com/office/drawing/2014/main" id="{BDF482EB-C0A6-B3B1-393A-6DC7C21EE190}"/>
+                <a16:creationId xmlns:a16="http://schemas.microsoft.com/office/drawing/2014/main" id="{FDE9207A-0E53-B6D8-1AB4-503A03475BCF}"/>
               </a:ext>
             </a:extLst>
           </p:cNvPr>
@@ -10788,7 +10788,7 @@
           <p:cNvPr id="12" name="kpi_label_2">
             <a:extLst>
               <a:ext uri="{FF2B5EF4-FFF2-40B4-BE49-F238E27FC236}">
-                <a16:creationId xmlns:a16="http://schemas.microsoft.com/office/drawing/2014/main" id="{E0C6491F-D016-EF8A-CBF5-B3005EBD6045}"/>
+                <a16:creationId xmlns:a16="http://schemas.microsoft.com/office/drawing/2014/main" id="{C50D935E-3308-FD67-B254-7CE5DC13B07B}"/>
               </a:ext>
             </a:extLst>
           </p:cNvPr>
@@ -10836,7 +10836,7 @@
           <p:cNvPr id="13" name="source">
             <a:extLst>
               <a:ext uri="{FF2B5EF4-FFF2-40B4-BE49-F238E27FC236}">
-                <a16:creationId xmlns:a16="http://schemas.microsoft.com/office/drawing/2014/main" id="{FC38A06D-5751-109E-7098-AF6B163F07E6}"/>
+                <a16:creationId xmlns:a16="http://schemas.microsoft.com/office/drawing/2014/main" id="{447EF609-44A1-18EF-7379-03B4077239FD}"/>
               </a:ext>
             </a:extLst>
           </p:cNvPr>
@@ -10891,7 +10891,7 @@
     </p:spTree>
     <p:extLst>
       <p:ext uri="{BB962C8B-B14F-4D97-AF65-F5344CB8AC3E}">
-        <p14:creationId xmlns:p14="http://schemas.microsoft.com/office/powerpoint/2010/main" val="3245912883"/>
+        <p14:creationId xmlns:p14="http://schemas.microsoft.com/office/powerpoint/2010/main" val="743084685"/>
       </p:ext>
     </p:extLst>
   </p:cSld>
@@ -10923,7 +10923,7 @@
           <p:cNvPr id="7" name="creative_background">
             <a:extLst>
               <a:ext uri="{FF2B5EF4-FFF2-40B4-BE49-F238E27FC236}">
-                <a16:creationId xmlns:a16="http://schemas.microsoft.com/office/drawing/2014/main" id="{A5ED6BA1-A180-4765-E9FE-361032BAA0E1}"/>
+                <a16:creationId xmlns:a16="http://schemas.microsoft.com/office/drawing/2014/main" id="{53082883-DF2B-EDA1-11FF-D19289B95A74}"/>
               </a:ext>
             </a:extLst>
           </p:cNvPr>
@@ -10996,9 +10996,9 @@
           <a:bodyPr/>
           <a:lstStyle/>
           <a:p>
-            <a:fld id="{402E347B-D365-49E2-9289-3F52BA4D6BD6}" type="datetimeFigureOut">
+            <a:fld id="{953E3269-9E78-4D7E-9A3E-1CB27CD92A12}" type="datetimeFigureOut">
               <a:rPr lang="en-US" smtClean="0"/>
-              <a:t>10/3/2026</a:t>
+              <a:t>10/4/2026</a:t>
             </a:fld>
             <a:endParaRPr lang="en-US"/>
           </a:p>
@@ -11038,7 +11038,7 @@
           <a:bodyPr/>
           <a:lstStyle/>
           <a:p>
-            <a:fld id="{59E99942-F5A0-42B8-85FC-8F53E2428FF4}" type="slidenum">
+            <a:fld id="{F16D5B57-F7EE-4146-9EF5-FE1410ECAA61}" type="slidenum">
               <a:rPr lang="en-US" smtClean="0"/>
               <a:t>‹#›</a:t>
             </a:fld>
@@ -11051,7 +11051,7 @@
           <p:cNvPr id="8" name="body">
             <a:extLst>
               <a:ext uri="{FF2B5EF4-FFF2-40B4-BE49-F238E27FC236}">
-                <a16:creationId xmlns:a16="http://schemas.microsoft.com/office/drawing/2014/main" id="{8731307A-C7F5-0CCA-F93B-E8D4CC8C18C0}"/>
+                <a16:creationId xmlns:a16="http://schemas.microsoft.com/office/drawing/2014/main" id="{E4EF5848-904D-B3C5-934D-3C1936EC6CA5}"/>
               </a:ext>
             </a:extLst>
           </p:cNvPr>
@@ -11091,7 +11091,7 @@
           <p:cNvPr id="9" name="kpi_value_1">
             <a:extLst>
               <a:ext uri="{FF2B5EF4-FFF2-40B4-BE49-F238E27FC236}">
-                <a16:creationId xmlns:a16="http://schemas.microsoft.com/office/drawing/2014/main" id="{B05A83E5-E995-BFEF-962B-CB3F3A64F817}"/>
+                <a16:creationId xmlns:a16="http://schemas.microsoft.com/office/drawing/2014/main" id="{E1FCD1AB-C16B-4396-E671-F7A49A30978C}"/>
               </a:ext>
             </a:extLst>
           </p:cNvPr>
@@ -11144,7 +11144,7 @@
           <p:cNvPr id="10" name="kpi_label_1">
             <a:extLst>
               <a:ext uri="{FF2B5EF4-FFF2-40B4-BE49-F238E27FC236}">
-                <a16:creationId xmlns:a16="http://schemas.microsoft.com/office/drawing/2014/main" id="{62CE50B2-7790-2766-E79D-A773B1112DAC}"/>
+                <a16:creationId xmlns:a16="http://schemas.microsoft.com/office/drawing/2014/main" id="{1CF8C95B-385B-F897-80CB-6553DAB5C0FB}"/>
               </a:ext>
             </a:extLst>
           </p:cNvPr>
@@ -11192,7 +11192,7 @@
           <p:cNvPr id="11" name="kpi_value_2">
             <a:extLst>
               <a:ext uri="{FF2B5EF4-FFF2-40B4-BE49-F238E27FC236}">
-                <a16:creationId xmlns:a16="http://schemas.microsoft.com/office/drawing/2014/main" id="{AEAE4678-9923-F330-95A9-19451DAE54C4}"/>
+                <a16:creationId xmlns:a16="http://schemas.microsoft.com/office/drawing/2014/main" id="{69D4C140-B60E-AC47-1D63-AFA6F0BB80EA}"/>
               </a:ext>
             </a:extLst>
           </p:cNvPr>
@@ -11245,7 +11245,7 @@
           <p:cNvPr id="12" name="kpi_label_2">
             <a:extLst>
               <a:ext uri="{FF2B5EF4-FFF2-40B4-BE49-F238E27FC236}">
-                <a16:creationId xmlns:a16="http://schemas.microsoft.com/office/drawing/2014/main" id="{39F62CB9-79A0-FA14-A204-6A192504A611}"/>
+                <a16:creationId xmlns:a16="http://schemas.microsoft.com/office/drawing/2014/main" id="{A60D57FD-0C88-07D2-F2D1-E5A11BBC3962}"/>
               </a:ext>
             </a:extLst>
           </p:cNvPr>
@@ -11293,7 +11293,7 @@
           <p:cNvPr id="13" name="kpi_value_3">
             <a:extLst>
               <a:ext uri="{FF2B5EF4-FFF2-40B4-BE49-F238E27FC236}">
-                <a16:creationId xmlns:a16="http://schemas.microsoft.com/office/drawing/2014/main" id="{2CEAC4F6-74A6-B203-0986-173F4A4F8ACE}"/>
+                <a16:creationId xmlns:a16="http://schemas.microsoft.com/office/drawing/2014/main" id="{10BC29F8-0B12-244B-FF67-4F44276A44A2}"/>
               </a:ext>
             </a:extLst>
           </p:cNvPr>
@@ -11346,7 +11346,7 @@
           <p:cNvPr id="14" name="kpi_label_3">
             <a:extLst>
               <a:ext uri="{FF2B5EF4-FFF2-40B4-BE49-F238E27FC236}">
-                <a16:creationId xmlns:a16="http://schemas.microsoft.com/office/drawing/2014/main" id="{5F640C15-E36D-D5E3-A8F3-000E51A1BF67}"/>
+                <a16:creationId xmlns:a16="http://schemas.microsoft.com/office/drawing/2014/main" id="{920AD996-F2A4-CAF0-7893-B5431C96624F}"/>
               </a:ext>
             </a:extLst>
           </p:cNvPr>
@@ -11394,7 +11394,7 @@
           <p:cNvPr id="15" name="kpi_value_4">
             <a:extLst>
               <a:ext uri="{FF2B5EF4-FFF2-40B4-BE49-F238E27FC236}">
-                <a16:creationId xmlns:a16="http://schemas.microsoft.com/office/drawing/2014/main" id="{3DA8611E-6145-9857-50C6-5A2AB4F6EA42}"/>
+                <a16:creationId xmlns:a16="http://schemas.microsoft.com/office/drawing/2014/main" id="{BB9BB6FC-8396-51A4-1B93-A31F3D389104}"/>
               </a:ext>
             </a:extLst>
           </p:cNvPr>
@@ -11447,7 +11447,7 @@
           <p:cNvPr id="16" name="kpi_label_4">
             <a:extLst>
               <a:ext uri="{FF2B5EF4-FFF2-40B4-BE49-F238E27FC236}">
-                <a16:creationId xmlns:a16="http://schemas.microsoft.com/office/drawing/2014/main" id="{6DFA344E-180C-A9E2-975B-47ED2E29507D}"/>
+                <a16:creationId xmlns:a16="http://schemas.microsoft.com/office/drawing/2014/main" id="{88E79CD3-733B-F5D9-977B-56890DB91A50}"/>
               </a:ext>
             </a:extLst>
           </p:cNvPr>
@@ -11495,7 +11495,7 @@
           <p:cNvPr id="17" name="source">
             <a:extLst>
               <a:ext uri="{FF2B5EF4-FFF2-40B4-BE49-F238E27FC236}">
-                <a16:creationId xmlns:a16="http://schemas.microsoft.com/office/drawing/2014/main" id="{33C7E744-4563-F5A3-AC81-A72838E8F4BB}"/>
+                <a16:creationId xmlns:a16="http://schemas.microsoft.com/office/drawing/2014/main" id="{ADC8DD8F-369C-8C68-3CE7-446CD2527375}"/>
               </a:ext>
             </a:extLst>
           </p:cNvPr>
@@ -11550,7 +11550,7 @@
     </p:spTree>
     <p:extLst>
       <p:ext uri="{BB962C8B-B14F-4D97-AF65-F5344CB8AC3E}">
-        <p14:creationId xmlns:p14="http://schemas.microsoft.com/office/powerpoint/2010/main" val="2434029189"/>
+        <p14:creationId xmlns:p14="http://schemas.microsoft.com/office/powerpoint/2010/main" val="3443330740"/>
       </p:ext>
     </p:extLst>
   </p:cSld>
@@ -11582,7 +11582,7 @@
           <p:cNvPr id="7" name="creative_background">
             <a:extLst>
               <a:ext uri="{FF2B5EF4-FFF2-40B4-BE49-F238E27FC236}">
-                <a16:creationId xmlns:a16="http://schemas.microsoft.com/office/drawing/2014/main" id="{BBFB58F3-F2F3-1988-5142-EBC75941FB01}"/>
+                <a16:creationId xmlns:a16="http://schemas.microsoft.com/office/drawing/2014/main" id="{254CC07E-A708-5D7A-2565-2257292DA40B}"/>
               </a:ext>
             </a:extLst>
           </p:cNvPr>
@@ -11655,9 +11655,9 @@
           <a:bodyPr/>
           <a:lstStyle/>
           <a:p>
-            <a:fld id="{402E347B-D365-49E2-9289-3F52BA4D6BD6}" type="datetimeFigureOut">
+            <a:fld id="{953E3269-9E78-4D7E-9A3E-1CB27CD92A12}" type="datetimeFigureOut">
               <a:rPr lang="en-US" smtClean="0"/>
-              <a:t>10/3/2026</a:t>
+              <a:t>10/4/2026</a:t>
             </a:fld>
             <a:endParaRPr lang="en-US"/>
           </a:p>
@@ -11697,7 +11697,7 @@
           <a:bodyPr/>
           <a:lstStyle/>
           <a:p>
-            <a:fld id="{59E99942-F5A0-42B8-85FC-8F53E2428FF4}" type="slidenum">
+            <a:fld id="{F16D5B57-F7EE-4146-9EF5-FE1410ECAA61}" type="slidenum">
               <a:rPr lang="en-US" smtClean="0"/>
               <a:t>‹#›</a:t>
             </a:fld>
@@ -11710,7 +11710,7 @@
           <p:cNvPr id="8" name="body">
             <a:extLst>
               <a:ext uri="{FF2B5EF4-FFF2-40B4-BE49-F238E27FC236}">
-                <a16:creationId xmlns:a16="http://schemas.microsoft.com/office/drawing/2014/main" id="{F5AB7833-8986-F4D5-868D-7C410EB22D23}"/>
+                <a16:creationId xmlns:a16="http://schemas.microsoft.com/office/drawing/2014/main" id="{F194E0E3-14CA-1B77-6F6D-CC89F07692D4}"/>
               </a:ext>
             </a:extLst>
           </p:cNvPr>
@@ -11750,7 +11750,7 @@
           <p:cNvPr id="9" name="quote">
             <a:extLst>
               <a:ext uri="{FF2B5EF4-FFF2-40B4-BE49-F238E27FC236}">
-                <a16:creationId xmlns:a16="http://schemas.microsoft.com/office/drawing/2014/main" id="{4912BB37-FBA4-B344-B694-47E34FCA9240}"/>
+                <a16:creationId xmlns:a16="http://schemas.microsoft.com/office/drawing/2014/main" id="{9E747347-EBD8-1CB5-7D1C-52D93A742ED9}"/>
               </a:ext>
             </a:extLst>
           </p:cNvPr>
@@ -11800,7 +11800,7 @@
           <p:cNvPr id="10" name="attribution">
             <a:extLst>
               <a:ext uri="{FF2B5EF4-FFF2-40B4-BE49-F238E27FC236}">
-                <a16:creationId xmlns:a16="http://schemas.microsoft.com/office/drawing/2014/main" id="{794D043C-C738-8FA6-DD34-D818C8E0EA28}"/>
+                <a16:creationId xmlns:a16="http://schemas.microsoft.com/office/drawing/2014/main" id="{F75141F4-69D7-3A40-256D-8F5C2F11546A}"/>
               </a:ext>
             </a:extLst>
           </p:cNvPr>
@@ -11848,7 +11848,7 @@
           <p:cNvPr id="11" name="source">
             <a:extLst>
               <a:ext uri="{FF2B5EF4-FFF2-40B4-BE49-F238E27FC236}">
-                <a16:creationId xmlns:a16="http://schemas.microsoft.com/office/drawing/2014/main" id="{73083A12-434C-2768-9E4A-BA86B260356D}"/>
+                <a16:creationId xmlns:a16="http://schemas.microsoft.com/office/drawing/2014/main" id="{98142E0D-1F55-9237-7A5D-2497FB1DDB05}"/>
               </a:ext>
             </a:extLst>
           </p:cNvPr>
@@ -11903,7 +11903,7 @@
     </p:spTree>
     <p:extLst>
       <p:ext uri="{BB962C8B-B14F-4D97-AF65-F5344CB8AC3E}">
-        <p14:creationId xmlns:p14="http://schemas.microsoft.com/office/powerpoint/2010/main" val="2271155522"/>
+        <p14:creationId xmlns:p14="http://schemas.microsoft.com/office/powerpoint/2010/main" val="1400607680"/>
       </p:ext>
     </p:extLst>
   </p:cSld>
@@ -11935,7 +11935,7 @@
           <p:cNvPr id="7" name="creative_background">
             <a:extLst>
               <a:ext uri="{FF2B5EF4-FFF2-40B4-BE49-F238E27FC236}">
-                <a16:creationId xmlns:a16="http://schemas.microsoft.com/office/drawing/2014/main" id="{7A1700DF-7289-AB04-D2CB-37B58B446360}"/>
+                <a16:creationId xmlns:a16="http://schemas.microsoft.com/office/drawing/2014/main" id="{397F54D6-463D-51F2-DB5E-04CAF86B8C6A}"/>
               </a:ext>
             </a:extLst>
           </p:cNvPr>
@@ -12008,9 +12008,9 @@
           <a:bodyPr/>
           <a:lstStyle/>
           <a:p>
-            <a:fld id="{402E347B-D365-49E2-9289-3F52BA4D6BD6}" type="datetimeFigureOut">
+            <a:fld id="{953E3269-9E78-4D7E-9A3E-1CB27CD92A12}" type="datetimeFigureOut">
               <a:rPr lang="en-US" smtClean="0"/>
-              <a:t>10/3/2026</a:t>
+              <a:t>10/4/2026</a:t>
             </a:fld>
             <a:endParaRPr lang="en-US"/>
           </a:p>
@@ -12050,7 +12050,7 @@
           <a:bodyPr/>
           <a:lstStyle/>
           <a:p>
-            <a:fld id="{59E99942-F5A0-42B8-85FC-8F53E2428FF4}" type="slidenum">
+            <a:fld id="{F16D5B57-F7EE-4146-9EF5-FE1410ECAA61}" type="slidenum">
               <a:rPr lang="en-US" smtClean="0"/>
               <a:t>‹#›</a:t>
             </a:fld>
@@ -12063,7 +12063,7 @@
           <p:cNvPr id="8" name="item_1_title">
             <a:extLst>
               <a:ext uri="{FF2B5EF4-FFF2-40B4-BE49-F238E27FC236}">
-                <a16:creationId xmlns:a16="http://schemas.microsoft.com/office/drawing/2014/main" id="{AD0D302E-7E82-1036-3B52-20A4E604AF14}"/>
+                <a16:creationId xmlns:a16="http://schemas.microsoft.com/office/drawing/2014/main" id="{77EC1ED0-1D55-5E2A-2834-121492D39104}"/>
               </a:ext>
             </a:extLst>
           </p:cNvPr>
@@ -12113,7 +12113,7 @@
           <p:cNvPr id="9" name="item_1">
             <a:extLst>
               <a:ext uri="{FF2B5EF4-FFF2-40B4-BE49-F238E27FC236}">
-                <a16:creationId xmlns:a16="http://schemas.microsoft.com/office/drawing/2014/main" id="{BCBDC0AF-9C43-9050-642A-BC93E2E2D779}"/>
+                <a16:creationId xmlns:a16="http://schemas.microsoft.com/office/drawing/2014/main" id="{E02AA3FD-E876-8E1E-F434-39A657C5DD13}"/>
               </a:ext>
             </a:extLst>
           </p:cNvPr>
@@ -12161,7 +12161,7 @@
           <p:cNvPr id="10" name="item_2_title">
             <a:extLst>
               <a:ext uri="{FF2B5EF4-FFF2-40B4-BE49-F238E27FC236}">
-                <a16:creationId xmlns:a16="http://schemas.microsoft.com/office/drawing/2014/main" id="{24CEB0CA-8939-C4ED-FA79-44F42D8859A1}"/>
+                <a16:creationId xmlns:a16="http://schemas.microsoft.com/office/drawing/2014/main" id="{0DB4FC35-E944-5B39-CCBA-24DAEA61D7D5}"/>
               </a:ext>
             </a:extLst>
           </p:cNvPr>
@@ -12214,7 +12214,7 @@
           <p:cNvPr id="11" name="item_2">
             <a:extLst>
               <a:ext uri="{FF2B5EF4-FFF2-40B4-BE49-F238E27FC236}">
-                <a16:creationId xmlns:a16="http://schemas.microsoft.com/office/drawing/2014/main" id="{C2645D9B-427D-C35E-F0CE-6409679219A2}"/>
+                <a16:creationId xmlns:a16="http://schemas.microsoft.com/office/drawing/2014/main" id="{8596F98D-BCA6-EDBF-303B-76EBDB1B9037}"/>
               </a:ext>
             </a:extLst>
           </p:cNvPr>
@@ -12262,7 +12262,7 @@
           <p:cNvPr id="12" name="item_3_title">
             <a:extLst>
               <a:ext uri="{FF2B5EF4-FFF2-40B4-BE49-F238E27FC236}">
-                <a16:creationId xmlns:a16="http://schemas.microsoft.com/office/drawing/2014/main" id="{235B01AC-AF04-4B20-AA23-51989794BC4D}"/>
+                <a16:creationId xmlns:a16="http://schemas.microsoft.com/office/drawing/2014/main" id="{E428B427-D65B-E7C9-88E5-41490633D911}"/>
               </a:ext>
             </a:extLst>
           </p:cNvPr>
@@ -12315,7 +12315,7 @@
           <p:cNvPr id="13" name="item_3">
             <a:extLst>
               <a:ext uri="{FF2B5EF4-FFF2-40B4-BE49-F238E27FC236}">
-                <a16:creationId xmlns:a16="http://schemas.microsoft.com/office/drawing/2014/main" id="{3A095187-2BBB-C525-B64C-25CFD18029C1}"/>
+                <a16:creationId xmlns:a16="http://schemas.microsoft.com/office/drawing/2014/main" id="{0EEE3AE2-5947-DF34-4232-5535D5DF8D40}"/>
               </a:ext>
             </a:extLst>
           </p:cNvPr>
@@ -12363,7 +12363,7 @@
           <p:cNvPr id="14" name="source">
             <a:extLst>
               <a:ext uri="{FF2B5EF4-FFF2-40B4-BE49-F238E27FC236}">
-                <a16:creationId xmlns:a16="http://schemas.microsoft.com/office/drawing/2014/main" id="{A719F5D7-983B-6423-3DF6-1EF21F038B06}"/>
+                <a16:creationId xmlns:a16="http://schemas.microsoft.com/office/drawing/2014/main" id="{2DCA5767-8187-4ACE-7BD6-A4CA8B7E21EA}"/>
               </a:ext>
             </a:extLst>
           </p:cNvPr>
@@ -12418,7 +12418,7 @@
     </p:spTree>
     <p:extLst>
       <p:ext uri="{BB962C8B-B14F-4D97-AF65-F5344CB8AC3E}">
-        <p14:creationId xmlns:p14="http://schemas.microsoft.com/office/powerpoint/2010/main" val="209770619"/>
+        <p14:creationId xmlns:p14="http://schemas.microsoft.com/office/powerpoint/2010/main" val="4174469755"/>
       </p:ext>
     </p:extLst>
   </p:cSld>
@@ -12450,7 +12450,7 @@
           <p:cNvPr id="7" name="creative_background">
             <a:extLst>
               <a:ext uri="{FF2B5EF4-FFF2-40B4-BE49-F238E27FC236}">
-                <a16:creationId xmlns:a16="http://schemas.microsoft.com/office/drawing/2014/main" id="{8E962BA8-7091-6A56-B1B2-2768F88514F7}"/>
+                <a16:creationId xmlns:a16="http://schemas.microsoft.com/office/drawing/2014/main" id="{D2026A89-CA86-6ED2-9E28-25883B5453F6}"/>
               </a:ext>
             </a:extLst>
           </p:cNvPr>
@@ -12523,9 +12523,9 @@
           <a:bodyPr/>
           <a:lstStyle/>
           <a:p>
-            <a:fld id="{402E347B-D365-49E2-9289-3F52BA4D6BD6}" type="datetimeFigureOut">
+            <a:fld id="{953E3269-9E78-4D7E-9A3E-1CB27CD92A12}" type="datetimeFigureOut">
               <a:rPr lang="en-US" smtClean="0"/>
-              <a:t>10/3/2026</a:t>
+              <a:t>10/4/2026</a:t>
             </a:fld>
             <a:endParaRPr lang="en-US"/>
           </a:p>
@@ -12565,7 +12565,7 @@
           <a:bodyPr/>
           <a:lstStyle/>
           <a:p>
-            <a:fld id="{59E99942-F5A0-42B8-85FC-8F53E2428FF4}" type="slidenum">
+            <a:fld id="{F16D5B57-F7EE-4146-9EF5-FE1410ECAA61}" type="slidenum">
               <a:rPr lang="en-US" smtClean="0"/>
               <a:t>‹#›</a:t>
             </a:fld>
@@ -12578,7 +12578,7 @@
           <p:cNvPr id="8" name="item_1_title">
             <a:extLst>
               <a:ext uri="{FF2B5EF4-FFF2-40B4-BE49-F238E27FC236}">
-                <a16:creationId xmlns:a16="http://schemas.microsoft.com/office/drawing/2014/main" id="{A06A7F71-8733-A7D6-6494-3532F102DF02}"/>
+                <a16:creationId xmlns:a16="http://schemas.microsoft.com/office/drawing/2014/main" id="{FE3547A0-1F70-B59D-9E8D-98E58CB9853A}"/>
               </a:ext>
             </a:extLst>
           </p:cNvPr>
@@ -12628,7 +12628,7 @@
           <p:cNvPr id="9" name="item_1">
             <a:extLst>
               <a:ext uri="{FF2B5EF4-FFF2-40B4-BE49-F238E27FC236}">
-                <a16:creationId xmlns:a16="http://schemas.microsoft.com/office/drawing/2014/main" id="{B86EB580-CE24-76C3-1E66-D412F358B7F5}"/>
+                <a16:creationId xmlns:a16="http://schemas.microsoft.com/office/drawing/2014/main" id="{A050D8FB-93FE-20F1-9358-8F3D8ACBC347}"/>
               </a:ext>
             </a:extLst>
           </p:cNvPr>
@@ -12676,7 +12676,7 @@
           <p:cNvPr id="10" name="item_2_title">
             <a:extLst>
               <a:ext uri="{FF2B5EF4-FFF2-40B4-BE49-F238E27FC236}">
-                <a16:creationId xmlns:a16="http://schemas.microsoft.com/office/drawing/2014/main" id="{36B4C3A7-2D98-7B6E-43B2-AE62B9CD4471}"/>
+                <a16:creationId xmlns:a16="http://schemas.microsoft.com/office/drawing/2014/main" id="{EA20E903-68BA-1804-340D-0A6C401A75B5}"/>
               </a:ext>
             </a:extLst>
           </p:cNvPr>
@@ -12729,7 +12729,7 @@
           <p:cNvPr id="11" name="item_2">
             <a:extLst>
               <a:ext uri="{FF2B5EF4-FFF2-40B4-BE49-F238E27FC236}">
-                <a16:creationId xmlns:a16="http://schemas.microsoft.com/office/drawing/2014/main" id="{B376895C-FD9E-45E3-ACA3-F315983738F2}"/>
+                <a16:creationId xmlns:a16="http://schemas.microsoft.com/office/drawing/2014/main" id="{E06B86EA-A7DD-4DF7-AD23-7C78298C0D46}"/>
               </a:ext>
             </a:extLst>
           </p:cNvPr>
@@ -12777,7 +12777,7 @@
           <p:cNvPr id="12" name="source">
             <a:extLst>
               <a:ext uri="{FF2B5EF4-FFF2-40B4-BE49-F238E27FC236}">
-                <a16:creationId xmlns:a16="http://schemas.microsoft.com/office/drawing/2014/main" id="{8980C3CF-2863-B1C8-F944-D07E52EC2D8B}"/>
+                <a16:creationId xmlns:a16="http://schemas.microsoft.com/office/drawing/2014/main" id="{37E4ABC1-59BE-C677-E69F-CA93810A58BC}"/>
               </a:ext>
             </a:extLst>
           </p:cNvPr>
@@ -12832,7 +12832,7 @@
     </p:spTree>
     <p:extLst>
       <p:ext uri="{BB962C8B-B14F-4D97-AF65-F5344CB8AC3E}">
-        <p14:creationId xmlns:p14="http://schemas.microsoft.com/office/powerpoint/2010/main" val="441773221"/>
+        <p14:creationId xmlns:p14="http://schemas.microsoft.com/office/powerpoint/2010/main" val="936810235"/>
       </p:ext>
     </p:extLst>
   </p:cSld>
@@ -12864,7 +12864,7 @@
           <p:cNvPr id="7" name="creative_background">
             <a:extLst>
               <a:ext uri="{FF2B5EF4-FFF2-40B4-BE49-F238E27FC236}">
-                <a16:creationId xmlns:a16="http://schemas.microsoft.com/office/drawing/2014/main" id="{4523EE5B-140E-5157-16F0-8AD46B309FE4}"/>
+                <a16:creationId xmlns:a16="http://schemas.microsoft.com/office/drawing/2014/main" id="{AE10DF9B-993D-CE54-A6ED-929707DC81BD}"/>
               </a:ext>
             </a:extLst>
           </p:cNvPr>
@@ -12937,9 +12937,9 @@
           <a:bodyPr/>
           <a:lstStyle/>
           <a:p>
-            <a:fld id="{402E347B-D365-49E2-9289-3F52BA4D6BD6}" type="datetimeFigureOut">
+            <a:fld id="{953E3269-9E78-4D7E-9A3E-1CB27CD92A12}" type="datetimeFigureOut">
               <a:rPr lang="en-US" smtClean="0"/>
-              <a:t>10/3/2026</a:t>
+              <a:t>10/4/2026</a:t>
             </a:fld>
             <a:endParaRPr lang="en-US"/>
           </a:p>
@@ -12979,7 +12979,7 @@
           <a:bodyPr/>
           <a:lstStyle/>
           <a:p>
-            <a:fld id="{59E99942-F5A0-42B8-85FC-8F53E2428FF4}" type="slidenum">
+            <a:fld id="{F16D5B57-F7EE-4146-9EF5-FE1410ECAA61}" type="slidenum">
               <a:rPr lang="en-US" smtClean="0"/>
               <a:t>‹#›</a:t>
             </a:fld>
@@ -12992,7 +12992,7 @@
           <p:cNvPr id="8" name="chart">
             <a:extLst>
               <a:ext uri="{FF2B5EF4-FFF2-40B4-BE49-F238E27FC236}">
-                <a16:creationId xmlns:a16="http://schemas.microsoft.com/office/drawing/2014/main" id="{F7072417-1B38-DB77-8F81-485D81E8A716}"/>
+                <a16:creationId xmlns:a16="http://schemas.microsoft.com/office/drawing/2014/main" id="{5E2B87BB-7FFF-86B6-1C3F-D2875BE8F336}"/>
               </a:ext>
             </a:extLst>
           </p:cNvPr>
@@ -13022,7 +13022,7 @@
           <p:cNvPr id="9" name="body">
             <a:extLst>
               <a:ext uri="{FF2B5EF4-FFF2-40B4-BE49-F238E27FC236}">
-                <a16:creationId xmlns:a16="http://schemas.microsoft.com/office/drawing/2014/main" id="{82E6E680-5180-187E-AB99-4FF275A06739}"/>
+                <a16:creationId xmlns:a16="http://schemas.microsoft.com/office/drawing/2014/main" id="{AC35DED9-2AE3-A61D-29D1-C975FAEA4AF4}"/>
               </a:ext>
             </a:extLst>
           </p:cNvPr>
@@ -13065,7 +13065,7 @@
           <p:cNvPr id="10" name="source">
             <a:extLst>
               <a:ext uri="{FF2B5EF4-FFF2-40B4-BE49-F238E27FC236}">
-                <a16:creationId xmlns:a16="http://schemas.microsoft.com/office/drawing/2014/main" id="{242E5E48-CC47-8027-2278-7D97E564FE14}"/>
+                <a16:creationId xmlns:a16="http://schemas.microsoft.com/office/drawing/2014/main" id="{68552461-D60D-D6D5-4B35-DE85C4E359BD}"/>
               </a:ext>
             </a:extLst>
           </p:cNvPr>
@@ -13120,7 +13120,7 @@
     </p:spTree>
     <p:extLst>
       <p:ext uri="{BB962C8B-B14F-4D97-AF65-F5344CB8AC3E}">
-        <p14:creationId xmlns:p14="http://schemas.microsoft.com/office/powerpoint/2010/main" val="3874195866"/>
+        <p14:creationId xmlns:p14="http://schemas.microsoft.com/office/powerpoint/2010/main" val="1030460554"/>
       </p:ext>
     </p:extLst>
   </p:cSld>
@@ -13152,7 +13152,7 @@
           <p:cNvPr id="7" name="creative_background">
             <a:extLst>
               <a:ext uri="{FF2B5EF4-FFF2-40B4-BE49-F238E27FC236}">
-                <a16:creationId xmlns:a16="http://schemas.microsoft.com/office/drawing/2014/main" id="{F58AA419-750E-1D47-97CC-4DD50504F979}"/>
+                <a16:creationId xmlns:a16="http://schemas.microsoft.com/office/drawing/2014/main" id="{A67A7A16-CE9F-3410-76C4-74A966359123}"/>
               </a:ext>
             </a:extLst>
           </p:cNvPr>
@@ -13225,9 +13225,9 @@
           <a:bodyPr/>
           <a:lstStyle/>
           <a:p>
-            <a:fld id="{402E347B-D365-49E2-9289-3F52BA4D6BD6}" type="datetimeFigureOut">
+            <a:fld id="{953E3269-9E78-4D7E-9A3E-1CB27CD92A12}" type="datetimeFigureOut">
               <a:rPr lang="en-US" smtClean="0"/>
-              <a:t>10/3/2026</a:t>
+              <a:t>10/4/2026</a:t>
             </a:fld>
             <a:endParaRPr lang="en-US"/>
           </a:p>
@@ -13267,7 +13267,7 @@
           <a:bodyPr/>
           <a:lstStyle/>
           <a:p>
-            <a:fld id="{59E99942-F5A0-42B8-85FC-8F53E2428FF4}" type="slidenum">
+            <a:fld id="{F16D5B57-F7EE-4146-9EF5-FE1410ECAA61}" type="slidenum">
               <a:rPr lang="en-US" smtClean="0"/>
               <a:t>‹#›</a:t>
             </a:fld>
@@ -13280,7 +13280,7 @@
           <p:cNvPr id="8" name="item_1_title">
             <a:extLst>
               <a:ext uri="{FF2B5EF4-FFF2-40B4-BE49-F238E27FC236}">
-                <a16:creationId xmlns:a16="http://schemas.microsoft.com/office/drawing/2014/main" id="{521D129F-9A55-9D45-2E1A-C621393388C5}"/>
+                <a16:creationId xmlns:a16="http://schemas.microsoft.com/office/drawing/2014/main" id="{FD54F229-30FF-AC18-0E20-73A09630DE1A}"/>
               </a:ext>
             </a:extLst>
           </p:cNvPr>
@@ -13330,7 +13330,7 @@
           <p:cNvPr id="9" name="item_1">
             <a:extLst>
               <a:ext uri="{FF2B5EF4-FFF2-40B4-BE49-F238E27FC236}">
-                <a16:creationId xmlns:a16="http://schemas.microsoft.com/office/drawing/2014/main" id="{883335AD-D2FA-AECB-04EA-4AD831A10AD0}"/>
+                <a16:creationId xmlns:a16="http://schemas.microsoft.com/office/drawing/2014/main" id="{B08EAB26-1042-A087-3ED2-F905AA7E19CF}"/>
               </a:ext>
             </a:extLst>
           </p:cNvPr>
@@ -13378,7 +13378,7 @@
           <p:cNvPr id="10" name="item_2_title">
             <a:extLst>
               <a:ext uri="{FF2B5EF4-FFF2-40B4-BE49-F238E27FC236}">
-                <a16:creationId xmlns:a16="http://schemas.microsoft.com/office/drawing/2014/main" id="{8C35B501-E457-737F-BBBB-FFE7DAD36125}"/>
+                <a16:creationId xmlns:a16="http://schemas.microsoft.com/office/drawing/2014/main" id="{B4690138-44EC-B27B-0CDA-2DDD816E877A}"/>
               </a:ext>
             </a:extLst>
           </p:cNvPr>
@@ -13431,7 +13431,7 @@
           <p:cNvPr id="11" name="item_2">
             <a:extLst>
               <a:ext uri="{FF2B5EF4-FFF2-40B4-BE49-F238E27FC236}">
-                <a16:creationId xmlns:a16="http://schemas.microsoft.com/office/drawing/2014/main" id="{B31EE71B-07D9-D572-5BD1-9CEA81677A25}"/>
+                <a16:creationId xmlns:a16="http://schemas.microsoft.com/office/drawing/2014/main" id="{851810DA-1C1B-28A4-A5A0-35D03F55DC7C}"/>
               </a:ext>
             </a:extLst>
           </p:cNvPr>
@@ -13479,7 +13479,7 @@
           <p:cNvPr id="12" name="item_3_title">
             <a:extLst>
               <a:ext uri="{FF2B5EF4-FFF2-40B4-BE49-F238E27FC236}">
-                <a16:creationId xmlns:a16="http://schemas.microsoft.com/office/drawing/2014/main" id="{ECAD9105-6E4F-570A-9954-778EAE8C3D88}"/>
+                <a16:creationId xmlns:a16="http://schemas.microsoft.com/office/drawing/2014/main" id="{BA5283AC-DF0F-65A0-1949-9FFC9336D3DD}"/>
               </a:ext>
             </a:extLst>
           </p:cNvPr>
@@ -13532,7 +13532,7 @@
           <p:cNvPr id="13" name="item_3">
             <a:extLst>
               <a:ext uri="{FF2B5EF4-FFF2-40B4-BE49-F238E27FC236}">
-                <a16:creationId xmlns:a16="http://schemas.microsoft.com/office/drawing/2014/main" id="{AD4615D5-E033-D292-3047-BAB4EDAFEBAE}"/>
+                <a16:creationId xmlns:a16="http://schemas.microsoft.com/office/drawing/2014/main" id="{7B5E4893-6ED1-8687-FFFB-F7B7FA796044}"/>
               </a:ext>
             </a:extLst>
           </p:cNvPr>
@@ -13580,7 +13580,7 @@
           <p:cNvPr id="14" name="item_4_title">
             <a:extLst>
               <a:ext uri="{FF2B5EF4-FFF2-40B4-BE49-F238E27FC236}">
-                <a16:creationId xmlns:a16="http://schemas.microsoft.com/office/drawing/2014/main" id="{76970E31-E74F-3C5A-EBE1-99FD944903E7}"/>
+                <a16:creationId xmlns:a16="http://schemas.microsoft.com/office/drawing/2014/main" id="{DB3D2825-7569-8D08-D0E1-160AB1C22076}"/>
               </a:ext>
             </a:extLst>
           </p:cNvPr>
@@ -13633,7 +13633,7 @@
           <p:cNvPr id="15" name="item_4">
             <a:extLst>
               <a:ext uri="{FF2B5EF4-FFF2-40B4-BE49-F238E27FC236}">
-                <a16:creationId xmlns:a16="http://schemas.microsoft.com/office/drawing/2014/main" id="{18397133-0D24-DC8C-3C76-9FF4EF9923C0}"/>
+                <a16:creationId xmlns:a16="http://schemas.microsoft.com/office/drawing/2014/main" id="{9C996F28-99A4-3F5F-86F1-3B5BEA433AB1}"/>
               </a:ext>
             </a:extLst>
           </p:cNvPr>
@@ -13681,7 +13681,7 @@
           <p:cNvPr id="16" name="source">
             <a:extLst>
               <a:ext uri="{FF2B5EF4-FFF2-40B4-BE49-F238E27FC236}">
-                <a16:creationId xmlns:a16="http://schemas.microsoft.com/office/drawing/2014/main" id="{9D416969-6041-994D-4215-0382F72CAE41}"/>
+                <a16:creationId xmlns:a16="http://schemas.microsoft.com/office/drawing/2014/main" id="{4C0EA987-F869-3364-E03D-DC2496016F44}"/>
               </a:ext>
             </a:extLst>
           </p:cNvPr>
@@ -13736,7 +13736,7 @@
     </p:spTree>
     <p:extLst>
       <p:ext uri="{BB962C8B-B14F-4D97-AF65-F5344CB8AC3E}">
-        <p14:creationId xmlns:p14="http://schemas.microsoft.com/office/powerpoint/2010/main" val="438558441"/>
+        <p14:creationId xmlns:p14="http://schemas.microsoft.com/office/powerpoint/2010/main" val="3983343489"/>
       </p:ext>
     </p:extLst>
   </p:cSld>
@@ -13773,7 +13773,7 @@
           <p:cNvPr id="9" name="creative_background_master">
             <a:extLst>
               <a:ext uri="{FF2B5EF4-FFF2-40B4-BE49-F238E27FC236}">
-                <a16:creationId xmlns:a16="http://schemas.microsoft.com/office/drawing/2014/main" id="{0F7B903A-BC18-C982-A946-8F5B89887586}"/>
+                <a16:creationId xmlns:a16="http://schemas.microsoft.com/office/drawing/2014/main" id="{15710686-1A9D-8E9E-81D6-72CAC3FAB8C9}"/>
               </a:ext>
             </a:extLst>
           </p:cNvPr>
@@ -13934,9 +13934,9 @@
             </a:lvl1pPr>
           </a:lstStyle>
           <a:p>
-            <a:fld id="{402E347B-D365-49E2-9289-3F52BA4D6BD6}" type="datetimeFigureOut">
+            <a:fld id="{953E3269-9E78-4D7E-9A3E-1CB27CD92A12}" type="datetimeFigureOut">
               <a:rPr lang="en-US" smtClean="0"/>
-              <a:t>10/3/2026</a:t>
+              <a:t>10/4/2026</a:t>
             </a:fld>
             <a:endParaRPr lang="en-US"/>
           </a:p>
@@ -14016,7 +14016,7 @@
             </a:lvl1pPr>
           </a:lstStyle>
           <a:p>
-            <a:fld id="{59E99942-F5A0-42B8-85FC-8F53E2428FF4}" type="slidenum">
+            <a:fld id="{F16D5B57-F7EE-4146-9EF5-FE1410ECAA61}" type="slidenum">
               <a:rPr lang="en-US" smtClean="0"/>
               <a:t>‹#›</a:t>
             </a:fld>
@@ -14027,7 +14027,7 @@
     </p:spTree>
     <p:extLst>
       <p:ext uri="{BB962C8B-B14F-4D97-AF65-F5344CB8AC3E}">
-        <p14:creationId xmlns:p14="http://schemas.microsoft.com/office/powerpoint/2010/main" val="3137953373"/>
+        <p14:creationId xmlns:p14="http://schemas.microsoft.com/office/powerpoint/2010/main" val="2030962500"/>
       </p:ext>
     </p:extLst>
   </p:cSld>
